--- a/заняття_9/API_Gateway_serverless.pptx
+++ b/заняття_9/API_Gateway_serverless.pptx
@@ -4,6 +4,9 @@
   <p:sldMasterIdLst>
     <p:sldMasterId id="2147483648" r:id="rId1"/>
   </p:sldMasterIdLst>
+  <p:notesMasterIdLst>
+    <p:notesMasterId r:id="rId12"/>
+  </p:notesMasterIdLst>
   <p:sldIdLst>
     <p:sldId id="256" r:id="rId2"/>
     <p:sldId id="257" r:id="rId3"/>
@@ -16,9 +19,6 @@
     <p:sldId id="264" r:id="rId10"/>
     <p:sldId id="265" r:id="rId11"/>
   </p:sldIdLst>
-  <p:notesMasterIdLst>
-    <p:notesMasterId r:id="rId12"/>
-  </p:notesMasterIdLst>
   <p:sldSz cx="12192000" cy="6858000"/>
   <p:notesSz cx="6858000" cy="12192000"/>
   <p:defaultTextStyle>
@@ -116,7 +116,7 @@
   <p:extLst>
     <p:ext uri="{521415D9-36F7-43E2-AB2F-B90AF26B5E84}">
       <p14:sectionLst xmlns:p14="http://schemas.microsoft.com/office/powerpoint/2010/main">
-        <p14:section name="AWS API Gateway" id="{2bb1c422-8108-873f-37f0-48a3345f7272}">
+        <p14:section name="AWS API Gateway" id="{2BB1C422-8108-873F-37F0-48A3345F7272}">
           <p14:sldIdLst>
             <p14:sldId id="256"/>
             <p14:sldId id="257"/>
@@ -124,14 +124,14 @@
             <p14:sldId id="259"/>
           </p14:sldIdLst>
         </p14:section>
-        <p14:section name="Інтеграція Lambda + API Gateway + DynamoDB" id="{2680c9b4-f3ba-e3f5-57f0-d3bee32952bf}">
+        <p14:section name="Інтеграція Lambda + API Gateway + DynamoDB" id="{2680C9B4-F3BA-E3F5-57F0-D3BEE32952BF}">
           <p14:sldIdLst>
             <p14:sldId id="260"/>
             <p14:sldId id="261"/>
             <p14:sldId id="262"/>
           </p14:sldIdLst>
         </p14:section>
-        <p14:section name="Практичний скрізний сценарій" id="{6f408a71-6a23-f2b8-cf6a-12b0f35ecd52}">
+        <p14:section name="Практичний скрізний сценарій" id="{6F408A71-6A23-F2B8-CF6A-12B0F35ECD52}">
           <p14:sldIdLst>
             <p14:sldId id="263"/>
             <p14:sldId id="264"/>
@@ -169,234 +169,10 @@
           <a:chExt cx="0" cy="0"/>
         </a:xfrm>
       </p:grpSpPr>
-      <p:sp>
-        <p:nvSpPr>
-          <p:cNvPr id="2" name="Header Placeholder 1"/>
-          <p:cNvSpPr>
-            <a:spLocks noGrp="1"/>
-          </p:cNvSpPr>
-          <p:nvPr>
-            <p:ph type="hdr" sz="quarter"/>
-          </p:nvPr>
-        </p:nvSpPr>
-        <p:spPr>
-          <a:xfrm>
-            <a:off x="0" y="0"/>
-            <a:ext cx="2971800" cy="458788"/>
-          </a:xfrm>
-          <a:prstGeom prst="rect">
-            <a:avLst/>
-          </a:prstGeom>
-        </p:spPr>
-        <p:txBody>
-          <a:bodyPr vert="horz" lIns="91440" tIns="45720" rIns="91440" bIns="45720" rtlCol="0"/>
-          <a:lstStyle>
-            <a:lvl1pPr algn="l">
-              <a:defRPr sz="1200"/>
-            </a:lvl1pPr>
-          </a:lstStyle>
-          <a:p>
-            <a:endParaRPr lang="en-US"/>
-          </a:p>
-        </p:txBody>
-      </p:sp>
-      <p:sp>
-        <p:nvSpPr>
-          <p:cNvPr id="3" name="Date Placeholder 2"/>
-          <p:cNvSpPr>
-            <a:spLocks noGrp="1"/>
-          </p:cNvSpPr>
-          <p:nvPr>
-            <p:ph type="dt" idx="1"/>
-          </p:nvPr>
-        </p:nvSpPr>
-        <p:spPr>
-          <a:xfrm>
-            <a:off x="3884613" y="0"/>
-            <a:ext cx="2971800" cy="458788"/>
-          </a:xfrm>
-          <a:prstGeom prst="rect">
-            <a:avLst/>
-          </a:prstGeom>
-        </p:spPr>
-        <p:txBody>
-          <a:bodyPr vert="horz" lIns="91440" tIns="45720" rIns="91440" bIns="45720" rtlCol="0"/>
-          <a:lstStyle>
-            <a:lvl1pPr algn="r">
-              <a:defRPr sz="1200"/>
-            </a:lvl1pPr>
-          </a:lstStyle>
-          <a:p>
-            <a:fld id="{5282F153-3F37-0F45-9E97-73ACFA13230C}" type="datetimeFigureOut">
-              <a:rPr lang="en-US"/>
-              <a:t>7/23/19</a:t>
-            </a:fld>
-            <a:endParaRPr lang="en-US"/>
-          </a:p>
-        </p:txBody>
-      </p:sp>
-      <p:sp>
-        <p:nvSpPr>
-          <p:cNvPr id="4" name="Slide Image Placeholder 3"/>
-          <p:cNvSpPr>
-            <a:spLocks noGrp="1" noRot="1" noChangeAspect="1"/>
-          </p:cNvSpPr>
-          <p:nvPr>
-            <p:ph type="sldImg" idx="2"/>
-          </p:nvPr>
-        </p:nvSpPr>
-        <p:spPr>
-          <a:xfrm>
-            <a:off x="685800" y="1143000"/>
-            <a:ext cx="5486400" cy="3086100"/>
-          </a:xfrm>
-          <a:prstGeom prst="rect">
-            <a:avLst/>
-          </a:prstGeom>
-          <a:noFill/>
-          <a:ln w="12700">
-            <a:solidFill>
-              <a:prstClr val="black"/>
-            </a:solidFill>
-          </a:ln>
-        </p:spPr>
-        <p:txBody>
-          <a:bodyPr vert="horz" lIns="91440" tIns="45720" rIns="91440" bIns="45720" rtlCol="0" anchor="ctr"/>
-          <a:lstStyle/>
-          <a:p>
-            <a:endParaRPr lang="en-US"/>
-          </a:p>
-        </p:txBody>
-      </p:sp>
-      <p:sp>
-        <p:nvSpPr>
-          <p:cNvPr id="5" name="Notes Placeholder 4"/>
-          <p:cNvSpPr>
-            <a:spLocks noGrp="1"/>
-          </p:cNvSpPr>
-          <p:nvPr>
-            <p:ph type="body" sz="quarter" idx="3"/>
-          </p:nvPr>
-        </p:nvSpPr>
-        <p:spPr>
-          <a:xfrm>
-            <a:off x="685800" y="4400550"/>
-            <a:ext cx="5486400" cy="3600450"/>
-          </a:xfrm>
-          <a:prstGeom prst="rect">
-            <a:avLst/>
-          </a:prstGeom>
-        </p:spPr>
-        <p:txBody>
-          <a:bodyPr vert="horz" lIns="91440" tIns="45720" rIns="91440" bIns="45720" rtlCol="0"/>
-          <a:lstStyle/>
-          <a:p>
-            <a:pPr lvl="0"/>
-            <a:r>
-              <a:rPr lang="en-US"/>
-              <a:t>Click to edit Master text styles</a:t>
-            </a:r>
-          </a:p>
-          <a:p>
-            <a:pPr lvl="1"/>
-            <a:r>
-              <a:rPr lang="en-US"/>
-              <a:t>Second level</a:t>
-            </a:r>
-          </a:p>
-          <a:p>
-            <a:pPr lvl="2"/>
-            <a:r>
-              <a:rPr lang="en-US"/>
-              <a:t>Third level</a:t>
-            </a:r>
-          </a:p>
-          <a:p>
-            <a:pPr lvl="3"/>
-            <a:r>
-              <a:rPr lang="en-US"/>
-              <a:t>Fourth level</a:t>
-            </a:r>
-          </a:p>
-          <a:p>
-            <a:pPr lvl="4"/>
-            <a:r>
-              <a:rPr lang="en-US"/>
-              <a:t>Fifth level</a:t>
-            </a:r>
-          </a:p>
-        </p:txBody>
-      </p:sp>
-      <p:sp>
-        <p:nvSpPr>
-          <p:cNvPr id="6" name="Footer Placeholder 5"/>
-          <p:cNvSpPr>
-            <a:spLocks noGrp="1"/>
-          </p:cNvSpPr>
-          <p:nvPr>
-            <p:ph type="ftr" sz="quarter" idx="4"/>
-          </p:nvPr>
-        </p:nvSpPr>
-        <p:spPr>
-          <a:xfrm>
-            <a:off x="0" y="8685213"/>
-            <a:ext cx="2971800" cy="458787"/>
-          </a:xfrm>
-          <a:prstGeom prst="rect">
-            <a:avLst/>
-          </a:prstGeom>
-        </p:spPr>
-        <p:txBody>
-          <a:bodyPr vert="horz" lIns="91440" tIns="45720" rIns="91440" bIns="45720" rtlCol="0" anchor="b"/>
-          <a:lstStyle>
-            <a:lvl1pPr algn="l">
-              <a:defRPr sz="1200"/>
-            </a:lvl1pPr>
-          </a:lstStyle>
-          <a:p>
-            <a:endParaRPr lang="en-US"/>
-          </a:p>
-        </p:txBody>
-      </p:sp>
-      <p:sp>
-        <p:nvSpPr>
-          <p:cNvPr id="7" name="Slide Number Placeholder 6"/>
-          <p:cNvSpPr>
-            <a:spLocks noGrp="1"/>
-          </p:cNvSpPr>
-          <p:nvPr>
-            <p:ph type="sldNum" sz="quarter" idx="5"/>
-          </p:nvPr>
-        </p:nvSpPr>
-        <p:spPr>
-          <a:xfrm>
-            <a:off x="3884613" y="8685213"/>
-            <a:ext cx="2971800" cy="458787"/>
-          </a:xfrm>
-          <a:prstGeom prst="rect">
-            <a:avLst/>
-          </a:prstGeom>
-        </p:spPr>
-        <p:txBody>
-          <a:bodyPr vert="horz" lIns="91440" tIns="45720" rIns="91440" bIns="45720" rtlCol="0" anchor="b"/>
-          <a:lstStyle>
-            <a:lvl1pPr algn="r">
-              <a:defRPr sz="1200"/>
-            </a:lvl1pPr>
-          </a:lstStyle>
-          <a:p>
-            <a:fld id="{CE5E9CC1-C706-0F49-92D6-E571CC5EEA8F}" type="slidenum">
-              <a:rPr lang="en-US"/>
-              <a:t>‹#›</a:t>
-            </a:fld>
-            <a:endParaRPr lang="en-US"/>
-          </a:p>
-        </p:txBody>
-      </p:sp>
     </p:spTree>
     <p:extLst>
       <p:ext uri="{BB962C8B-B14F-4D97-AF65-F5344CB8AC3E}">
-        <p14:creationId xmlns:p14="http://schemas.microsoft.com/office/powerpoint/2010/main" val="1024086991"/>
+        <p14:creationId xmlns:p14="http://schemas.microsoft.com/office/powerpoint/2010/main" val="2138103646"/>
       </p:ext>
     </p:extLst>
   </p:cSld>
@@ -544,7 +320,6 @@
               <a:rPr lang="en-US" dirty="0"/>
               <a:t>Вітаю! Сьогодні ми зберемо маленький, але повноцінний бекенд без жодного сервера. Подивіться на схему справа: клієнт надсилає запит, API Gateway його приймає, Lambda виконує код, а DynamoDB зберігає дані. План заняття: спершу розбираємося, що таке API Gateway і які бувають API, потім підключаємо Lambda, налаштовуємо безпеку, ліміти та кеш, і наприкінці разом проходимо повний практичний сценарій з тестуванням у Postman.</a:t>
             </a:r>
-            <a:endParaRPr lang="en-US" dirty="0"/>
           </a:p>
         </p:txBody>
       </p:sp>
@@ -632,7 +407,6 @@
               <a:rPr lang="en-US" dirty="0"/>
               <a:t>Фінал: перевіряємо, чи все працює. У Postman створюємо змінну base_url з адресою stage, додаємо заголовок x-api-key і надсилаємо POST із JSON. Очікуємо 201. Потім GET /items/1 — має повернутися наш елемент. Так само це можна зробити з терміналу через curl. Внизу — коди відповідей, за якими ви діагностуватимете проблеми: 403 — з ключем чи авторизацією, 404 — немає запису, 429 — спрацювали ліміти, 502 — Lambda повернула відповідь у неправильному форматі. Підсумок: ви пройшли шлях від запиту до даних у DynamoDB без жодного власного сервера. Домашнє завдання: додайте метод DELETE та usage plan із лімітом.</a:t>
             </a:r>
-            <a:endParaRPr lang="en-US" dirty="0"/>
           </a:p>
         </p:txBody>
       </p:sp>
@@ -720,7 +494,6 @@
               <a:rPr lang="en-US" dirty="0"/>
               <a:t>Питання до групи: що буде, якщо кожен клієнт звертатиметься напряму до вашої Lambda чи бази? Доведеться самим перевіряти ключі, рахувати ліміти, вести логи в кожному сервісі. API Gateway бере це на себе: це «рецепція» вашого бекенду. Клієнти (сайт, мобільний застосунок, IoT) знають лише одну адресу, а Gateway вирішує, куди направити запит, чи пускати його і чи не забагато їх одночасно. Внизу п'ять ключових можливостей — до кожної ми ще повернемося на практиці.</a:t>
             </a:r>
-            <a:endParaRPr lang="en-US" dirty="0"/>
           </a:p>
         </p:txBody>
       </p:sp>
@@ -808,7 +581,6 @@
               <a:rPr lang="en-US" dirty="0"/>
               <a:t>У API Gateway є три різновиди API. REST API — найбагатший за функціями: саме він вміє API-ключі, usage plans і кешування. HTTP API — спрощений і дешевший, підходить, коли потрібні швидкість і JWT-токени. WebSocket API потрібен, коли сервер має сам надсилати дані клієнту: чат, сповіщення, ігри. Для нашого заняття беремо REST API, бо хочу показати вам усі інструменти: ключі, ліміти, кеш.</a:t>
             </a:r>
-            <a:endParaRPr lang="en-US" dirty="0"/>
           </a:p>
         </p:txBody>
       </p:sp>
@@ -896,7 +668,6 @@
               <a:rPr lang="en-US" dirty="0"/>
               <a:t>Показую на живому прикладі в консолі AWS. Крок 1 — створюємо REST API. Крок 2 — додаємо ресурс, це частина URL, наприклад /items. Крок 3 — до ресурсу додаємо метод: GET, POST. Крок 4 — вказуємо інтеграцію, тобто куди передати запит; поки це може бути Mock, далі підключимо Lambda. Крок 5 — Deploy у stage. Запам'ятайте головне: поки ви не зробили Deploy, ваші зміни не діють. Ліворуч внизу — ті самі дії через AWS CLI, для тих, хто любить термінал.</a:t>
             </a:r>
-            <a:endParaRPr lang="en-US" dirty="0"/>
           </a:p>
         </p:txBody>
       </p:sp>
@@ -984,7 +755,6 @@
               <a:rPr lang="en-US" dirty="0"/>
               <a:t>Тут ключова ідея: Lambda нічого не знає про HTTP. Вона отримує звичайний JSON-об'єкт event, який зібрав для неї API Gateway. У ньому є метод, шлях, параметри з URL, заголовки й тіло. Зверніть увагу: тіло приходить рядком, його треба розпарсити через json.loads. У відповідь Lambda повертає словник із statusCode, headers і body. Якщо цього формату немає — Gateway відповість 502. Це найпоширеніша помилка на практиці, тому запам'ятайте цей слайд.</a:t>
             </a:r>
-            <a:endParaRPr lang="en-US" dirty="0"/>
           </a:p>
         </p:txBody>
       </p:sp>
@@ -1072,7 +842,6 @@
               <a:rPr lang="en-US" dirty="0"/>
               <a:t>Є чотири способи захистити метод. API-ключ — це радше «номерок клієнта»: він потрібен, щоб застосувати ліміти. IAM підходить для внутрішніх викликів між сервісами AWS. Cognito — коли у вас є користувачі зі входом у застосунок. Lambda authorizer — коли потрібна власна логіка перевірки. Праворуч покроково, як підключити ключ. І окремо підкреслюю: API-ключ не є справжньою безпекою, бо його можна побачити в запитах. Для реального захисту беріть один із трьох інших способів.</a:t>
             </a:r>
-            <a:endParaRPr lang="en-US" dirty="0"/>
           </a:p>
         </p:txBody>
       </p:sp>
@@ -1160,7 +929,6 @@
               <a:rPr lang="en-US" dirty="0"/>
               <a:t>Ліміти. Уявіть відро з токенами: кожен запит забирає один токен, а токени повертаються зі швидкістю rate. Burst — це розмір відра, тобто короткий сплеск, який ми дозволяємо. Quota — загальний ліміт на добу. Якщо відро порожнє, клієнт отримує помилку 429. Це захищає і ваш бекенд, і ваш рахунок за AWS. Кеш. Перший запит (MISS) іде до Lambda та бази, а відповідь запам'ятовується на TTL секунд. Наступні запити (HIT) віддаються одразу. Це швидше й дешевше, але кеш платний і підходить для даних, що рідко змінюються.</a:t>
             </a:r>
-            <a:endParaRPr lang="en-US" dirty="0"/>
           </a:p>
         </p:txBody>
       </p:sp>
@@ -1248,7 +1016,6 @@
               <a:rPr lang="en-US" dirty="0"/>
               <a:t>Тепер збираємо все разом. Наш сценарій простий: API з двома маршрутами. POST /items зберігає елемент, GET /items/{id} його читає. Схема зверху — це шлях запиту. Зверніть увагу на два допоміжні елементи: Lambda потрібна IAM-роль із правами на DynamoDB, інакше вона отримає помилку доступу, а CloudWatch Logs — це наше вікно для налагодження. Внизу п'ять кроків, які ми зараз пройдемо по черзі. Хто відстане — не хвилюйтеся, код на наступному слайді.</a:t>
             </a:r>
-            <a:endParaRPr lang="en-US" dirty="0"/>
           </a:p>
         </p:txBody>
       </p:sp>
@@ -1336,7 +1103,6 @@
               <a:rPr lang="en-US" dirty="0"/>
               <a:t>Розбираємо код по частинах. Зверху — підключення до таблиці; назву беремо зі змінної оточення, щоб не «зашивати» її в код. У handler дивимося на метод. Для POST розпаршуємо body і викликаємо put_item. Для GET беремо id із pathParameters і викликаємо get_item. Якщо елемента немає — повертаємо 404, якщо метод невідомий — 405. Функція resp() збирає відповідь у форматі, який чекає API Gateway. default=str потрібен, бо числа з DynamoDB приходять як Decimal, а json.dumps їх сам не вміє серіалізувати.</a:t>
             </a:r>
-            <a:endParaRPr lang="en-US" dirty="0"/>
           </a:p>
         </p:txBody>
       </p:sp>
@@ -1414,6 +1180,7 @@
         <a:solidFill>
           <a:schemeClr val="tx1"/>
         </a:solidFill>
+        <a:effectLst/>
       </p:bgPr>
     </p:bg>
     <p:spTree>
@@ -1433,9 +1200,11 @@
       <p:sp>
         <p:nvSpPr>
           <p:cNvPr id="2" name="Text 0"/>
-          <p:cNvSpPr/>
+          <p:cNvSpPr>
+            <a:spLocks noGrp="1"/>
+          </p:cNvSpPr>
           <p:nvPr>
-            <p:ph idx="100" type="title" hasCustomPrompt="1"/>
+            <p:ph type="title" idx="100" hasCustomPrompt="1"/>
           </p:nvPr>
         </p:nvSpPr>
         <p:spPr>
@@ -1452,7 +1221,7 @@
         <p:txBody>
           <a:bodyPr wrap="square" rtlCol="0"/>
           <a:lstStyle>
-            <a:lvl1pPr algn="l" indent="0" marL="0">
+            <a:lvl1pPr marL="0" indent="0" algn="l">
               <a:buNone/>
               <a:defRPr lang="en-US" sz="3400" b="1" dirty="0">
                 <a:solidFill>
@@ -1462,7 +1231,7 @@
             </a:lvl1pPr>
           </a:lstStyle>
           <a:p>
-            <a:pPr algn="l" indent="0" marL="0">
+            <a:pPr marL="0" indent="0" algn="l">
               <a:buNone/>
             </a:pPr>
             <a:endParaRPr lang="en-US" sz="3400" dirty="0"/>
@@ -1489,7 +1258,7 @@
           </a:prstGeom>
           <a:extLst>
             <a:ext uri="{C572A759-6A51-4108-AA02-DFA0A04FC94B}">
-              <ma14:wrappingTextBoxFlag xmlns:ma14="http://schemas.microsoft.com/office/mac/drawingml/2011/main" val="0"/>
+              <ma14:wrappingTextBoxFlag xmlns:ma14="http://schemas.microsoft.com/office/mac/drawingml/2011/main" xmlns="" val="0"/>
             </a:ext>
           </a:extLst>
         </p:spPr>
@@ -1507,8 +1276,8 @@
           <a:p>
             <a:pPr algn="r"/>
             <a:fld id="{F7021451-1387-4CA6-816F-3879F97B5CBC}" type="slidenum">
-              <a:rPr b="0" lang="en-US"/>
-              <a:t>1002</a:t>
+              <a:rPr lang="en-US" b="0"/>
+              <a:t>‹#›</a:t>
             </a:fld>
             <a:endParaRPr lang="en-US"/>
           </a:p>
@@ -1530,6 +1299,7 @@
         <a:solidFill>
           <a:schemeClr val="bg2"/>
         </a:solidFill>
+        <a:effectLst/>
       </p:bgPr>
     </p:bg>
     <p:spTree>
@@ -1549,9 +1319,11 @@
       <p:sp>
         <p:nvSpPr>
           <p:cNvPr id="2" name="Text 0"/>
-          <p:cNvSpPr/>
+          <p:cNvSpPr>
+            <a:spLocks noGrp="1"/>
+          </p:cNvSpPr>
           <p:nvPr>
-            <p:ph idx="100" type="title" hasCustomPrompt="1"/>
+            <p:ph type="title" idx="100" hasCustomPrompt="1"/>
           </p:nvPr>
         </p:nvSpPr>
         <p:spPr>
@@ -1568,7 +1340,7 @@
         <p:txBody>
           <a:bodyPr wrap="square" rtlCol="0"/>
           <a:lstStyle>
-            <a:lvl1pPr algn="l" indent="0" marL="0">
+            <a:lvl1pPr marL="0" indent="0" algn="l">
               <a:buNone/>
               <a:defRPr lang="en-US" sz="3400" b="1" dirty="0">
                 <a:solidFill>
@@ -1578,7 +1350,7 @@
             </a:lvl1pPr>
           </a:lstStyle>
           <a:p>
-            <a:pPr algn="l" indent="0" marL="0">
+            <a:pPr marL="0" indent="0" algn="l">
               <a:buNone/>
             </a:pPr>
             <a:endParaRPr lang="en-US" sz="3400" dirty="0"/>
@@ -1605,7 +1377,7 @@
           </a:prstGeom>
           <a:extLst>
             <a:ext uri="{C572A759-6A51-4108-AA02-DFA0A04FC94B}">
-              <ma14:wrappingTextBoxFlag xmlns:ma14="http://schemas.microsoft.com/office/mac/drawingml/2011/main" val="0"/>
+              <ma14:wrappingTextBoxFlag xmlns:ma14="http://schemas.microsoft.com/office/mac/drawingml/2011/main" xmlns="" val="0"/>
             </a:ext>
           </a:extLst>
         </p:spPr>
@@ -1623,8 +1395,8 @@
           <a:p>
             <a:pPr algn="r"/>
             <a:fld id="{F7021451-1387-4CA6-816F-3879F97B5CBC}" type="slidenum">
-              <a:rPr b="0" lang="en-US"/>
-              <a:t>1003</a:t>
+              <a:rPr lang="en-US" b="0"/>
+              <a:t>‹#›</a:t>
             </a:fld>
             <a:endParaRPr lang="en-US"/>
           </a:p>
@@ -1646,6 +1418,7 @@
         <a:solidFill>
           <a:schemeClr val="tx1"/>
         </a:solidFill>
+        <a:effectLst/>
       </p:bgPr>
     </p:bg>
     <p:spTree>
@@ -1665,9 +1438,11 @@
       <p:sp>
         <p:nvSpPr>
           <p:cNvPr id="2" name="Text 0"/>
-          <p:cNvSpPr/>
+          <p:cNvSpPr>
+            <a:spLocks noGrp="1"/>
+          </p:cNvSpPr>
           <p:nvPr>
-            <p:ph idx="100" type="title" hasCustomPrompt="1"/>
+            <p:ph type="title" idx="100" hasCustomPrompt="1"/>
           </p:nvPr>
         </p:nvSpPr>
         <p:spPr>
@@ -1684,7 +1459,7 @@
         <p:txBody>
           <a:bodyPr wrap="square" rtlCol="0"/>
           <a:lstStyle>
-            <a:lvl1pPr algn="l" indent="0" marL="0">
+            <a:lvl1pPr marL="0" indent="0" algn="l">
               <a:buNone/>
               <a:defRPr lang="en-US" sz="4000" b="1" dirty="0">
                 <a:solidFill>
@@ -1694,7 +1469,7 @@
             </a:lvl1pPr>
           </a:lstStyle>
           <a:p>
-            <a:pPr algn="l" indent="0" marL="0">
+            <a:pPr marL="0" indent="0" algn="l">
               <a:buNone/>
             </a:pPr>
             <a:endParaRPr lang="en-US" sz="4000" dirty="0"/>
@@ -1704,9 +1479,11 @@
       <p:sp>
         <p:nvSpPr>
           <p:cNvPr id="3" name="Text 0"/>
-          <p:cNvSpPr/>
+          <p:cNvSpPr>
+            <a:spLocks noGrp="1"/>
+          </p:cNvSpPr>
           <p:nvPr>
-            <p:ph idx="101" type="body" hasCustomPrompt="1"/>
+            <p:ph type="body" idx="101" hasCustomPrompt="1"/>
           </p:nvPr>
         </p:nvSpPr>
         <p:spPr>
@@ -1723,7 +1500,7 @@
         <p:txBody>
           <a:bodyPr wrap="square" rtlCol="0"/>
           <a:lstStyle>
-            <a:lvl1pPr algn="l" indent="0" marL="0">
+            <a:lvl1pPr marL="0" indent="0" algn="l">
               <a:buNone/>
               <a:defRPr lang="en-US" sz="2000" dirty="0">
                 <a:solidFill>
@@ -1733,7 +1510,7 @@
             </a:lvl1pPr>
           </a:lstStyle>
           <a:p>
-            <a:pPr algn="l" indent="0" marL="0">
+            <a:pPr marL="0" indent="0" algn="l">
               <a:buNone/>
             </a:pPr>
             <a:endParaRPr lang="en-US" sz="2000" dirty="0"/>
@@ -1751,6 +1528,11 @@
 <file path=ppt/slideMasters/slideMaster1.xml><?xml version="1.0" encoding="utf-8"?>
 <p:sldMaster xmlns:a="http://schemas.openxmlformats.org/drawingml/2006/main" xmlns:r="http://schemas.openxmlformats.org/officeDocument/2006/relationships" xmlns:p="http://schemas.openxmlformats.org/presentationml/2006/main">
   <p:cSld>
+    <p:bg>
+      <p:bgRef idx="1001">
+        <a:schemeClr val="bg1"/>
+      </p:bgRef>
+    </p:bg>
     <p:spTree>
       <p:nvGrpSpPr>
         <p:cNvPr id="1" name=""/>
@@ -1785,7 +1567,7 @@
           </a:prstGeom>
           <a:extLst>
             <a:ext uri="{C572A759-6A51-4108-AA02-DFA0A04FC94B}">
-              <ma14:wrappingTextBoxFlag xmlns:ma14="http://schemas.microsoft.com/office/mac/drawingml/2011/main" val="0"/>
+              <ma14:wrappingTextBoxFlag xmlns:ma14="http://schemas.microsoft.com/office/mac/drawingml/2011/main" xmlns="" val="0"/>
             </a:ext>
           </a:extLst>
         </p:spPr>
@@ -1803,8 +1585,8 @@
           <a:p>
             <a:pPr algn="r"/>
             <a:fld id="{F7021451-1387-4CA6-816F-3879F97B5CBC}" type="slidenum">
-              <a:rPr b="0" lang="en-US"/>
-              <a:t>null</a:t>
+              <a:rPr lang="en-US" b="0"/>
+              <a:t>‹#›</a:t>
             </a:fld>
             <a:endParaRPr lang="en-US"/>
           </a:p>
@@ -2093,9 +1875,11 @@
       <p:sp>
         <p:nvSpPr>
           <p:cNvPr id="2" name="Text 0"/>
-          <p:cNvSpPr/>
+          <p:cNvSpPr>
+            <a:spLocks noGrp="1"/>
+          </p:cNvSpPr>
           <p:nvPr>
-            <p:ph idx="100" type="title" hasCustomPrompt="1"/>
+            <p:ph type="title" idx="100" hasCustomPrompt="1"/>
           </p:nvPr>
         </p:nvSpPr>
         <p:spPr>
@@ -2113,7 +1897,7 @@
           <a:bodyPr wrap="square" lIns="0" tIns="0" rIns="0" bIns="0" rtlCol="0" anchor="b"/>
           <a:lstStyle/>
           <a:p>
-            <a:pPr algn="l" indent="0" marL="0">
+            <a:pPr marL="0" indent="0" algn="l">
               <a:buNone/>
             </a:pPr>
             <a:r>
@@ -2125,44 +1909,6 @@
               <a:t>API Gateway та інтеграція serverless-сервісів</a:t>
             </a:r>
             <a:endParaRPr lang="en-US" sz="4000" dirty="0"/>
-          </a:p>
-        </p:txBody>
-      </p:sp>
-      <p:sp>
-        <p:nvSpPr>
-          <p:cNvPr id="3" name="Text 0"/>
-          <p:cNvSpPr/>
-          <p:nvPr>
-            <p:ph idx="101" type="body" hasCustomPrompt="1"/>
-          </p:nvPr>
-        </p:nvSpPr>
-        <p:spPr>
-          <a:xfrm>
-            <a:off x="731520" y="4343400"/>
-            <a:ext cx="6400800" cy="914400"/>
-          </a:xfrm>
-          <a:prstGeom prst="rect">
-            <a:avLst/>
-          </a:prstGeom>
-          <a:noFill/>
-          <a:ln/>
-        </p:spPr>
-        <p:txBody>
-          <a:bodyPr wrap="square" lIns="0" tIns="0" rIns="0" bIns="0" rtlCol="0" anchor="t"/>
-          <a:lstStyle/>
-          <a:p>
-            <a:pPr algn="l" indent="0" marL="0">
-              <a:buNone/>
-            </a:pPr>
-            <a:r>
-              <a:rPr lang="en-US" sz="2000" dirty="0">
-                <a:solidFill>
-                  <a:schemeClr val="bg2"/>
-                </a:solidFill>
-              </a:rPr>
-              <a:t>Практична лекція: від першого HTTP-запиту до запису в DynamoDB</a:t>
-            </a:r>
-            <a:endParaRPr lang="en-US" sz="2000" dirty="0"/>
           </a:p>
         </p:txBody>
       </p:sp>
@@ -2187,16 +1933,49 @@
           <a:bodyPr wrap="square" lIns="0" tIns="0" rIns="0" bIns="0" rtlCol="0" anchor="t"/>
           <a:lstStyle/>
           <a:p>
-            <a:pPr indent="0" marL="0">
-              <a:buNone/>
-            </a:pPr>
-            <a:r>
-              <a:rPr lang="en-US" sz="1400" b="1" spc="400" kern="0" dirty="0">
-                <a:solidFill>
-                  <a:schemeClr val="accent1"/>
-                </a:solidFill>
-              </a:rPr>
-              <a:t>AWS · SERVERLESS · ЛЕКЦІЯ</a:t>
+            <a:r>
+              <a:rPr lang="uk-UA" sz="1400" b="1" kern="0" spc="200" dirty="0">
+                <a:solidFill>
+                  <a:srgbClr val="FF9900"/>
+                </a:solidFill>
+                <a:latin typeface="Calibri" pitchFamily="34" charset="0"/>
+                <a:ea typeface="Calibri" pitchFamily="34" charset="-122"/>
+                <a:cs typeface="Calibri" pitchFamily="34" charset="-120"/>
+              </a:rPr>
+              <a:t>СТВОРЕННЯ </a:t>
+            </a:r>
+            <a:r>
+              <a:rPr lang="en-US" sz="1400" b="1" kern="0" spc="200" dirty="0">
+                <a:solidFill>
+                  <a:srgbClr val="FF9900"/>
+                </a:solidFill>
+                <a:latin typeface="Calibri" pitchFamily="34" charset="0"/>
+                <a:ea typeface="Calibri" pitchFamily="34" charset="-122"/>
+                <a:cs typeface="Calibri" pitchFamily="34" charset="-120"/>
+              </a:rPr>
+              <a:t>ХМАРНИХ </a:t>
+            </a:r>
+            <a:r>
+              <a:rPr lang="uk-UA" sz="1400" b="1" kern="0" spc="200" dirty="0">
+                <a:solidFill>
+                  <a:srgbClr val="FF9900"/>
+                </a:solidFill>
+                <a:latin typeface="Calibri" pitchFamily="34" charset="0"/>
+                <a:ea typeface="Calibri" pitchFamily="34" charset="-122"/>
+                <a:cs typeface="Calibri" pitchFamily="34" charset="-120"/>
+              </a:rPr>
+              <a:t>РІШЕНЬ З ВИКОРИСТАННЯМ </a:t>
+            </a:r>
+            <a:r>
+              <a:rPr lang="en-US" sz="1400" b="1" kern="0" spc="200" dirty="0">
+                <a:solidFill>
+                  <a:srgbClr val="FF9900"/>
+                </a:solidFill>
+                <a:latin typeface="Calibri" pitchFamily="34" charset="0"/>
+                <a:ea typeface="Calibri" pitchFamily="34" charset="-122"/>
+                <a:cs typeface="Calibri" pitchFamily="34" charset="-120"/>
+              </a:rPr>
+              <a:t>AWS</a:t>
             </a:r>
             <a:endParaRPr lang="en-US" sz="1400" dirty="0"/>
           </a:p>
@@ -2223,6 +2002,13 @@
           </a:solidFill>
           <a:ln/>
         </p:spPr>
+        <p:txBody>
+          <a:bodyPr/>
+          <a:lstStyle/>
+          <a:p>
+            <a:endParaRPr lang="en-UA"/>
+          </a:p>
+        </p:txBody>
       </p:sp>
       <p:sp>
         <p:nvSpPr>
@@ -2243,17 +2029,24 @@
           </a:solidFill>
           <a:ln/>
         </p:spPr>
+        <p:txBody>
+          <a:bodyPr/>
+          <a:lstStyle/>
+          <a:p>
+            <a:endParaRPr lang="en-UA"/>
+          </a:p>
+        </p:txBody>
       </p:sp>
       <p:pic>
         <p:nvPicPr>
-          <p:cNvPr id="7" name="icon-4" descr="Desktop icon">    </p:cNvPr>
+          <p:cNvPr id="7" name="icon-4" descr="Desktop icon"/>
           <p:cNvPicPr>
             <a:picLocks noChangeAspect="1"/>
           </p:cNvPicPr>
           <p:nvPr/>
         </p:nvPicPr>
         <p:blipFill>
-          <a:blip r:embed="rId1"/>
+          <a:blip r:embed="rId3"/>
           <a:stretch>
             <a:fillRect/>
           </a:stretch>
@@ -2289,7 +2082,7 @@
           <a:bodyPr wrap="square" lIns="0" tIns="0" rIns="0" bIns="0" rtlCol="0" anchor="t"/>
           <a:lstStyle/>
           <a:p>
-            <a:pPr indent="0" marL="0">
+            <a:pPr marL="0" indent="0">
               <a:buNone/>
             </a:pPr>
             <a:r>
@@ -2325,7 +2118,7 @@
           <a:bodyPr wrap="square" lIns="0" tIns="0" rIns="0" bIns="0" rtlCol="0" anchor="t"/>
           <a:lstStyle/>
           <a:p>
-            <a:pPr indent="0" marL="0">
+            <a:pPr marL="0" indent="0">
               <a:buNone/>
             </a:pPr>
             <a:r>
@@ -2363,6 +2156,13 @@
             <a:tailEnd type="triangle"/>
           </a:ln>
         </p:spPr>
+        <p:txBody>
+          <a:bodyPr/>
+          <a:lstStyle/>
+          <a:p>
+            <a:endParaRPr lang="en-UA"/>
+          </a:p>
+        </p:txBody>
       </p:sp>
       <p:sp>
         <p:nvSpPr>
@@ -2385,6 +2185,13 @@
           </a:solidFill>
           <a:ln/>
         </p:spPr>
+        <p:txBody>
+          <a:bodyPr/>
+          <a:lstStyle/>
+          <a:p>
+            <a:endParaRPr lang="en-UA"/>
+          </a:p>
+        </p:txBody>
       </p:sp>
       <p:sp>
         <p:nvSpPr>
@@ -2405,17 +2212,24 @@
           </a:solidFill>
           <a:ln/>
         </p:spPr>
+        <p:txBody>
+          <a:bodyPr/>
+          <a:lstStyle/>
+          <a:p>
+            <a:endParaRPr lang="en-UA"/>
+          </a:p>
+        </p:txBody>
       </p:sp>
       <p:pic>
         <p:nvPicPr>
-          <p:cNvPr id="13" name="icon-10" descr="NetworkWired icon">    </p:cNvPr>
+          <p:cNvPr id="13" name="icon-10" descr="NetworkWired icon"/>
           <p:cNvPicPr>
             <a:picLocks noChangeAspect="1"/>
           </p:cNvPicPr>
           <p:nvPr/>
         </p:nvPicPr>
         <p:blipFill>
-          <a:blip r:embed="rId2"/>
+          <a:blip r:embed="rId4"/>
           <a:stretch>
             <a:fillRect/>
           </a:stretch>
@@ -2451,7 +2265,7 @@
           <a:bodyPr wrap="square" lIns="0" tIns="0" rIns="0" bIns="0" rtlCol="0" anchor="t"/>
           <a:lstStyle/>
           <a:p>
-            <a:pPr indent="0" marL="0">
+            <a:pPr marL="0" indent="0">
               <a:buNone/>
             </a:pPr>
             <a:r>
@@ -2487,7 +2301,7 @@
           <a:bodyPr wrap="square" lIns="0" tIns="0" rIns="0" bIns="0" rtlCol="0" anchor="t"/>
           <a:lstStyle/>
           <a:p>
-            <a:pPr indent="0" marL="0">
+            <a:pPr marL="0" indent="0">
               <a:buNone/>
             </a:pPr>
             <a:r>
@@ -2525,6 +2339,13 @@
             <a:tailEnd type="triangle"/>
           </a:ln>
         </p:spPr>
+        <p:txBody>
+          <a:bodyPr/>
+          <a:lstStyle/>
+          <a:p>
+            <a:endParaRPr lang="en-UA"/>
+          </a:p>
+        </p:txBody>
       </p:sp>
       <p:sp>
         <p:nvSpPr>
@@ -2547,6 +2368,13 @@
           </a:solidFill>
           <a:ln/>
         </p:spPr>
+        <p:txBody>
+          <a:bodyPr/>
+          <a:lstStyle/>
+          <a:p>
+            <a:endParaRPr lang="en-UA"/>
+          </a:p>
+        </p:txBody>
       </p:sp>
       <p:sp>
         <p:nvSpPr>
@@ -2567,17 +2395,24 @@
           </a:solidFill>
           <a:ln/>
         </p:spPr>
+        <p:txBody>
+          <a:bodyPr/>
+          <a:lstStyle/>
+          <a:p>
+            <a:endParaRPr lang="en-UA"/>
+          </a:p>
+        </p:txBody>
       </p:sp>
       <p:pic>
         <p:nvPicPr>
-          <p:cNvPr id="19" name="icon-16" descr="Bolt icon">    </p:cNvPr>
+          <p:cNvPr id="19" name="icon-16" descr="Bolt icon"/>
           <p:cNvPicPr>
             <a:picLocks noChangeAspect="1"/>
           </p:cNvPicPr>
           <p:nvPr/>
         </p:nvPicPr>
         <p:blipFill>
-          <a:blip r:embed="rId3"/>
+          <a:blip r:embed="rId5"/>
           <a:stretch>
             <a:fillRect/>
           </a:stretch>
@@ -2613,7 +2448,7 @@
           <a:bodyPr wrap="square" lIns="0" tIns="0" rIns="0" bIns="0" rtlCol="0" anchor="t"/>
           <a:lstStyle/>
           <a:p>
-            <a:pPr indent="0" marL="0">
+            <a:pPr marL="0" indent="0">
               <a:buNone/>
             </a:pPr>
             <a:r>
@@ -2649,7 +2484,7 @@
           <a:bodyPr wrap="square" lIns="0" tIns="0" rIns="0" bIns="0" rtlCol="0" anchor="t"/>
           <a:lstStyle/>
           <a:p>
-            <a:pPr indent="0" marL="0">
+            <a:pPr marL="0" indent="0">
               <a:buNone/>
             </a:pPr>
             <a:r>
@@ -2687,6 +2522,13 @@
             <a:tailEnd type="triangle"/>
           </a:ln>
         </p:spPr>
+        <p:txBody>
+          <a:bodyPr/>
+          <a:lstStyle/>
+          <a:p>
+            <a:endParaRPr lang="en-UA"/>
+          </a:p>
+        </p:txBody>
       </p:sp>
       <p:sp>
         <p:nvSpPr>
@@ -2709,6 +2551,13 @@
           </a:solidFill>
           <a:ln/>
         </p:spPr>
+        <p:txBody>
+          <a:bodyPr/>
+          <a:lstStyle/>
+          <a:p>
+            <a:endParaRPr lang="en-UA"/>
+          </a:p>
+        </p:txBody>
       </p:sp>
       <p:sp>
         <p:nvSpPr>
@@ -2729,17 +2578,24 @@
           </a:solidFill>
           <a:ln/>
         </p:spPr>
+        <p:txBody>
+          <a:bodyPr/>
+          <a:lstStyle/>
+          <a:p>
+            <a:endParaRPr lang="en-UA"/>
+          </a:p>
+        </p:txBody>
       </p:sp>
       <p:pic>
         <p:nvPicPr>
-          <p:cNvPr id="25" name="icon-22" descr="Database icon">    </p:cNvPr>
+          <p:cNvPr id="25" name="icon-22" descr="Database icon"/>
           <p:cNvPicPr>
             <a:picLocks noChangeAspect="1"/>
           </p:cNvPicPr>
           <p:nvPr/>
         </p:nvPicPr>
         <p:blipFill>
-          <a:blip r:embed="rId4"/>
+          <a:blip r:embed="rId6"/>
           <a:stretch>
             <a:fillRect/>
           </a:stretch>
@@ -2775,7 +2631,7 @@
           <a:bodyPr wrap="square" lIns="0" tIns="0" rIns="0" bIns="0" rtlCol="0" anchor="t"/>
           <a:lstStyle/>
           <a:p>
-            <a:pPr indent="0" marL="0">
+            <a:pPr marL="0" indent="0">
               <a:buNone/>
             </a:pPr>
             <a:r>
@@ -2811,7 +2667,7 @@
           <a:bodyPr wrap="square" lIns="0" tIns="0" rIns="0" bIns="0" rtlCol="0" anchor="t"/>
           <a:lstStyle/>
           <a:p>
-            <a:pPr indent="0" marL="0">
+            <a:pPr marL="0" indent="0">
               <a:buNone/>
             </a:pPr>
             <a:r>
@@ -2854,9 +2710,11 @@
       <p:sp>
         <p:nvSpPr>
           <p:cNvPr id="2" name="Text 0"/>
-          <p:cNvSpPr/>
+          <p:cNvSpPr>
+            <a:spLocks noGrp="1"/>
+          </p:cNvSpPr>
           <p:nvPr>
-            <p:ph idx="100" type="title" hasCustomPrompt="1"/>
+            <p:ph type="title" idx="100" hasCustomPrompt="1"/>
           </p:nvPr>
         </p:nvSpPr>
         <p:spPr>
@@ -2874,7 +2732,7 @@
           <a:bodyPr wrap="square" lIns="0" tIns="0" rIns="0" bIns="0" rtlCol="0" anchor="ctr"/>
           <a:lstStyle/>
           <a:p>
-            <a:pPr algn="l" indent="0" marL="0">
+            <a:pPr marL="0" indent="0" algn="l">
               <a:buNone/>
             </a:pPr>
             <a:r>
@@ -2910,13 +2768,20 @@
           </a:solidFill>
           <a:ln/>
           <a:effectLst>
-            <a:outerShdw sx="100000" sy="100000" kx="0" ky="0" algn="bl" rotWithShape="0" blurRad="101600" dist="25400" dir="5400000">
+            <a:outerShdw blurRad="101600" dist="25400" dir="5400000" algn="bl" rotWithShape="0">
               <a:srgbClr val="000000">
                 <a:alpha val="12000"/>
               </a:srgbClr>
             </a:outerShdw>
           </a:effectLst>
         </p:spPr>
+        <p:txBody>
+          <a:bodyPr/>
+          <a:lstStyle/>
+          <a:p>
+            <a:endParaRPr lang="en-UA"/>
+          </a:p>
+        </p:txBody>
       </p:sp>
       <p:sp>
         <p:nvSpPr>
@@ -2939,7 +2804,7 @@
           <a:bodyPr wrap="square" lIns="0" tIns="0" rIns="0" bIns="0" rtlCol="0" anchor="t"/>
           <a:lstStyle/>
           <a:p>
-            <a:pPr indent="0" marL="0">
+            <a:pPr marL="0" indent="0">
               <a:buNone/>
             </a:pPr>
             <a:r>
@@ -2979,7 +2844,7 @@
           <a:bodyPr wrap="square" lIns="0" tIns="0" rIns="0" bIns="0" rtlCol="0" anchor="ctr"/>
           <a:lstStyle/>
           <a:p>
-            <a:pPr algn="ctr" indent="0" marL="0">
+            <a:pPr marL="0" indent="0" algn="ctr">
               <a:buNone/>
             </a:pPr>
             <a:r>
@@ -3019,7 +2884,7 @@
           <a:bodyPr wrap="square" lIns="0" tIns="0" rIns="0" bIns="0" rtlCol="0" anchor="ctr"/>
           <a:lstStyle/>
           <a:p>
-            <a:pPr algn="l" indent="0" marL="0">
+            <a:pPr marL="0" indent="0" algn="l">
               <a:buNone/>
             </a:pPr>
             <a:r>
@@ -3062,7 +2927,7 @@
           <a:bodyPr wrap="square" lIns="0" tIns="0" rIns="0" bIns="0" rtlCol="0" anchor="ctr"/>
           <a:lstStyle/>
           <a:p>
-            <a:pPr algn="ctr" indent="0" marL="0">
+            <a:pPr marL="0" indent="0" algn="ctr">
               <a:buNone/>
             </a:pPr>
             <a:r>
@@ -3098,7 +2963,7 @@
           <a:bodyPr wrap="square" lIns="0" tIns="0" rIns="0" bIns="0" rtlCol="0" anchor="t"/>
           <a:lstStyle/>
           <a:p>
-            <a:pPr indent="0" marL="0">
+            <a:pPr marL="0" indent="0">
               <a:buNone/>
             </a:pPr>
             <a:r>
@@ -3134,7 +2999,7 @@
           <a:bodyPr wrap="square" lIns="0" tIns="0" rIns="0" bIns="0" rtlCol="0" anchor="t"/>
           <a:lstStyle/>
           <a:p>
-            <a:pPr indent="0" marL="0">
+            <a:pPr marL="0" indent="0">
               <a:buNone/>
             </a:pPr>
             <a:r>
@@ -3173,7 +3038,7 @@
           <a:bodyPr wrap="square" lIns="0" tIns="0" rIns="0" bIns="0" rtlCol="0" anchor="t"/>
           <a:lstStyle/>
           <a:p>
-            <a:pPr indent="0" marL="0">
+            <a:pPr marL="0" indent="0">
               <a:buNone/>
             </a:pPr>
             <a:r>
@@ -3212,7 +3077,7 @@
           <a:bodyPr wrap="square" lIns="0" tIns="0" rIns="0" bIns="0" rtlCol="0" anchor="t"/>
           <a:lstStyle/>
           <a:p>
-            <a:pPr indent="0" marL="0">
+            <a:pPr marL="0" indent="0">
               <a:buNone/>
             </a:pPr>
             <a:r>
@@ -3251,7 +3116,7 @@
           <a:bodyPr wrap="square" lIns="0" tIns="0" rIns="0" bIns="0" rtlCol="0" anchor="t"/>
           <a:lstStyle/>
           <a:p>
-            <a:pPr indent="0" marL="0">
+            <a:pPr marL="0" indent="0">
               <a:buNone/>
             </a:pPr>
             <a:r>
@@ -3290,7 +3155,7 @@
           <a:bodyPr wrap="square" lIns="0" tIns="0" rIns="0" bIns="0" rtlCol="0" anchor="t"/>
           <a:lstStyle/>
           <a:p>
-            <a:pPr indent="0" marL="0">
+            <a:pPr marL="0" indent="0">
               <a:buNone/>
             </a:pPr>
             <a:r>
@@ -3326,7 +3191,7 @@
           <a:bodyPr wrap="square" lIns="0" tIns="0" rIns="0" bIns="0" rtlCol="0" anchor="t"/>
           <a:lstStyle/>
           <a:p>
-            <a:pPr indent="0" marL="0">
+            <a:pPr marL="0" indent="0">
               <a:buNone/>
             </a:pPr>
             <a:r>
@@ -3369,7 +3234,7 @@
           <a:bodyPr wrap="square" lIns="0" tIns="0" rIns="0" bIns="0" rtlCol="0" anchor="ctr"/>
           <a:lstStyle/>
           <a:p>
-            <a:pPr algn="ctr" indent="0" marL="0">
+            <a:pPr marL="0" indent="0" algn="ctr">
               <a:buNone/>
             </a:pPr>
             <a:r>
@@ -3405,6 +3270,13 @@
           </a:solidFill>
           <a:ln/>
         </p:spPr>
+        <p:txBody>
+          <a:bodyPr/>
+          <a:lstStyle/>
+          <a:p>
+            <a:endParaRPr lang="en-UA"/>
+          </a:p>
+        </p:txBody>
       </p:sp>
       <p:sp>
         <p:nvSpPr>
@@ -3427,7 +3299,7 @@
           <a:bodyPr wrap="square" lIns="0" tIns="0" rIns="0" bIns="0" rtlCol="0" anchor="t"/>
           <a:lstStyle/>
           <a:p>
-            <a:pPr indent="0" marL="0">
+            <a:pPr marL="0" indent="0">
               <a:buNone/>
             </a:pPr>
             <a:r>
@@ -3463,7 +3335,7 @@
           <a:bodyPr wrap="square" lIns="0" tIns="0" rIns="0" bIns="0" rtlCol="0" anchor="t"/>
           <a:lstStyle/>
           <a:p>
-            <a:pPr indent="0" marL="0">
+            <a:pPr marL="0" indent="0">
               <a:buNone/>
             </a:pPr>
             <a:r>
@@ -3480,7 +3352,7 @@
             <a:endParaRPr lang="en-US" sz="1400" dirty="0"/>
           </a:p>
           <a:p>
-            <a:pPr indent="0" marL="0">
+            <a:pPr marL="0" indent="0">
               <a:buNone/>
             </a:pPr>
             <a:r>
@@ -3497,7 +3369,7 @@
             <a:endParaRPr lang="en-US" sz="1400" dirty="0"/>
           </a:p>
           <a:p>
-            <a:pPr indent="0" marL="0">
+            <a:pPr marL="0" indent="0">
               <a:buNone/>
             </a:pPr>
             <a:r>
@@ -3514,7 +3386,7 @@
             <a:endParaRPr lang="en-US" sz="1400" dirty="0"/>
           </a:p>
           <a:p>
-            <a:pPr indent="0" marL="0">
+            <a:pPr marL="0" indent="0">
               <a:buNone/>
             </a:pPr>
             <a:r>
@@ -3531,7 +3403,7 @@
             <a:endParaRPr lang="en-US" sz="1400" dirty="0"/>
           </a:p>
           <a:p>
-            <a:pPr indent="0" marL="0">
+            <a:pPr marL="0" indent="0">
               <a:buNone/>
             </a:pPr>
             <a:r>
@@ -3548,13 +3420,13 @@
             <a:endParaRPr lang="en-US" sz="1400" dirty="0"/>
           </a:p>
           <a:p>
-            <a:pPr indent="0" marL="0">
+            <a:pPr marL="0" indent="0">
               <a:buNone/>
             </a:pPr>
             <a:endParaRPr lang="en-US" sz="1400" dirty="0"/>
           </a:p>
           <a:p>
-            <a:pPr indent="0" marL="0">
+            <a:pPr marL="0" indent="0">
               <a:buNone/>
             </a:pPr>
             <a:r>
@@ -3571,7 +3443,7 @@
             <a:endParaRPr lang="en-US" sz="1400" dirty="0"/>
           </a:p>
           <a:p>
-            <a:pPr indent="0" marL="0">
+            <a:pPr marL="0" indent="0">
               <a:buNone/>
             </a:pPr>
             <a:r>
@@ -3610,7 +3482,7 @@
           <a:bodyPr wrap="square" lIns="0" tIns="0" rIns="0" bIns="0" rtlCol="0" anchor="t"/>
           <a:lstStyle/>
           <a:p>
-            <a:pPr indent="0" marL="0">
+            <a:pPr marL="0" indent="0">
               <a:buNone/>
             </a:pPr>
             <a:r>
@@ -3646,13 +3518,20 @@
           </a:solidFill>
           <a:ln/>
           <a:effectLst>
-            <a:outerShdw sx="100000" sy="100000" kx="0" ky="0" algn="bl" rotWithShape="0" blurRad="101600" dist="25400" dir="5400000">
+            <a:outerShdw blurRad="101600" dist="25400" dir="5400000" algn="bl" rotWithShape="0">
               <a:srgbClr val="000000">
                 <a:alpha val="12000"/>
               </a:srgbClr>
             </a:outerShdw>
           </a:effectLst>
         </p:spPr>
+        <p:txBody>
+          <a:bodyPr/>
+          <a:lstStyle/>
+          <a:p>
+            <a:endParaRPr lang="en-UA"/>
+          </a:p>
+        </p:txBody>
       </p:sp>
       <p:sp>
         <p:nvSpPr>
@@ -3675,7 +3554,7 @@
           <a:bodyPr wrap="square" lIns="0" tIns="0" rIns="0" bIns="0" rtlCol="0" anchor="t"/>
           <a:lstStyle/>
           <a:p>
-            <a:pPr indent="0" marL="0">
+            <a:pPr marL="0" indent="0">
               <a:buNone/>
             </a:pPr>
             <a:r>
@@ -3711,7 +3590,7 @@
           <a:bodyPr wrap="square" lIns="0" tIns="0" rIns="0" bIns="0" rtlCol="0" anchor="t"/>
           <a:lstStyle/>
           <a:p>
-            <a:pPr indent="0" marL="0">
+            <a:pPr marL="0" indent="0">
               <a:buNone/>
             </a:pPr>
             <a:r>
@@ -3747,13 +3626,20 @@
           </a:solidFill>
           <a:ln/>
           <a:effectLst>
-            <a:outerShdw sx="100000" sy="100000" kx="0" ky="0" algn="bl" rotWithShape="0" blurRad="101600" dist="25400" dir="5400000">
+            <a:outerShdw blurRad="101600" dist="25400" dir="5400000" algn="bl" rotWithShape="0">
               <a:srgbClr val="000000">
                 <a:alpha val="12000"/>
               </a:srgbClr>
             </a:outerShdw>
           </a:effectLst>
         </p:spPr>
+        <p:txBody>
+          <a:bodyPr/>
+          <a:lstStyle/>
+          <a:p>
+            <a:endParaRPr lang="en-UA"/>
+          </a:p>
+        </p:txBody>
       </p:sp>
       <p:sp>
         <p:nvSpPr>
@@ -3776,7 +3662,7 @@
           <a:bodyPr wrap="square" lIns="0" tIns="0" rIns="0" bIns="0" rtlCol="0" anchor="t"/>
           <a:lstStyle/>
           <a:p>
-            <a:pPr indent="0" marL="0">
+            <a:pPr marL="0" indent="0">
               <a:buNone/>
             </a:pPr>
             <a:r>
@@ -3812,7 +3698,7 @@
           <a:bodyPr wrap="square" lIns="0" tIns="0" rIns="0" bIns="0" rtlCol="0" anchor="t"/>
           <a:lstStyle/>
           <a:p>
-            <a:pPr indent="0" marL="0">
+            <a:pPr marL="0" indent="0">
               <a:buNone/>
             </a:pPr>
             <a:r>
@@ -3848,13 +3734,20 @@
           </a:solidFill>
           <a:ln/>
           <a:effectLst>
-            <a:outerShdw sx="100000" sy="100000" kx="0" ky="0" algn="bl" rotWithShape="0" blurRad="101600" dist="25400" dir="5400000">
+            <a:outerShdw blurRad="101600" dist="25400" dir="5400000" algn="bl" rotWithShape="0">
               <a:srgbClr val="000000">
                 <a:alpha val="12000"/>
               </a:srgbClr>
             </a:outerShdw>
           </a:effectLst>
         </p:spPr>
+        <p:txBody>
+          <a:bodyPr/>
+          <a:lstStyle/>
+          <a:p>
+            <a:endParaRPr lang="en-UA"/>
+          </a:p>
+        </p:txBody>
       </p:sp>
       <p:sp>
         <p:nvSpPr>
@@ -3877,7 +3770,7 @@
           <a:bodyPr wrap="square" lIns="0" tIns="0" rIns="0" bIns="0" rtlCol="0" anchor="t"/>
           <a:lstStyle/>
           <a:p>
-            <a:pPr indent="0" marL="0">
+            <a:pPr marL="0" indent="0">
               <a:buNone/>
             </a:pPr>
             <a:r>
@@ -3913,7 +3806,7 @@
           <a:bodyPr wrap="square" lIns="0" tIns="0" rIns="0" bIns="0" rtlCol="0" anchor="t"/>
           <a:lstStyle/>
           <a:p>
-            <a:pPr indent="0" marL="0">
+            <a:pPr marL="0" indent="0">
               <a:buNone/>
             </a:pPr>
             <a:r>
@@ -3949,13 +3842,20 @@
           </a:solidFill>
           <a:ln/>
           <a:effectLst>
-            <a:outerShdw sx="100000" sy="100000" kx="0" ky="0" algn="bl" rotWithShape="0" blurRad="101600" dist="25400" dir="5400000">
+            <a:outerShdw blurRad="101600" dist="25400" dir="5400000" algn="bl" rotWithShape="0">
               <a:srgbClr val="000000">
                 <a:alpha val="12000"/>
               </a:srgbClr>
             </a:outerShdw>
           </a:effectLst>
         </p:spPr>
+        <p:txBody>
+          <a:bodyPr/>
+          <a:lstStyle/>
+          <a:p>
+            <a:endParaRPr lang="en-UA"/>
+          </a:p>
+        </p:txBody>
       </p:sp>
       <p:sp>
         <p:nvSpPr>
@@ -3978,7 +3878,7 @@
           <a:bodyPr wrap="square" lIns="0" tIns="0" rIns="0" bIns="0" rtlCol="0" anchor="t"/>
           <a:lstStyle/>
           <a:p>
-            <a:pPr indent="0" marL="0">
+            <a:pPr marL="0" indent="0">
               <a:buNone/>
             </a:pPr>
             <a:r>
@@ -4014,7 +3914,7 @@
           <a:bodyPr wrap="square" lIns="0" tIns="0" rIns="0" bIns="0" rtlCol="0" anchor="t"/>
           <a:lstStyle/>
           <a:p>
-            <a:pPr indent="0" marL="0">
+            <a:pPr marL="0" indent="0">
               <a:buNone/>
             </a:pPr>
             <a:r>
@@ -4050,13 +3950,20 @@
           </a:solidFill>
           <a:ln/>
           <a:effectLst>
-            <a:outerShdw sx="100000" sy="100000" kx="0" ky="0" algn="bl" rotWithShape="0" blurRad="101600" dist="25400" dir="5400000">
+            <a:outerShdw blurRad="101600" dist="25400" dir="5400000" algn="bl" rotWithShape="0">
               <a:srgbClr val="000000">
                 <a:alpha val="12000"/>
               </a:srgbClr>
             </a:outerShdw>
           </a:effectLst>
         </p:spPr>
+        <p:txBody>
+          <a:bodyPr/>
+          <a:lstStyle/>
+          <a:p>
+            <a:endParaRPr lang="en-UA"/>
+          </a:p>
+        </p:txBody>
       </p:sp>
       <p:sp>
         <p:nvSpPr>
@@ -4079,7 +3986,7 @@
           <a:bodyPr wrap="square" lIns="0" tIns="0" rIns="0" bIns="0" rtlCol="0" anchor="t"/>
           <a:lstStyle/>
           <a:p>
-            <a:pPr indent="0" marL="0">
+            <a:pPr marL="0" indent="0">
               <a:buNone/>
             </a:pPr>
             <a:r>
@@ -4115,7 +4022,7 @@
           <a:bodyPr wrap="square" lIns="0" tIns="0" rIns="0" bIns="0" rtlCol="0" anchor="t"/>
           <a:lstStyle/>
           <a:p>
-            <a:pPr indent="0" marL="0">
+            <a:pPr marL="0" indent="0">
               <a:buNone/>
             </a:pPr>
             <a:r>
@@ -4151,13 +4058,20 @@
           </a:solidFill>
           <a:ln/>
           <a:effectLst>
-            <a:outerShdw sx="100000" sy="100000" kx="0" ky="0" algn="bl" rotWithShape="0" blurRad="101600" dist="25400" dir="5400000">
+            <a:outerShdw blurRad="101600" dist="25400" dir="5400000" algn="bl" rotWithShape="0">
               <a:srgbClr val="000000">
                 <a:alpha val="12000"/>
               </a:srgbClr>
             </a:outerShdw>
           </a:effectLst>
         </p:spPr>
+        <p:txBody>
+          <a:bodyPr/>
+          <a:lstStyle/>
+          <a:p>
+            <a:endParaRPr lang="en-UA"/>
+          </a:p>
+        </p:txBody>
       </p:sp>
       <p:sp>
         <p:nvSpPr>
@@ -4180,7 +4094,7 @@
           <a:bodyPr wrap="square" lIns="0" tIns="0" rIns="0" bIns="0" rtlCol="0" anchor="t"/>
           <a:lstStyle/>
           <a:p>
-            <a:pPr indent="0" marL="0">
+            <a:pPr marL="0" indent="0">
               <a:buNone/>
             </a:pPr>
             <a:r>
@@ -4216,7 +4130,7 @@
           <a:bodyPr wrap="square" lIns="0" tIns="0" rIns="0" bIns="0" rtlCol="0" anchor="t"/>
           <a:lstStyle/>
           <a:p>
-            <a:pPr indent="0" marL="0">
+            <a:pPr marL="0" indent="0">
               <a:buNone/>
             </a:pPr>
             <a:r>
@@ -4233,7 +4147,7 @@
       </p:sp>
       <p:sp>
         <p:nvSpPr>
-          <p:cNvPr id="25" name="Slide Number Placeholder 0"/>
+          <p:cNvPr id="38" name="Slide Number Placeholder 0"/>
           <p:cNvSpPr>
             <a:spLocks noGrp="1"/>
           </p:cNvSpPr>
@@ -4251,7 +4165,7 @@
           </a:prstGeom>
           <a:extLst>
             <a:ext uri="{C572A759-6A51-4108-AA02-DFA0A04FC94B}">
-              <ma14:wrappingTextBoxFlag xmlns:ma14="http://schemas.microsoft.com/office/mac/drawingml/2011/main" val="0"/>
+              <ma14:wrappingTextBoxFlag xmlns:ma14="http://schemas.microsoft.com/office/mac/drawingml/2011/main" xmlns="" val="0"/>
             </a:ext>
           </a:extLst>
         </p:spPr>
@@ -4269,7 +4183,7 @@
           <a:p>
             <a:pPr algn="r"/>
             <a:fld id="{F7021451-1387-4CA6-816F-3879F97B5CBC}" type="slidenum">
-              <a:rPr b="0" lang="en-US"/>
+              <a:rPr lang="en-US" b="0"/>
               <a:t>10</a:t>
             </a:fld>
             <a:endParaRPr lang="en-US"/>
@@ -4304,9 +4218,11 @@
       <p:sp>
         <p:nvSpPr>
           <p:cNvPr id="2" name="Text 0"/>
-          <p:cNvSpPr/>
+          <p:cNvSpPr>
+            <a:spLocks noGrp="1"/>
+          </p:cNvSpPr>
           <p:nvPr>
-            <p:ph idx="100" type="title" hasCustomPrompt="1"/>
+            <p:ph type="title" idx="100" hasCustomPrompt="1"/>
           </p:nvPr>
         </p:nvSpPr>
         <p:spPr>
@@ -4324,7 +4240,7 @@
           <a:bodyPr wrap="square" lIns="0" tIns="0" rIns="0" bIns="0" rtlCol="0" anchor="ctr"/>
           <a:lstStyle/>
           <a:p>
-            <a:pPr algn="l" indent="0" marL="0">
+            <a:pPr marL="0" indent="0" algn="l">
               <a:buNone/>
             </a:pPr>
             <a:r>
@@ -4360,13 +4276,20 @@
           </a:solidFill>
           <a:ln/>
           <a:effectLst>
-            <a:outerShdw sx="100000" sy="100000" kx="0" ky="0" algn="bl" rotWithShape="0" blurRad="101600" dist="25400" dir="5400000">
+            <a:outerShdw blurRad="101600" dist="25400" dir="5400000" algn="bl" rotWithShape="0">
               <a:srgbClr val="000000">
                 <a:alpha val="12000"/>
               </a:srgbClr>
             </a:outerShdw>
           </a:effectLst>
         </p:spPr>
+        <p:txBody>
+          <a:bodyPr/>
+          <a:lstStyle/>
+          <a:p>
+            <a:endParaRPr lang="en-UA"/>
+          </a:p>
+        </p:txBody>
       </p:sp>
       <p:sp>
         <p:nvSpPr>
@@ -4387,17 +4310,24 @@
           </a:solidFill>
           <a:ln/>
         </p:spPr>
+        <p:txBody>
+          <a:bodyPr/>
+          <a:lstStyle/>
+          <a:p>
+            <a:endParaRPr lang="en-UA"/>
+          </a:p>
+        </p:txBody>
       </p:sp>
       <p:pic>
         <p:nvPicPr>
-          <p:cNvPr id="5" name="icon-27" descr="ConciergeBell icon">    </p:cNvPr>
+          <p:cNvPr id="5" name="icon-27" descr="ConciergeBell icon"/>
           <p:cNvPicPr>
             <a:picLocks noChangeAspect="1"/>
           </p:cNvPicPr>
           <p:nvPr/>
         </p:nvPicPr>
         <p:blipFill>
-          <a:blip r:embed="rId1"/>
+          <a:blip r:embed="rId3"/>
           <a:stretch>
             <a:fillRect/>
           </a:stretch>
@@ -4433,7 +4363,7 @@
           <a:bodyPr wrap="square" lIns="0" tIns="0" rIns="0" bIns="0" rtlCol="0" anchor="ctr"/>
           <a:lstStyle/>
           <a:p>
-            <a:pPr indent="0" marL="0">
+            <a:pPr marL="0" indent="0">
               <a:buNone/>
             </a:pPr>
             <a:r>
@@ -4469,7 +4399,7 @@
           <a:bodyPr wrap="square" lIns="0" tIns="0" rIns="0" bIns="0" rtlCol="0" anchor="t"/>
           <a:lstStyle/>
           <a:p>
-            <a:pPr indent="0" marL="0">
+            <a:pPr marL="0" indent="0">
               <a:spcAft>
                 <a:spcPts val="600"/>
               </a:spcAft>
@@ -4486,7 +4416,7 @@
             <a:endParaRPr lang="en-US" sz="1500" dirty="0"/>
           </a:p>
           <a:p>
-            <a:pPr indent="0" marL="0">
+            <a:pPr marL="0" indent="0">
               <a:spcAft>
                 <a:spcPts val="600"/>
               </a:spcAft>
@@ -4525,13 +4455,20 @@
           </a:solidFill>
           <a:ln/>
           <a:effectLst>
-            <a:outerShdw sx="100000" sy="100000" kx="0" ky="0" algn="bl" rotWithShape="0" blurRad="101600" dist="25400" dir="5400000">
+            <a:outerShdw blurRad="101600" dist="25400" dir="5400000" algn="bl" rotWithShape="0">
               <a:srgbClr val="000000">
                 <a:alpha val="12000"/>
               </a:srgbClr>
             </a:outerShdw>
           </a:effectLst>
         </p:spPr>
+        <p:txBody>
+          <a:bodyPr/>
+          <a:lstStyle/>
+          <a:p>
+            <a:endParaRPr lang="en-UA"/>
+          </a:p>
+        </p:txBody>
       </p:sp>
       <p:sp>
         <p:nvSpPr>
@@ -4552,17 +4489,24 @@
           </a:solidFill>
           <a:ln/>
         </p:spPr>
+        <p:txBody>
+          <a:bodyPr/>
+          <a:lstStyle/>
+          <a:p>
+            <a:endParaRPr lang="en-UA"/>
+          </a:p>
+        </p:txBody>
       </p:sp>
       <p:pic>
         <p:nvPicPr>
-          <p:cNvPr id="10" name="icon-32" descr="Globe icon">    </p:cNvPr>
+          <p:cNvPr id="10" name="icon-32" descr="Globe icon"/>
           <p:cNvPicPr>
             <a:picLocks noChangeAspect="1"/>
           </p:cNvPicPr>
           <p:nvPr/>
         </p:nvPicPr>
         <p:blipFill>
-          <a:blip r:embed="rId2"/>
+          <a:blip r:embed="rId4"/>
           <a:stretch>
             <a:fillRect/>
           </a:stretch>
@@ -4598,7 +4542,7 @@
           <a:bodyPr wrap="square" lIns="0" tIns="0" rIns="0" bIns="0" rtlCol="0" anchor="ctr"/>
           <a:lstStyle/>
           <a:p>
-            <a:pPr indent="0" marL="0">
+            <a:pPr marL="0" indent="0">
               <a:buNone/>
             </a:pPr>
             <a:r>
@@ -4636,6 +4580,13 @@
             <a:tailEnd type="triangle"/>
           </a:ln>
         </p:spPr>
+        <p:txBody>
+          <a:bodyPr/>
+          <a:lstStyle/>
+          <a:p>
+            <a:endParaRPr lang="en-UA"/>
+          </a:p>
+        </p:txBody>
       </p:sp>
       <p:sp>
         <p:nvSpPr>
@@ -4658,13 +4609,20 @@
           </a:solidFill>
           <a:ln/>
           <a:effectLst>
-            <a:outerShdw sx="100000" sy="100000" kx="0" ky="0" algn="bl" rotWithShape="0" blurRad="101600" dist="25400" dir="5400000">
+            <a:outerShdw blurRad="101600" dist="25400" dir="5400000" algn="bl" rotWithShape="0">
               <a:srgbClr val="000000">
                 <a:alpha val="12000"/>
               </a:srgbClr>
             </a:outerShdw>
           </a:effectLst>
         </p:spPr>
+        <p:txBody>
+          <a:bodyPr/>
+          <a:lstStyle/>
+          <a:p>
+            <a:endParaRPr lang="en-UA"/>
+          </a:p>
+        </p:txBody>
       </p:sp>
       <p:sp>
         <p:nvSpPr>
@@ -4685,17 +4643,24 @@
           </a:solidFill>
           <a:ln/>
         </p:spPr>
+        <p:txBody>
+          <a:bodyPr/>
+          <a:lstStyle/>
+          <a:p>
+            <a:endParaRPr lang="en-UA"/>
+          </a:p>
+        </p:txBody>
       </p:sp>
       <p:pic>
         <p:nvPicPr>
-          <p:cNvPr id="15" name="icon-37" descr="MobileAlt icon">    </p:cNvPr>
+          <p:cNvPr id="15" name="icon-37" descr="MobileAlt icon"/>
           <p:cNvPicPr>
             <a:picLocks noChangeAspect="1"/>
           </p:cNvPicPr>
           <p:nvPr/>
         </p:nvPicPr>
         <p:blipFill>
-          <a:blip r:embed="rId3"/>
+          <a:blip r:embed="rId5"/>
           <a:stretch>
             <a:fillRect/>
           </a:stretch>
@@ -4731,7 +4696,7 @@
           <a:bodyPr wrap="square" lIns="0" tIns="0" rIns="0" bIns="0" rtlCol="0" anchor="ctr"/>
           <a:lstStyle/>
           <a:p>
-            <a:pPr indent="0" marL="0">
+            <a:pPr marL="0" indent="0">
               <a:buNone/>
             </a:pPr>
             <a:r>
@@ -4769,6 +4734,13 @@
             <a:tailEnd type="triangle"/>
           </a:ln>
         </p:spPr>
+        <p:txBody>
+          <a:bodyPr/>
+          <a:lstStyle/>
+          <a:p>
+            <a:endParaRPr lang="en-UA"/>
+          </a:p>
+        </p:txBody>
       </p:sp>
       <p:sp>
         <p:nvSpPr>
@@ -4791,13 +4763,20 @@
           </a:solidFill>
           <a:ln/>
           <a:effectLst>
-            <a:outerShdw sx="100000" sy="100000" kx="0" ky="0" algn="bl" rotWithShape="0" blurRad="101600" dist="25400" dir="5400000">
+            <a:outerShdw blurRad="101600" dist="25400" dir="5400000" algn="bl" rotWithShape="0">
               <a:srgbClr val="000000">
                 <a:alpha val="12000"/>
               </a:srgbClr>
             </a:outerShdw>
           </a:effectLst>
         </p:spPr>
+        <p:txBody>
+          <a:bodyPr/>
+          <a:lstStyle/>
+          <a:p>
+            <a:endParaRPr lang="en-UA"/>
+          </a:p>
+        </p:txBody>
       </p:sp>
       <p:sp>
         <p:nvSpPr>
@@ -4818,17 +4797,24 @@
           </a:solidFill>
           <a:ln/>
         </p:spPr>
+        <p:txBody>
+          <a:bodyPr/>
+          <a:lstStyle/>
+          <a:p>
+            <a:endParaRPr lang="en-UA"/>
+          </a:p>
+        </p:txBody>
       </p:sp>
       <p:pic>
         <p:nvPicPr>
-          <p:cNvPr id="20" name="icon-42" descr="Microchip icon">    </p:cNvPr>
+          <p:cNvPr id="20" name="icon-42" descr="Microchip icon"/>
           <p:cNvPicPr>
             <a:picLocks noChangeAspect="1"/>
           </p:cNvPicPr>
           <p:nvPr/>
         </p:nvPicPr>
         <p:blipFill>
-          <a:blip r:embed="rId4"/>
+          <a:blip r:embed="rId6"/>
           <a:stretch>
             <a:fillRect/>
           </a:stretch>
@@ -4864,7 +4850,7 @@
           <a:bodyPr wrap="square" lIns="0" tIns="0" rIns="0" bIns="0" rtlCol="0" anchor="ctr"/>
           <a:lstStyle/>
           <a:p>
-            <a:pPr indent="0" marL="0">
+            <a:pPr marL="0" indent="0">
               <a:buNone/>
             </a:pPr>
             <a:r>
@@ -4902,6 +4888,13 @@
             <a:tailEnd type="triangle"/>
           </a:ln>
         </p:spPr>
+        <p:txBody>
+          <a:bodyPr/>
+          <a:lstStyle/>
+          <a:p>
+            <a:endParaRPr lang="en-UA"/>
+          </a:p>
+        </p:txBody>
       </p:sp>
       <p:sp>
         <p:nvSpPr>
@@ -4924,6 +4917,13 @@
           </a:solidFill>
           <a:ln/>
         </p:spPr>
+        <p:txBody>
+          <a:bodyPr/>
+          <a:lstStyle/>
+          <a:p>
+            <a:endParaRPr lang="en-UA"/>
+          </a:p>
+        </p:txBody>
       </p:sp>
       <p:sp>
         <p:nvSpPr>
@@ -4944,17 +4944,24 @@
           </a:solidFill>
           <a:ln/>
         </p:spPr>
+        <p:txBody>
+          <a:bodyPr/>
+          <a:lstStyle/>
+          <a:p>
+            <a:endParaRPr lang="en-UA"/>
+          </a:p>
+        </p:txBody>
       </p:sp>
       <p:pic>
         <p:nvPicPr>
-          <p:cNvPr id="25" name="icon-47" descr="NetworkWired icon">    </p:cNvPr>
+          <p:cNvPr id="25" name="icon-47" descr="NetworkWired icon"/>
           <p:cNvPicPr>
             <a:picLocks noChangeAspect="1"/>
           </p:cNvPicPr>
           <p:nvPr/>
         </p:nvPicPr>
         <p:blipFill>
-          <a:blip r:embed="rId5"/>
+          <a:blip r:embed="rId7"/>
           <a:stretch>
             <a:fillRect/>
           </a:stretch>
@@ -4990,7 +4997,7 @@
           <a:bodyPr wrap="square" lIns="0" tIns="0" rIns="0" bIns="0" rtlCol="0" anchor="t"/>
           <a:lstStyle/>
           <a:p>
-            <a:pPr algn="ctr" indent="0" marL="0">
+            <a:pPr marL="0" indent="0" algn="ctr">
               <a:buNone/>
             </a:pPr>
             <a:r>
@@ -5026,7 +5033,7 @@
           <a:bodyPr wrap="square" lIns="0" tIns="0" rIns="0" bIns="0" rtlCol="0" anchor="t"/>
           <a:lstStyle/>
           <a:p>
-            <a:pPr algn="ctr" indent="0" marL="0">
+            <a:pPr marL="0" indent="0" algn="ctr">
               <a:buNone/>
             </a:pPr>
             <a:r>
@@ -5064,6 +5071,13 @@
             <a:tailEnd type="triangle"/>
           </a:ln>
         </p:spPr>
+        <p:txBody>
+          <a:bodyPr/>
+          <a:lstStyle/>
+          <a:p>
+            <a:endParaRPr lang="en-UA"/>
+          </a:p>
+        </p:txBody>
       </p:sp>
       <p:sp>
         <p:nvSpPr>
@@ -5086,13 +5100,20 @@
           </a:solidFill>
           <a:ln/>
           <a:effectLst>
-            <a:outerShdw sx="100000" sy="100000" kx="0" ky="0" algn="bl" rotWithShape="0" blurRad="101600" dist="25400" dir="5400000">
+            <a:outerShdw blurRad="101600" dist="25400" dir="5400000" algn="bl" rotWithShape="0">
               <a:srgbClr val="000000">
                 <a:alpha val="12000"/>
               </a:srgbClr>
             </a:outerShdw>
           </a:effectLst>
         </p:spPr>
+        <p:txBody>
+          <a:bodyPr/>
+          <a:lstStyle/>
+          <a:p>
+            <a:endParaRPr lang="en-UA"/>
+          </a:p>
+        </p:txBody>
       </p:sp>
       <p:sp>
         <p:nvSpPr>
@@ -5113,17 +5134,24 @@
           </a:solidFill>
           <a:ln/>
         </p:spPr>
+        <p:txBody>
+          <a:bodyPr/>
+          <a:lstStyle/>
+          <a:p>
+            <a:endParaRPr lang="en-UA"/>
+          </a:p>
+        </p:txBody>
       </p:sp>
       <p:pic>
         <p:nvPicPr>
-          <p:cNvPr id="31" name="icon-53" descr="Bolt icon">    </p:cNvPr>
+          <p:cNvPr id="31" name="icon-53" descr="Bolt icon"/>
           <p:cNvPicPr>
             <a:picLocks noChangeAspect="1"/>
           </p:cNvPicPr>
           <p:nvPr/>
         </p:nvPicPr>
         <p:blipFill>
-          <a:blip r:embed="rId6"/>
+          <a:blip r:embed="rId8"/>
           <a:stretch>
             <a:fillRect/>
           </a:stretch>
@@ -5159,7 +5187,7 @@
           <a:bodyPr wrap="square" lIns="0" tIns="0" rIns="0" bIns="0" rtlCol="0" anchor="ctr"/>
           <a:lstStyle/>
           <a:p>
-            <a:pPr indent="0" marL="0">
+            <a:pPr marL="0" indent="0">
               <a:buNone/>
             </a:pPr>
             <a:r>
@@ -5197,6 +5225,13 @@
             <a:tailEnd type="triangle"/>
           </a:ln>
         </p:spPr>
+        <p:txBody>
+          <a:bodyPr/>
+          <a:lstStyle/>
+          <a:p>
+            <a:endParaRPr lang="en-UA"/>
+          </a:p>
+        </p:txBody>
       </p:sp>
       <p:sp>
         <p:nvSpPr>
@@ -5219,13 +5254,20 @@
           </a:solidFill>
           <a:ln/>
           <a:effectLst>
-            <a:outerShdw sx="100000" sy="100000" kx="0" ky="0" algn="bl" rotWithShape="0" blurRad="101600" dist="25400" dir="5400000">
+            <a:outerShdw blurRad="101600" dist="25400" dir="5400000" algn="bl" rotWithShape="0">
               <a:srgbClr val="000000">
                 <a:alpha val="12000"/>
               </a:srgbClr>
             </a:outerShdw>
           </a:effectLst>
         </p:spPr>
+        <p:txBody>
+          <a:bodyPr/>
+          <a:lstStyle/>
+          <a:p>
+            <a:endParaRPr lang="en-UA"/>
+          </a:p>
+        </p:txBody>
       </p:sp>
       <p:sp>
         <p:nvSpPr>
@@ -5246,17 +5288,24 @@
           </a:solidFill>
           <a:ln/>
         </p:spPr>
+        <p:txBody>
+          <a:bodyPr/>
+          <a:lstStyle/>
+          <a:p>
+            <a:endParaRPr lang="en-UA"/>
+          </a:p>
+        </p:txBody>
       </p:sp>
       <p:pic>
         <p:nvPicPr>
-          <p:cNvPr id="36" name="icon-58" descr="Server icon">    </p:cNvPr>
+          <p:cNvPr id="36" name="icon-58" descr="Server icon"/>
           <p:cNvPicPr>
             <a:picLocks noChangeAspect="1"/>
           </p:cNvPicPr>
           <p:nvPr/>
         </p:nvPicPr>
         <p:blipFill>
-          <a:blip r:embed="rId7"/>
+          <a:blip r:embed="rId9"/>
           <a:stretch>
             <a:fillRect/>
           </a:stretch>
@@ -5292,7 +5341,7 @@
           <a:bodyPr wrap="square" lIns="0" tIns="0" rIns="0" bIns="0" rtlCol="0" anchor="ctr"/>
           <a:lstStyle/>
           <a:p>
-            <a:pPr indent="0" marL="0">
+            <a:pPr marL="0" indent="0">
               <a:buNone/>
             </a:pPr>
             <a:r>
@@ -5330,6 +5379,13 @@
             <a:tailEnd type="triangle"/>
           </a:ln>
         </p:spPr>
+        <p:txBody>
+          <a:bodyPr/>
+          <a:lstStyle/>
+          <a:p>
+            <a:endParaRPr lang="en-UA"/>
+          </a:p>
+        </p:txBody>
       </p:sp>
       <p:sp>
         <p:nvSpPr>
@@ -5352,13 +5408,20 @@
           </a:solidFill>
           <a:ln/>
           <a:effectLst>
-            <a:outerShdw sx="100000" sy="100000" kx="0" ky="0" algn="bl" rotWithShape="0" blurRad="101600" dist="25400" dir="5400000">
+            <a:outerShdw blurRad="101600" dist="25400" dir="5400000" algn="bl" rotWithShape="0">
               <a:srgbClr val="000000">
                 <a:alpha val="12000"/>
               </a:srgbClr>
             </a:outerShdw>
           </a:effectLst>
         </p:spPr>
+        <p:txBody>
+          <a:bodyPr/>
+          <a:lstStyle/>
+          <a:p>
+            <a:endParaRPr lang="en-UA"/>
+          </a:p>
+        </p:txBody>
       </p:sp>
       <p:sp>
         <p:nvSpPr>
@@ -5379,300 +5442,17 @@
           </a:solidFill>
           <a:ln/>
         </p:spPr>
+        <p:txBody>
+          <a:bodyPr/>
+          <a:lstStyle/>
+          <a:p>
+            <a:endParaRPr lang="en-UA"/>
+          </a:p>
+        </p:txBody>
       </p:sp>
       <p:pic>
         <p:nvPicPr>
-          <p:cNvPr id="41" name="icon-63" descr="Cloud icon">    </p:cNvPr>
-          <p:cNvPicPr>
-            <a:picLocks noChangeAspect="1"/>
-          </p:cNvPicPr>
-          <p:nvPr/>
-        </p:nvPicPr>
-        <p:blipFill>
-          <a:blip r:embed="rId8"/>
-          <a:stretch>
-            <a:fillRect/>
-          </a:stretch>
-        </p:blipFill>
-        <p:spPr>
-          <a:xfrm>
-            <a:off x="9944100" y="3726180"/>
-            <a:ext cx="228600" cy="228600"/>
-          </a:xfrm>
-          <a:prstGeom prst="rect">
-            <a:avLst/>
-          </a:prstGeom>
-        </p:spPr>
-      </p:pic>
-      <p:sp>
-        <p:nvSpPr>
-          <p:cNvPr id="42" name="text-64"/>
-          <p:cNvSpPr txBox="1"/>
-          <p:nvPr/>
-        </p:nvSpPr>
-        <p:spPr>
-          <a:xfrm>
-            <a:off x="10424160" y="3474720"/>
-            <a:ext cx="1188720" cy="731520"/>
-          </a:xfrm>
-          <a:prstGeom prst="rect">
-            <a:avLst/>
-          </a:prstGeom>
-          <a:noFill/>
-          <a:ln/>
-        </p:spPr>
-        <p:txBody>
-          <a:bodyPr wrap="square" lIns="0" tIns="0" rIns="0" bIns="0" rtlCol="0" anchor="ctr"/>
-          <a:lstStyle/>
-          <a:p>
-            <a:pPr indent="0" marL="0">
-              <a:buNone/>
-            </a:pPr>
-            <a:r>
-              <a:rPr lang="en-US" sz="1400" b="1" dirty="0">
-                <a:solidFill>
-                  <a:schemeClr val="tx1"/>
-                </a:solidFill>
-              </a:rPr>
-              <a:t>AWS-сервіси</a:t>
-            </a:r>
-            <a:endParaRPr lang="en-US" sz="1400" dirty="0"/>
-          </a:p>
-        </p:txBody>
-      </p:sp>
-      <p:sp>
-        <p:nvSpPr>
-          <p:cNvPr id="43" name="text-65"/>
-          <p:cNvSpPr txBox="1"/>
-          <p:nvPr/>
-        </p:nvSpPr>
-        <p:spPr>
-          <a:xfrm>
-            <a:off x="548640" y="4407408"/>
-            <a:ext cx="5486400" cy="274320"/>
-          </a:xfrm>
-          <a:prstGeom prst="rect">
-            <a:avLst/>
-          </a:prstGeom>
-          <a:noFill/>
-          <a:ln/>
-        </p:spPr>
-        <p:txBody>
-          <a:bodyPr wrap="square" lIns="0" tIns="0" rIns="0" bIns="0" rtlCol="0" anchor="t"/>
-          <a:lstStyle/>
-          <a:p>
-            <a:pPr indent="0" marL="0">
-              <a:buNone/>
-            </a:pPr>
-            <a:r>
-              <a:rPr lang="en-US" sz="1600" b="1" dirty="0">
-                <a:solidFill>
-                  <a:schemeClr val="tx1"/>
-                </a:solidFill>
-              </a:rPr>
-              <a:t>Що вміє API Gateway</a:t>
-            </a:r>
-            <a:endParaRPr lang="en-US" sz="1600" dirty="0"/>
-          </a:p>
-        </p:txBody>
-      </p:sp>
-      <p:sp>
-        <p:nvSpPr>
-          <p:cNvPr id="44" name="panel-66"/>
-          <p:cNvSpPr/>
-          <p:nvPr/>
-        </p:nvSpPr>
-        <p:spPr>
-          <a:xfrm>
-            <a:off x="548640" y="4754880"/>
-            <a:ext cx="2109155" cy="1554480"/>
-          </a:xfrm>
-          <a:prstGeom prst="roundRect">
-            <a:avLst>
-              <a:gd name="adj" fmla="val 7059"/>
-            </a:avLst>
-          </a:prstGeom>
-          <a:solidFill>
-            <a:schemeClr val="bg1"/>
-          </a:solidFill>
-          <a:ln/>
-          <a:effectLst>
-            <a:outerShdw sx="100000" sy="100000" kx="0" ky="0" algn="bl" rotWithShape="0" blurRad="101600" dist="25400" dir="5400000">
-              <a:srgbClr val="000000">
-                <a:alpha val="12000"/>
-              </a:srgbClr>
-            </a:outerShdw>
-          </a:effectLst>
-        </p:spPr>
-      </p:sp>
-      <p:sp>
-        <p:nvSpPr>
-          <p:cNvPr id="45" name="icon-circle-67"/>
-          <p:cNvSpPr/>
-          <p:nvPr/>
-        </p:nvSpPr>
-        <p:spPr>
-          <a:xfrm>
-            <a:off x="731520" y="4892040"/>
-            <a:ext cx="457200" cy="457200"/>
-          </a:xfrm>
-          <a:prstGeom prst="ellipse">
-            <a:avLst/>
-          </a:prstGeom>
-          <a:solidFill>
-            <a:schemeClr val="accent1"/>
-          </a:solidFill>
-          <a:ln/>
-        </p:spPr>
-      </p:sp>
-      <p:pic>
-        <p:nvPicPr>
-          <p:cNvPr id="46" name="icon-68" descr="Route icon">    </p:cNvPr>
-          <p:cNvPicPr>
-            <a:picLocks noChangeAspect="1"/>
-          </p:cNvPicPr>
-          <p:nvPr/>
-        </p:nvPicPr>
-        <p:blipFill>
-          <a:blip r:embed="rId9"/>
-          <a:stretch>
-            <a:fillRect/>
-          </a:stretch>
-        </p:blipFill>
-        <p:spPr>
-          <a:xfrm>
-            <a:off x="845820" y="5006340"/>
-            <a:ext cx="228600" cy="228600"/>
-          </a:xfrm>
-          <a:prstGeom prst="rect">
-            <a:avLst/>
-          </a:prstGeom>
-        </p:spPr>
-      </p:pic>
-      <p:sp>
-        <p:nvSpPr>
-          <p:cNvPr id="47" name="text-69"/>
-          <p:cNvSpPr txBox="1"/>
-          <p:nvPr/>
-        </p:nvSpPr>
-        <p:spPr>
-          <a:xfrm>
-            <a:off x="731520" y="5440680"/>
-            <a:ext cx="1834835" cy="274320"/>
-          </a:xfrm>
-          <a:prstGeom prst="rect">
-            <a:avLst/>
-          </a:prstGeom>
-          <a:noFill/>
-          <a:ln/>
-        </p:spPr>
-        <p:txBody>
-          <a:bodyPr wrap="square" lIns="0" tIns="0" rIns="0" bIns="0" rtlCol="0" anchor="t"/>
-          <a:lstStyle/>
-          <a:p>
-            <a:pPr indent="0" marL="0">
-              <a:buNone/>
-            </a:pPr>
-            <a:r>
-              <a:rPr lang="en-US" sz="1600" b="1" dirty="0">
-                <a:solidFill>
-                  <a:schemeClr val="tx1"/>
-                </a:solidFill>
-              </a:rPr>
-              <a:t>Маршрутизація</a:t>
-            </a:r>
-            <a:endParaRPr lang="en-US" sz="1600" dirty="0"/>
-          </a:p>
-        </p:txBody>
-      </p:sp>
-      <p:sp>
-        <p:nvSpPr>
-          <p:cNvPr id="48" name="text-70"/>
-          <p:cNvSpPr txBox="1"/>
-          <p:nvPr/>
-        </p:nvSpPr>
-        <p:spPr>
-          <a:xfrm>
-            <a:off x="731520" y="5733288"/>
-            <a:ext cx="1834835" cy="502920"/>
-          </a:xfrm>
-          <a:prstGeom prst="rect">
-            <a:avLst/>
-          </a:prstGeom>
-          <a:noFill/>
-          <a:ln/>
-        </p:spPr>
-        <p:txBody>
-          <a:bodyPr wrap="square" lIns="0" tIns="0" rIns="0" bIns="0" rtlCol="0" anchor="t"/>
-          <a:lstStyle/>
-          <a:p>
-            <a:pPr indent="0" marL="0">
-              <a:buNone/>
-            </a:pPr>
-            <a:r>
-              <a:rPr lang="en-US" sz="1400" dirty="0">
-                <a:solidFill>
-                  <a:schemeClr val="accent6"/>
-                </a:solidFill>
-              </a:rPr>
-              <a:t>Кожен шлях — до свого сервісу</a:t>
-            </a:r>
-            <a:endParaRPr lang="en-US" sz="1400" dirty="0"/>
-          </a:p>
-        </p:txBody>
-      </p:sp>
-      <p:sp>
-        <p:nvSpPr>
-          <p:cNvPr id="49" name="panel-71"/>
-          <p:cNvSpPr/>
-          <p:nvPr/>
-        </p:nvSpPr>
-        <p:spPr>
-          <a:xfrm>
-            <a:off x="2794955" y="4754880"/>
-            <a:ext cx="2109155" cy="1554480"/>
-          </a:xfrm>
-          <a:prstGeom prst="roundRect">
-            <a:avLst>
-              <a:gd name="adj" fmla="val 7059"/>
-            </a:avLst>
-          </a:prstGeom>
-          <a:solidFill>
-            <a:schemeClr val="bg1"/>
-          </a:solidFill>
-          <a:ln/>
-          <a:effectLst>
-            <a:outerShdw sx="100000" sy="100000" kx="0" ky="0" algn="bl" rotWithShape="0" blurRad="101600" dist="25400" dir="5400000">
-              <a:srgbClr val="000000">
-                <a:alpha val="12000"/>
-              </a:srgbClr>
-            </a:outerShdw>
-          </a:effectLst>
-        </p:spPr>
-      </p:sp>
-      <p:sp>
-        <p:nvSpPr>
-          <p:cNvPr id="50" name="icon-circle-72"/>
-          <p:cNvSpPr/>
-          <p:nvPr/>
-        </p:nvSpPr>
-        <p:spPr>
-          <a:xfrm>
-            <a:off x="2977835" y="4892040"/>
-            <a:ext cx="457200" cy="457200"/>
-          </a:xfrm>
-          <a:prstGeom prst="ellipse">
-            <a:avLst/>
-          </a:prstGeom>
-          <a:solidFill>
-            <a:schemeClr val="accent1"/>
-          </a:solidFill>
-          <a:ln/>
-        </p:spPr>
-      </p:sp>
-      <p:pic>
-        <p:nvPicPr>
-          <p:cNvPr id="51" name="icon-73" descr="UserShield icon">    </p:cNvPr>
+          <p:cNvPr id="41" name="icon-63" descr="Cloud icon"/>
           <p:cNvPicPr>
             <a:picLocks noChangeAspect="1"/>
           </p:cNvPicPr>
@@ -5686,7 +5466,7 @@
         </p:blipFill>
         <p:spPr>
           <a:xfrm>
-            <a:off x="3092135" y="5006340"/>
+            <a:off x="9944100" y="3726180"/>
             <a:ext cx="228600" cy="228600"/>
           </a:xfrm>
           <a:prstGeom prst="rect">
@@ -5696,14 +5476,50 @@
       </p:pic>
       <p:sp>
         <p:nvSpPr>
-          <p:cNvPr id="52" name="text-74"/>
-          <p:cNvSpPr txBox="1"/>
-          <p:nvPr/>
-        </p:nvSpPr>
-        <p:spPr>
-          <a:xfrm>
-            <a:off x="2977835" y="5440680"/>
-            <a:ext cx="1834835" cy="274320"/>
+          <p:cNvPr id="42" name="text-64"/>
+          <p:cNvSpPr txBox="1"/>
+          <p:nvPr/>
+        </p:nvSpPr>
+        <p:spPr>
+          <a:xfrm>
+            <a:off x="10424160" y="3474720"/>
+            <a:ext cx="1188720" cy="731520"/>
+          </a:xfrm>
+          <a:prstGeom prst="rect">
+            <a:avLst/>
+          </a:prstGeom>
+          <a:noFill/>
+          <a:ln/>
+        </p:spPr>
+        <p:txBody>
+          <a:bodyPr wrap="square" lIns="0" tIns="0" rIns="0" bIns="0" rtlCol="0" anchor="ctr"/>
+          <a:lstStyle/>
+          <a:p>
+            <a:pPr marL="0" indent="0">
+              <a:buNone/>
+            </a:pPr>
+            <a:r>
+              <a:rPr lang="en-US" sz="1400" b="1" dirty="0">
+                <a:solidFill>
+                  <a:schemeClr val="tx1"/>
+                </a:solidFill>
+              </a:rPr>
+              <a:t>AWS-сервіси</a:t>
+            </a:r>
+            <a:endParaRPr lang="en-US" sz="1400" dirty="0"/>
+          </a:p>
+        </p:txBody>
+      </p:sp>
+      <p:sp>
+        <p:nvSpPr>
+          <p:cNvPr id="43" name="text-65"/>
+          <p:cNvSpPr txBox="1"/>
+          <p:nvPr/>
+        </p:nvSpPr>
+        <p:spPr>
+          <a:xfrm>
+            <a:off x="548640" y="4407408"/>
+            <a:ext cx="5486400" cy="274320"/>
           </a:xfrm>
           <a:prstGeom prst="rect">
             <a:avLst/>
@@ -5715,7 +5531,7 @@
           <a:bodyPr wrap="square" lIns="0" tIns="0" rIns="0" bIns="0" rtlCol="0" anchor="t"/>
           <a:lstStyle/>
           <a:p>
-            <a:pPr indent="0" marL="0">
+            <a:pPr marL="0" indent="0">
               <a:buNone/>
             </a:pPr>
             <a:r>
@@ -5724,7 +5540,7 @@
                   <a:schemeClr val="tx1"/>
                 </a:solidFill>
               </a:rPr>
-              <a:t>Авторизація</a:t>
+              <a:t>Що вміє API Gateway</a:t>
             </a:r>
             <a:endParaRPr lang="en-US" sz="1600" dirty="0"/>
           </a:p>
@@ -5732,49 +5548,13 @@
       </p:sp>
       <p:sp>
         <p:nvSpPr>
-          <p:cNvPr id="53" name="text-75"/>
-          <p:cNvSpPr txBox="1"/>
-          <p:nvPr/>
-        </p:nvSpPr>
-        <p:spPr>
-          <a:xfrm>
-            <a:off x="2977835" y="5733288"/>
-            <a:ext cx="1834835" cy="502920"/>
-          </a:xfrm>
-          <a:prstGeom prst="rect">
-            <a:avLst/>
-          </a:prstGeom>
-          <a:noFill/>
-          <a:ln/>
-        </p:spPr>
-        <p:txBody>
-          <a:bodyPr wrap="square" lIns="0" tIns="0" rIns="0" bIns="0" rtlCol="0" anchor="t"/>
-          <a:lstStyle/>
-          <a:p>
-            <a:pPr indent="0" marL="0">
-              <a:buNone/>
-            </a:pPr>
-            <a:r>
-              <a:rPr lang="en-US" sz="1400" dirty="0">
-                <a:solidFill>
-                  <a:schemeClr val="accent6"/>
-                </a:solidFill>
-              </a:rPr>
-              <a:t>Перевіряє ключі й токени</a:t>
-            </a:r>
-            <a:endParaRPr lang="en-US" sz="1400" dirty="0"/>
-          </a:p>
-        </p:txBody>
-      </p:sp>
-      <p:sp>
-        <p:nvSpPr>
-          <p:cNvPr id="54" name="panel-76"/>
+          <p:cNvPr id="44" name="panel-66"/>
           <p:cNvSpPr/>
           <p:nvPr/>
         </p:nvSpPr>
         <p:spPr>
           <a:xfrm>
-            <a:off x="5041270" y="4754880"/>
+            <a:off x="548640" y="4754880"/>
             <a:ext cx="2109155" cy="1554480"/>
           </a:xfrm>
           <a:prstGeom prst="roundRect">
@@ -5787,23 +5567,30 @@
           </a:solidFill>
           <a:ln/>
           <a:effectLst>
-            <a:outerShdw sx="100000" sy="100000" kx="0" ky="0" algn="bl" rotWithShape="0" blurRad="101600" dist="25400" dir="5400000">
+            <a:outerShdw blurRad="101600" dist="25400" dir="5400000" algn="bl" rotWithShape="0">
               <a:srgbClr val="000000">
                 <a:alpha val="12000"/>
               </a:srgbClr>
             </a:outerShdw>
           </a:effectLst>
         </p:spPr>
-      </p:sp>
-      <p:sp>
-        <p:nvSpPr>
-          <p:cNvPr id="55" name="icon-circle-77"/>
+        <p:txBody>
+          <a:bodyPr/>
+          <a:lstStyle/>
+          <a:p>
+            <a:endParaRPr lang="en-UA"/>
+          </a:p>
+        </p:txBody>
+      </p:sp>
+      <p:sp>
+        <p:nvSpPr>
+          <p:cNvPr id="45" name="icon-circle-67"/>
           <p:cNvSpPr/>
           <p:nvPr/>
         </p:nvSpPr>
         <p:spPr>
           <a:xfrm>
-            <a:off x="5224150" y="4892040"/>
+            <a:off x="731520" y="4892040"/>
             <a:ext cx="457200" cy="457200"/>
           </a:xfrm>
           <a:prstGeom prst="ellipse">
@@ -5814,10 +5601,17 @@
           </a:solidFill>
           <a:ln/>
         </p:spPr>
+        <p:txBody>
+          <a:bodyPr/>
+          <a:lstStyle/>
+          <a:p>
+            <a:endParaRPr lang="en-UA"/>
+          </a:p>
+        </p:txBody>
       </p:sp>
       <p:pic>
         <p:nvPicPr>
-          <p:cNvPr id="56" name="icon-78" descr="TachometerAlt icon">    </p:cNvPr>
+          <p:cNvPr id="46" name="icon-68" descr="Route icon"/>
           <p:cNvPicPr>
             <a:picLocks noChangeAspect="1"/>
           </p:cNvPicPr>
@@ -5831,7 +5625,7 @@
         </p:blipFill>
         <p:spPr>
           <a:xfrm>
-            <a:off x="5338450" y="5006340"/>
+            <a:off x="845820" y="5006340"/>
             <a:ext cx="228600" cy="228600"/>
           </a:xfrm>
           <a:prstGeom prst="rect">
@@ -5841,13 +5635,13 @@
       </p:pic>
       <p:sp>
         <p:nvSpPr>
-          <p:cNvPr id="57" name="text-79"/>
-          <p:cNvSpPr txBox="1"/>
-          <p:nvPr/>
-        </p:nvSpPr>
-        <p:spPr>
-          <a:xfrm>
-            <a:off x="5224150" y="5440680"/>
+          <p:cNvPr id="47" name="text-69"/>
+          <p:cNvSpPr txBox="1"/>
+          <p:nvPr/>
+        </p:nvSpPr>
+        <p:spPr>
+          <a:xfrm>
+            <a:off x="731520" y="5440680"/>
             <a:ext cx="1834835" cy="274320"/>
           </a:xfrm>
           <a:prstGeom prst="rect">
@@ -5860,7 +5654,7 @@
           <a:bodyPr wrap="square" lIns="0" tIns="0" rIns="0" bIns="0" rtlCol="0" anchor="t"/>
           <a:lstStyle/>
           <a:p>
-            <a:pPr indent="0" marL="0">
+            <a:pPr marL="0" indent="0">
               <a:buNone/>
             </a:pPr>
             <a:r>
@@ -5869,7 +5663,7 @@
                   <a:schemeClr val="tx1"/>
                 </a:solidFill>
               </a:rPr>
-              <a:t>Ліміти</a:t>
+              <a:t>Маршрутизація</a:t>
             </a:r>
             <a:endParaRPr lang="en-US" sz="1600" dirty="0"/>
           </a:p>
@@ -5877,13 +5671,13 @@
       </p:sp>
       <p:sp>
         <p:nvSpPr>
-          <p:cNvPr id="58" name="text-80"/>
-          <p:cNvSpPr txBox="1"/>
-          <p:nvPr/>
-        </p:nvSpPr>
-        <p:spPr>
-          <a:xfrm>
-            <a:off x="5224150" y="5733288"/>
+          <p:cNvPr id="48" name="text-70"/>
+          <p:cNvSpPr txBox="1"/>
+          <p:nvPr/>
+        </p:nvSpPr>
+        <p:spPr>
+          <a:xfrm>
+            <a:off x="731520" y="5733288"/>
             <a:ext cx="1834835" cy="502920"/>
           </a:xfrm>
           <a:prstGeom prst="rect">
@@ -5896,7 +5690,7 @@
           <a:bodyPr wrap="square" lIns="0" tIns="0" rIns="0" bIns="0" rtlCol="0" anchor="t"/>
           <a:lstStyle/>
           <a:p>
-            <a:pPr indent="0" marL="0">
+            <a:pPr marL="0" indent="0">
               <a:buNone/>
             </a:pPr>
             <a:r>
@@ -5905,7 +5699,7 @@
                   <a:schemeClr val="accent6"/>
                 </a:solidFill>
               </a:rPr>
-              <a:t>Захист від перевантаження</a:t>
+              <a:t>Кожен шлях — до свого сервісу</a:t>
             </a:r>
             <a:endParaRPr lang="en-US" sz="1400" dirty="0"/>
           </a:p>
@@ -5913,13 +5707,13 @@
       </p:sp>
       <p:sp>
         <p:nvSpPr>
-          <p:cNvPr id="59" name="panel-81"/>
+          <p:cNvPr id="49" name="panel-71"/>
           <p:cNvSpPr/>
           <p:nvPr/>
         </p:nvSpPr>
         <p:spPr>
           <a:xfrm>
-            <a:off x="7287585" y="4754880"/>
+            <a:off x="2794955" y="4754880"/>
             <a:ext cx="2109155" cy="1554480"/>
           </a:xfrm>
           <a:prstGeom prst="roundRect">
@@ -5932,23 +5726,30 @@
           </a:solidFill>
           <a:ln/>
           <a:effectLst>
-            <a:outerShdw sx="100000" sy="100000" kx="0" ky="0" algn="bl" rotWithShape="0" blurRad="101600" dist="25400" dir="5400000">
+            <a:outerShdw blurRad="101600" dist="25400" dir="5400000" algn="bl" rotWithShape="0">
               <a:srgbClr val="000000">
                 <a:alpha val="12000"/>
               </a:srgbClr>
             </a:outerShdw>
           </a:effectLst>
         </p:spPr>
-      </p:sp>
-      <p:sp>
-        <p:nvSpPr>
-          <p:cNvPr id="60" name="icon-circle-82"/>
+        <p:txBody>
+          <a:bodyPr/>
+          <a:lstStyle/>
+          <a:p>
+            <a:endParaRPr lang="en-UA"/>
+          </a:p>
+        </p:txBody>
+      </p:sp>
+      <p:sp>
+        <p:nvSpPr>
+          <p:cNvPr id="50" name="icon-circle-72"/>
           <p:cNvSpPr/>
           <p:nvPr/>
         </p:nvSpPr>
         <p:spPr>
           <a:xfrm>
-            <a:off x="7470465" y="4892040"/>
+            <a:off x="2977835" y="4892040"/>
             <a:ext cx="457200" cy="457200"/>
           </a:xfrm>
           <a:prstGeom prst="ellipse">
@@ -5959,10 +5760,17 @@
           </a:solidFill>
           <a:ln/>
         </p:spPr>
+        <p:txBody>
+          <a:bodyPr/>
+          <a:lstStyle/>
+          <a:p>
+            <a:endParaRPr lang="en-UA"/>
+          </a:p>
+        </p:txBody>
       </p:sp>
       <p:pic>
         <p:nvPicPr>
-          <p:cNvPr id="61" name="icon-83" descr="Memory icon">    </p:cNvPr>
+          <p:cNvPr id="51" name="icon-73" descr="UserShield icon"/>
           <p:cNvPicPr>
             <a:picLocks noChangeAspect="1"/>
           </p:cNvPicPr>
@@ -5976,7 +5784,7 @@
         </p:blipFill>
         <p:spPr>
           <a:xfrm>
-            <a:off x="7584765" y="5006340"/>
+            <a:off x="3092135" y="5006340"/>
             <a:ext cx="228600" cy="228600"/>
           </a:xfrm>
           <a:prstGeom prst="rect">
@@ -5986,13 +5794,13 @@
       </p:pic>
       <p:sp>
         <p:nvSpPr>
-          <p:cNvPr id="62" name="text-84"/>
-          <p:cNvSpPr txBox="1"/>
-          <p:nvPr/>
-        </p:nvSpPr>
-        <p:spPr>
-          <a:xfrm>
-            <a:off x="7470465" y="5440680"/>
+          <p:cNvPr id="52" name="text-74"/>
+          <p:cNvSpPr txBox="1"/>
+          <p:nvPr/>
+        </p:nvSpPr>
+        <p:spPr>
+          <a:xfrm>
+            <a:off x="2977835" y="5440680"/>
             <a:ext cx="1834835" cy="274320"/>
           </a:xfrm>
           <a:prstGeom prst="rect">
@@ -6005,7 +5813,7 @@
           <a:bodyPr wrap="square" lIns="0" tIns="0" rIns="0" bIns="0" rtlCol="0" anchor="t"/>
           <a:lstStyle/>
           <a:p>
-            <a:pPr indent="0" marL="0">
+            <a:pPr marL="0" indent="0">
               <a:buNone/>
             </a:pPr>
             <a:r>
@@ -6014,7 +5822,7 @@
                   <a:schemeClr val="tx1"/>
                 </a:solidFill>
               </a:rPr>
-              <a:t>Кешування</a:t>
+              <a:t>Авторизація</a:t>
             </a:r>
             <a:endParaRPr lang="en-US" sz="1600" dirty="0"/>
           </a:p>
@@ -6022,13 +5830,13 @@
       </p:sp>
       <p:sp>
         <p:nvSpPr>
-          <p:cNvPr id="63" name="text-85"/>
-          <p:cNvSpPr txBox="1"/>
-          <p:nvPr/>
-        </p:nvSpPr>
-        <p:spPr>
-          <a:xfrm>
-            <a:off x="7470465" y="5733288"/>
+          <p:cNvPr id="53" name="text-75"/>
+          <p:cNvSpPr txBox="1"/>
+          <p:nvPr/>
+        </p:nvSpPr>
+        <p:spPr>
+          <a:xfrm>
+            <a:off x="2977835" y="5733288"/>
             <a:ext cx="1834835" cy="502920"/>
           </a:xfrm>
           <a:prstGeom prst="rect">
@@ -6041,7 +5849,7 @@
           <a:bodyPr wrap="square" lIns="0" tIns="0" rIns="0" bIns="0" rtlCol="0" anchor="t"/>
           <a:lstStyle/>
           <a:p>
-            <a:pPr indent="0" marL="0">
+            <a:pPr marL="0" indent="0">
               <a:buNone/>
             </a:pPr>
             <a:r>
@@ -6050,7 +5858,7 @@
                   <a:schemeClr val="accent6"/>
                 </a:solidFill>
               </a:rPr>
-              <a:t>Швидкі повторні відповіді</a:t>
+              <a:t>Перевіряє ключі й токени</a:t>
             </a:r>
             <a:endParaRPr lang="en-US" sz="1400" dirty="0"/>
           </a:p>
@@ -6058,13 +5866,13 @@
       </p:sp>
       <p:sp>
         <p:nvSpPr>
-          <p:cNvPr id="64" name="panel-86"/>
+          <p:cNvPr id="54" name="panel-76"/>
           <p:cNvSpPr/>
           <p:nvPr/>
         </p:nvSpPr>
         <p:spPr>
           <a:xfrm>
-            <a:off x="9533900" y="4754880"/>
+            <a:off x="5041270" y="4754880"/>
             <a:ext cx="2109155" cy="1554480"/>
           </a:xfrm>
           <a:prstGeom prst="roundRect">
@@ -6077,23 +5885,30 @@
           </a:solidFill>
           <a:ln/>
           <a:effectLst>
-            <a:outerShdw sx="100000" sy="100000" kx="0" ky="0" algn="bl" rotWithShape="0" blurRad="101600" dist="25400" dir="5400000">
+            <a:outerShdw blurRad="101600" dist="25400" dir="5400000" algn="bl" rotWithShape="0">
               <a:srgbClr val="000000">
                 <a:alpha val="12000"/>
               </a:srgbClr>
             </a:outerShdw>
           </a:effectLst>
         </p:spPr>
-      </p:sp>
-      <p:sp>
-        <p:nvSpPr>
-          <p:cNvPr id="65" name="icon-circle-87"/>
+        <p:txBody>
+          <a:bodyPr/>
+          <a:lstStyle/>
+          <a:p>
+            <a:endParaRPr lang="en-UA"/>
+          </a:p>
+        </p:txBody>
+      </p:sp>
+      <p:sp>
+        <p:nvSpPr>
+          <p:cNvPr id="55" name="icon-circle-77"/>
           <p:cNvSpPr/>
           <p:nvPr/>
         </p:nvSpPr>
         <p:spPr>
           <a:xfrm>
-            <a:off x="9716780" y="4892040"/>
+            <a:off x="5224150" y="4892040"/>
             <a:ext cx="457200" cy="457200"/>
           </a:xfrm>
           <a:prstGeom prst="ellipse">
@@ -6104,10 +5919,17 @@
           </a:solidFill>
           <a:ln/>
         </p:spPr>
+        <p:txBody>
+          <a:bodyPr/>
+          <a:lstStyle/>
+          <a:p>
+            <a:endParaRPr lang="en-UA"/>
+          </a:p>
+        </p:txBody>
       </p:sp>
       <p:pic>
         <p:nvPicPr>
-          <p:cNvPr id="66" name="icon-88" descr="ChartLine icon">    </p:cNvPr>
+          <p:cNvPr id="56" name="icon-78" descr="TachometerAlt icon"/>
           <p:cNvPicPr>
             <a:picLocks noChangeAspect="1"/>
           </p:cNvPicPr>
@@ -6121,6 +5943,324 @@
         </p:blipFill>
         <p:spPr>
           <a:xfrm>
+            <a:off x="5338450" y="5006340"/>
+            <a:ext cx="228600" cy="228600"/>
+          </a:xfrm>
+          <a:prstGeom prst="rect">
+            <a:avLst/>
+          </a:prstGeom>
+        </p:spPr>
+      </p:pic>
+      <p:sp>
+        <p:nvSpPr>
+          <p:cNvPr id="57" name="text-79"/>
+          <p:cNvSpPr txBox="1"/>
+          <p:nvPr/>
+        </p:nvSpPr>
+        <p:spPr>
+          <a:xfrm>
+            <a:off x="5224150" y="5440680"/>
+            <a:ext cx="1834835" cy="274320"/>
+          </a:xfrm>
+          <a:prstGeom prst="rect">
+            <a:avLst/>
+          </a:prstGeom>
+          <a:noFill/>
+          <a:ln/>
+        </p:spPr>
+        <p:txBody>
+          <a:bodyPr wrap="square" lIns="0" tIns="0" rIns="0" bIns="0" rtlCol="0" anchor="t"/>
+          <a:lstStyle/>
+          <a:p>
+            <a:pPr marL="0" indent="0">
+              <a:buNone/>
+            </a:pPr>
+            <a:r>
+              <a:rPr lang="en-US" sz="1600" b="1" dirty="0">
+                <a:solidFill>
+                  <a:schemeClr val="tx1"/>
+                </a:solidFill>
+              </a:rPr>
+              <a:t>Ліміти</a:t>
+            </a:r>
+            <a:endParaRPr lang="en-US" sz="1600" dirty="0"/>
+          </a:p>
+        </p:txBody>
+      </p:sp>
+      <p:sp>
+        <p:nvSpPr>
+          <p:cNvPr id="58" name="text-80"/>
+          <p:cNvSpPr txBox="1"/>
+          <p:nvPr/>
+        </p:nvSpPr>
+        <p:spPr>
+          <a:xfrm>
+            <a:off x="5224150" y="5733288"/>
+            <a:ext cx="1834835" cy="502920"/>
+          </a:xfrm>
+          <a:prstGeom prst="rect">
+            <a:avLst/>
+          </a:prstGeom>
+          <a:noFill/>
+          <a:ln/>
+        </p:spPr>
+        <p:txBody>
+          <a:bodyPr wrap="square" lIns="0" tIns="0" rIns="0" bIns="0" rtlCol="0" anchor="t"/>
+          <a:lstStyle/>
+          <a:p>
+            <a:pPr marL="0" indent="0">
+              <a:buNone/>
+            </a:pPr>
+            <a:r>
+              <a:rPr lang="en-US" sz="1400" dirty="0">
+                <a:solidFill>
+                  <a:schemeClr val="accent6"/>
+                </a:solidFill>
+              </a:rPr>
+              <a:t>Захист від перевантаження</a:t>
+            </a:r>
+            <a:endParaRPr lang="en-US" sz="1400" dirty="0"/>
+          </a:p>
+        </p:txBody>
+      </p:sp>
+      <p:sp>
+        <p:nvSpPr>
+          <p:cNvPr id="59" name="panel-81"/>
+          <p:cNvSpPr/>
+          <p:nvPr/>
+        </p:nvSpPr>
+        <p:spPr>
+          <a:xfrm>
+            <a:off x="7287585" y="4754880"/>
+            <a:ext cx="2109155" cy="1554480"/>
+          </a:xfrm>
+          <a:prstGeom prst="roundRect">
+            <a:avLst>
+              <a:gd name="adj" fmla="val 7059"/>
+            </a:avLst>
+          </a:prstGeom>
+          <a:solidFill>
+            <a:schemeClr val="bg1"/>
+          </a:solidFill>
+          <a:ln/>
+          <a:effectLst>
+            <a:outerShdw blurRad="101600" dist="25400" dir="5400000" algn="bl" rotWithShape="0">
+              <a:srgbClr val="000000">
+                <a:alpha val="12000"/>
+              </a:srgbClr>
+            </a:outerShdw>
+          </a:effectLst>
+        </p:spPr>
+        <p:txBody>
+          <a:bodyPr/>
+          <a:lstStyle/>
+          <a:p>
+            <a:endParaRPr lang="en-UA"/>
+          </a:p>
+        </p:txBody>
+      </p:sp>
+      <p:sp>
+        <p:nvSpPr>
+          <p:cNvPr id="60" name="icon-circle-82"/>
+          <p:cNvSpPr/>
+          <p:nvPr/>
+        </p:nvSpPr>
+        <p:spPr>
+          <a:xfrm>
+            <a:off x="7470465" y="4892040"/>
+            <a:ext cx="457200" cy="457200"/>
+          </a:xfrm>
+          <a:prstGeom prst="ellipse">
+            <a:avLst/>
+          </a:prstGeom>
+          <a:solidFill>
+            <a:schemeClr val="accent1"/>
+          </a:solidFill>
+          <a:ln/>
+        </p:spPr>
+        <p:txBody>
+          <a:bodyPr/>
+          <a:lstStyle/>
+          <a:p>
+            <a:endParaRPr lang="en-UA"/>
+          </a:p>
+        </p:txBody>
+      </p:sp>
+      <p:pic>
+        <p:nvPicPr>
+          <p:cNvPr id="61" name="icon-83" descr="Memory icon"/>
+          <p:cNvPicPr>
+            <a:picLocks noChangeAspect="1"/>
+          </p:cNvPicPr>
+          <p:nvPr/>
+        </p:nvPicPr>
+        <p:blipFill>
+          <a:blip r:embed="rId14"/>
+          <a:stretch>
+            <a:fillRect/>
+          </a:stretch>
+        </p:blipFill>
+        <p:spPr>
+          <a:xfrm>
+            <a:off x="7584765" y="5006340"/>
+            <a:ext cx="228600" cy="228600"/>
+          </a:xfrm>
+          <a:prstGeom prst="rect">
+            <a:avLst/>
+          </a:prstGeom>
+        </p:spPr>
+      </p:pic>
+      <p:sp>
+        <p:nvSpPr>
+          <p:cNvPr id="62" name="text-84"/>
+          <p:cNvSpPr txBox="1"/>
+          <p:nvPr/>
+        </p:nvSpPr>
+        <p:spPr>
+          <a:xfrm>
+            <a:off x="7470465" y="5440680"/>
+            <a:ext cx="1834835" cy="274320"/>
+          </a:xfrm>
+          <a:prstGeom prst="rect">
+            <a:avLst/>
+          </a:prstGeom>
+          <a:noFill/>
+          <a:ln/>
+        </p:spPr>
+        <p:txBody>
+          <a:bodyPr wrap="square" lIns="0" tIns="0" rIns="0" bIns="0" rtlCol="0" anchor="t"/>
+          <a:lstStyle/>
+          <a:p>
+            <a:pPr marL="0" indent="0">
+              <a:buNone/>
+            </a:pPr>
+            <a:r>
+              <a:rPr lang="en-US" sz="1600" b="1" dirty="0">
+                <a:solidFill>
+                  <a:schemeClr val="tx1"/>
+                </a:solidFill>
+              </a:rPr>
+              <a:t>Кешування</a:t>
+            </a:r>
+            <a:endParaRPr lang="en-US" sz="1600" dirty="0"/>
+          </a:p>
+        </p:txBody>
+      </p:sp>
+      <p:sp>
+        <p:nvSpPr>
+          <p:cNvPr id="63" name="text-85"/>
+          <p:cNvSpPr txBox="1"/>
+          <p:nvPr/>
+        </p:nvSpPr>
+        <p:spPr>
+          <a:xfrm>
+            <a:off x="7470465" y="5733288"/>
+            <a:ext cx="1834835" cy="502920"/>
+          </a:xfrm>
+          <a:prstGeom prst="rect">
+            <a:avLst/>
+          </a:prstGeom>
+          <a:noFill/>
+          <a:ln/>
+        </p:spPr>
+        <p:txBody>
+          <a:bodyPr wrap="square" lIns="0" tIns="0" rIns="0" bIns="0" rtlCol="0" anchor="t"/>
+          <a:lstStyle/>
+          <a:p>
+            <a:pPr marL="0" indent="0">
+              <a:buNone/>
+            </a:pPr>
+            <a:r>
+              <a:rPr lang="en-US" sz="1400" dirty="0">
+                <a:solidFill>
+                  <a:schemeClr val="accent6"/>
+                </a:solidFill>
+              </a:rPr>
+              <a:t>Швидкі повторні відповіді</a:t>
+            </a:r>
+            <a:endParaRPr lang="en-US" sz="1400" dirty="0"/>
+          </a:p>
+        </p:txBody>
+      </p:sp>
+      <p:sp>
+        <p:nvSpPr>
+          <p:cNvPr id="64" name="panel-86"/>
+          <p:cNvSpPr/>
+          <p:nvPr/>
+        </p:nvSpPr>
+        <p:spPr>
+          <a:xfrm>
+            <a:off x="9533900" y="4754880"/>
+            <a:ext cx="2109155" cy="1554480"/>
+          </a:xfrm>
+          <a:prstGeom prst="roundRect">
+            <a:avLst>
+              <a:gd name="adj" fmla="val 7059"/>
+            </a:avLst>
+          </a:prstGeom>
+          <a:solidFill>
+            <a:schemeClr val="bg1"/>
+          </a:solidFill>
+          <a:ln/>
+          <a:effectLst>
+            <a:outerShdw blurRad="101600" dist="25400" dir="5400000" algn="bl" rotWithShape="0">
+              <a:srgbClr val="000000">
+                <a:alpha val="12000"/>
+              </a:srgbClr>
+            </a:outerShdw>
+          </a:effectLst>
+        </p:spPr>
+        <p:txBody>
+          <a:bodyPr/>
+          <a:lstStyle/>
+          <a:p>
+            <a:endParaRPr lang="en-UA"/>
+          </a:p>
+        </p:txBody>
+      </p:sp>
+      <p:sp>
+        <p:nvSpPr>
+          <p:cNvPr id="65" name="icon-circle-87"/>
+          <p:cNvSpPr/>
+          <p:nvPr/>
+        </p:nvSpPr>
+        <p:spPr>
+          <a:xfrm>
+            <a:off x="9716780" y="4892040"/>
+            <a:ext cx="457200" cy="457200"/>
+          </a:xfrm>
+          <a:prstGeom prst="ellipse">
+            <a:avLst/>
+          </a:prstGeom>
+          <a:solidFill>
+            <a:schemeClr val="accent1"/>
+          </a:solidFill>
+          <a:ln/>
+        </p:spPr>
+        <p:txBody>
+          <a:bodyPr/>
+          <a:lstStyle/>
+          <a:p>
+            <a:endParaRPr lang="en-UA"/>
+          </a:p>
+        </p:txBody>
+      </p:sp>
+      <p:pic>
+        <p:nvPicPr>
+          <p:cNvPr id="66" name="icon-88" descr="ChartLine icon"/>
+          <p:cNvPicPr>
+            <a:picLocks noChangeAspect="1"/>
+          </p:cNvPicPr>
+          <p:nvPr/>
+        </p:nvPicPr>
+        <p:blipFill>
+          <a:blip r:embed="rId15"/>
+          <a:stretch>
+            <a:fillRect/>
+          </a:stretch>
+        </p:blipFill>
+        <p:spPr>
+          <a:xfrm>
             <a:off x="9831080" y="5006340"/>
             <a:ext cx="228600" cy="228600"/>
           </a:xfrm>
@@ -6150,7 +6290,7 @@
           <a:bodyPr wrap="square" lIns="0" tIns="0" rIns="0" bIns="0" rtlCol="0" anchor="t"/>
           <a:lstStyle/>
           <a:p>
-            <a:pPr indent="0" marL="0">
+            <a:pPr marL="0" indent="0">
               <a:buNone/>
             </a:pPr>
             <a:r>
@@ -6186,7 +6326,7 @@
           <a:bodyPr wrap="square" lIns="0" tIns="0" rIns="0" bIns="0" rtlCol="0" anchor="t"/>
           <a:lstStyle/>
           <a:p>
-            <a:pPr indent="0" marL="0">
+            <a:pPr marL="0" indent="0">
               <a:buNone/>
             </a:pPr>
             <a:r>
@@ -6203,7 +6343,7 @@
       </p:sp>
       <p:sp>
         <p:nvSpPr>
-          <p:cNvPr id="25" name="Slide Number Placeholder 0"/>
+          <p:cNvPr id="69" name="Slide Number Placeholder 0"/>
           <p:cNvSpPr>
             <a:spLocks noGrp="1"/>
           </p:cNvSpPr>
@@ -6221,7 +6361,7 @@
           </a:prstGeom>
           <a:extLst>
             <a:ext uri="{C572A759-6A51-4108-AA02-DFA0A04FC94B}">
-              <ma14:wrappingTextBoxFlag xmlns:ma14="http://schemas.microsoft.com/office/mac/drawingml/2011/main" val="0"/>
+              <ma14:wrappingTextBoxFlag xmlns:ma14="http://schemas.microsoft.com/office/mac/drawingml/2011/main" xmlns="" val="0"/>
             </a:ext>
           </a:extLst>
         </p:spPr>
@@ -6239,7 +6379,7 @@
           <a:p>
             <a:pPr algn="r"/>
             <a:fld id="{F7021451-1387-4CA6-816F-3879F97B5CBC}" type="slidenum">
-              <a:rPr b="0" lang="en-US"/>
+              <a:rPr lang="en-US" b="0"/>
               <a:t>2</a:t>
             </a:fld>
             <a:endParaRPr lang="en-US"/>
@@ -6274,14 +6414,16 @@
       <p:sp>
         <p:nvSpPr>
           <p:cNvPr id="2" name="Text 0"/>
-          <p:cNvSpPr/>
+          <p:cNvSpPr>
+            <a:spLocks noGrp="1"/>
+          </p:cNvSpPr>
           <p:nvPr>
-            <p:ph idx="100" type="title" hasCustomPrompt="1"/>
+            <p:ph type="title" idx="100" hasCustomPrompt="1"/>
           </p:nvPr>
         </p:nvSpPr>
         <p:spPr>
           <a:xfrm>
-            <a:off x="548640" y="365760"/>
+            <a:off x="548640" y="455566"/>
             <a:ext cx="11091672" cy="822960"/>
           </a:xfrm>
           <a:prstGeom prst="rect">
@@ -6294,7 +6436,7 @@
           <a:bodyPr wrap="square" lIns="0" tIns="0" rIns="0" bIns="0" rtlCol="0" anchor="ctr"/>
           <a:lstStyle/>
           <a:p>
-            <a:pPr algn="l" indent="0" marL="0">
+            <a:pPr marL="0" indent="0" algn="l">
               <a:buNone/>
             </a:pPr>
             <a:r>
@@ -6317,7 +6459,7 @@
         </p:nvSpPr>
         <p:spPr>
           <a:xfrm>
-            <a:off x="548640" y="1463040"/>
+            <a:off x="548640" y="1985554"/>
             <a:ext cx="3576218" cy="3840480"/>
           </a:xfrm>
           <a:prstGeom prst="roundRect">
@@ -6330,6 +6472,13 @@
           </a:solidFill>
           <a:ln/>
         </p:spPr>
+        <p:txBody>
+          <a:bodyPr/>
+          <a:lstStyle/>
+          <a:p>
+            <a:endParaRPr lang="en-UA"/>
+          </a:p>
+        </p:txBody>
       </p:sp>
       <p:sp>
         <p:nvSpPr>
@@ -6339,7 +6488,7 @@
         </p:nvSpPr>
         <p:spPr>
           <a:xfrm>
-            <a:off x="822960" y="1737360"/>
+            <a:off x="822960" y="2259874"/>
             <a:ext cx="731520" cy="731520"/>
           </a:xfrm>
           <a:prstGeom prst="ellipse">
@@ -6350,438 +6499,17 @@
           </a:solidFill>
           <a:ln/>
         </p:spPr>
+        <p:txBody>
+          <a:bodyPr/>
+          <a:lstStyle/>
+          <a:p>
+            <a:endParaRPr lang="en-UA"/>
+          </a:p>
+        </p:txBody>
       </p:sp>
       <p:pic>
         <p:nvPicPr>
-          <p:cNvPr id="5" name="icon-93" descr="Cogs icon">    </p:cNvPr>
-          <p:cNvPicPr>
-            <a:picLocks noChangeAspect="1"/>
-          </p:cNvPicPr>
-          <p:nvPr/>
-        </p:nvPicPr>
-        <p:blipFill>
-          <a:blip r:embed="rId1"/>
-          <a:stretch>
-            <a:fillRect/>
-          </a:stretch>
-        </p:blipFill>
-        <p:spPr>
-          <a:xfrm>
-            <a:off x="1005840" y="1920240"/>
-            <a:ext cx="365760" cy="365760"/>
-          </a:xfrm>
-          <a:prstGeom prst="rect">
-            <a:avLst/>
-          </a:prstGeom>
-        </p:spPr>
-      </p:pic>
-      <p:sp>
-        <p:nvSpPr>
-          <p:cNvPr id="6" name="text-94"/>
-          <p:cNvSpPr txBox="1"/>
-          <p:nvPr/>
-        </p:nvSpPr>
-        <p:spPr>
-          <a:xfrm>
-            <a:off x="822960" y="2697480"/>
-            <a:ext cx="3027578" cy="457200"/>
-          </a:xfrm>
-          <a:prstGeom prst="rect">
-            <a:avLst/>
-          </a:prstGeom>
-          <a:noFill/>
-          <a:ln/>
-        </p:spPr>
-        <p:txBody>
-          <a:bodyPr wrap="square" lIns="0" tIns="0" rIns="0" bIns="0" rtlCol="0" anchor="t"/>
-          <a:lstStyle/>
-          <a:p>
-            <a:pPr indent="0" marL="0">
-              <a:buNone/>
-            </a:pPr>
-            <a:r>
-              <a:rPr lang="en-US" sz="2600" b="1" dirty="0">
-                <a:solidFill>
-                  <a:schemeClr val="bg1"/>
-                </a:solidFill>
-              </a:rPr>
-              <a:t>REST API</a:t>
-            </a:r>
-            <a:endParaRPr lang="en-US" sz="2600" dirty="0"/>
-          </a:p>
-        </p:txBody>
-      </p:sp>
-      <p:sp>
-        <p:nvSpPr>
-          <p:cNvPr id="7" name="text-95"/>
-          <p:cNvSpPr txBox="1"/>
-          <p:nvPr/>
-        </p:nvSpPr>
-        <p:spPr>
-          <a:xfrm>
-            <a:off x="822960" y="3200400"/>
-            <a:ext cx="3027578" cy="320040"/>
-          </a:xfrm>
-          <a:prstGeom prst="rect">
-            <a:avLst/>
-          </a:prstGeom>
-          <a:noFill/>
-          <a:ln/>
-        </p:spPr>
-        <p:txBody>
-          <a:bodyPr wrap="square" lIns="0" tIns="0" rIns="0" bIns="0" rtlCol="0" anchor="t"/>
-          <a:lstStyle/>
-          <a:p>
-            <a:pPr indent="0" marL="0">
-              <a:buNone/>
-            </a:pPr>
-            <a:r>
-              <a:rPr lang="en-US" sz="1600" b="1" dirty="0">
-                <a:solidFill>
-                  <a:schemeClr val="accent1"/>
-                </a:solidFill>
-              </a:rPr>
-              <a:t>Максимум можливостей</a:t>
-            </a:r>
-            <a:endParaRPr lang="en-US" sz="1600" dirty="0"/>
-          </a:p>
-        </p:txBody>
-      </p:sp>
-      <p:sp>
-        <p:nvSpPr>
-          <p:cNvPr id="8" name="text-96"/>
-          <p:cNvSpPr txBox="1"/>
-          <p:nvPr/>
-        </p:nvSpPr>
-        <p:spPr>
-          <a:xfrm>
-            <a:off x="822960" y="3703320"/>
-            <a:ext cx="3027578" cy="1463040"/>
-          </a:xfrm>
-          <a:prstGeom prst="rect">
-            <a:avLst/>
-          </a:prstGeom>
-          <a:noFill/>
-          <a:ln/>
-        </p:spPr>
-        <p:txBody>
-          <a:bodyPr wrap="square" lIns="0" tIns="0" rIns="0" bIns="0" rtlCol="0" anchor="t"/>
-          <a:lstStyle/>
-          <a:p>
-            <a:pPr marL="342900" indent="-342900">
-              <a:spcAft>
-                <a:spcPts val="600"/>
-              </a:spcAft>
-              <a:buSzPct val="100000"/>
-              <a:buChar char="•"/>
-            </a:pPr>
-            <a:r>
-              <a:rPr lang="en-US" sz="1500" dirty="0">
-                <a:solidFill>
-                  <a:schemeClr val="bg1"/>
-                </a:solidFill>
-              </a:rPr>
-              <a:t>API-ключі та usage plans</a:t>
-            </a:r>
-            <a:endParaRPr lang="en-US" sz="1500" dirty="0"/>
-          </a:p>
-          <a:p>
-            <a:pPr marL="342900" indent="-342900">
-              <a:spcAft>
-                <a:spcPts val="600"/>
-              </a:spcAft>
-              <a:buSzPct val="100000"/>
-              <a:buChar char="•"/>
-            </a:pPr>
-            <a:r>
-              <a:rPr lang="en-US" sz="1500" dirty="0">
-                <a:solidFill>
-                  <a:schemeClr val="bg1"/>
-                </a:solidFill>
-              </a:rPr>
-              <a:t>Кешування й валідація запитів</a:t>
-            </a:r>
-            <a:endParaRPr lang="en-US" sz="1500" dirty="0"/>
-          </a:p>
-          <a:p>
-            <a:pPr marL="342900" indent="-342900">
-              <a:spcAft>
-                <a:spcPts val="600"/>
-              </a:spcAft>
-              <a:buSzPct val="100000"/>
-              <a:buChar char="•"/>
-            </a:pPr>
-            <a:r>
-              <a:rPr lang="en-US" sz="1500" dirty="0">
-                <a:solidFill>
-                  <a:schemeClr val="bg1"/>
-                </a:solidFill>
-              </a:rPr>
-              <a:t>Інтеграція з WAF, Cognito, IAM</a:t>
-            </a:r>
-            <a:endParaRPr lang="en-US" sz="1500" dirty="0"/>
-          </a:p>
-        </p:txBody>
-      </p:sp>
-      <p:sp>
-        <p:nvSpPr>
-          <p:cNvPr id="9" name="panel-97"/>
-          <p:cNvSpPr/>
-          <p:nvPr/>
-        </p:nvSpPr>
-        <p:spPr>
-          <a:xfrm>
-            <a:off x="4307738" y="1463040"/>
-            <a:ext cx="3576218" cy="3840480"/>
-          </a:xfrm>
-          <a:prstGeom prst="roundRect">
-            <a:avLst>
-              <a:gd name="adj" fmla="val 3068"/>
-            </a:avLst>
-          </a:prstGeom>
-          <a:solidFill>
-            <a:schemeClr val="tx2"/>
-          </a:solidFill>
-          <a:ln/>
-        </p:spPr>
-      </p:sp>
-      <p:sp>
-        <p:nvSpPr>
-          <p:cNvPr id="10" name="icon-circle-98"/>
-          <p:cNvSpPr/>
-          <p:nvPr/>
-        </p:nvSpPr>
-        <p:spPr>
-          <a:xfrm>
-            <a:off x="4582058" y="1737360"/>
-            <a:ext cx="731520" cy="731520"/>
-          </a:xfrm>
-          <a:prstGeom prst="ellipse">
-            <a:avLst/>
-          </a:prstGeom>
-          <a:solidFill>
-            <a:schemeClr val="accent1"/>
-          </a:solidFill>
-          <a:ln/>
-        </p:spPr>
-      </p:sp>
-      <p:pic>
-        <p:nvPicPr>
-          <p:cNvPr id="11" name="icon-99" descr="Rocket icon">    </p:cNvPr>
-          <p:cNvPicPr>
-            <a:picLocks noChangeAspect="1"/>
-          </p:cNvPicPr>
-          <p:nvPr/>
-        </p:nvPicPr>
-        <p:blipFill>
-          <a:blip r:embed="rId2"/>
-          <a:stretch>
-            <a:fillRect/>
-          </a:stretch>
-        </p:blipFill>
-        <p:spPr>
-          <a:xfrm>
-            <a:off x="4764938" y="1920240"/>
-            <a:ext cx="365760" cy="365760"/>
-          </a:xfrm>
-          <a:prstGeom prst="rect">
-            <a:avLst/>
-          </a:prstGeom>
-        </p:spPr>
-      </p:pic>
-      <p:sp>
-        <p:nvSpPr>
-          <p:cNvPr id="12" name="text-100"/>
-          <p:cNvSpPr txBox="1"/>
-          <p:nvPr/>
-        </p:nvSpPr>
-        <p:spPr>
-          <a:xfrm>
-            <a:off x="4582058" y="2697480"/>
-            <a:ext cx="3027578" cy="457200"/>
-          </a:xfrm>
-          <a:prstGeom prst="rect">
-            <a:avLst/>
-          </a:prstGeom>
-          <a:noFill/>
-          <a:ln/>
-        </p:spPr>
-        <p:txBody>
-          <a:bodyPr wrap="square" lIns="0" tIns="0" rIns="0" bIns="0" rtlCol="0" anchor="t"/>
-          <a:lstStyle/>
-          <a:p>
-            <a:pPr indent="0" marL="0">
-              <a:buNone/>
-            </a:pPr>
-            <a:r>
-              <a:rPr lang="en-US" sz="2600" b="1" dirty="0">
-                <a:solidFill>
-                  <a:schemeClr val="bg1"/>
-                </a:solidFill>
-              </a:rPr>
-              <a:t>HTTP API</a:t>
-            </a:r>
-            <a:endParaRPr lang="en-US" sz="2600" dirty="0"/>
-          </a:p>
-        </p:txBody>
-      </p:sp>
-      <p:sp>
-        <p:nvSpPr>
-          <p:cNvPr id="13" name="text-101"/>
-          <p:cNvSpPr txBox="1"/>
-          <p:nvPr/>
-        </p:nvSpPr>
-        <p:spPr>
-          <a:xfrm>
-            <a:off x="4582058" y="3200400"/>
-            <a:ext cx="3027578" cy="320040"/>
-          </a:xfrm>
-          <a:prstGeom prst="rect">
-            <a:avLst/>
-          </a:prstGeom>
-          <a:noFill/>
-          <a:ln/>
-        </p:spPr>
-        <p:txBody>
-          <a:bodyPr wrap="square" lIns="0" tIns="0" rIns="0" bIns="0" rtlCol="0" anchor="t"/>
-          <a:lstStyle/>
-          <a:p>
-            <a:pPr indent="0" marL="0">
-              <a:buNone/>
-            </a:pPr>
-            <a:r>
-              <a:rPr lang="en-US" sz="1600" b="1" dirty="0">
-                <a:solidFill>
-                  <a:schemeClr val="accent1"/>
-                </a:solidFill>
-              </a:rPr>
-              <a:t>Просто, швидко, дешевше</a:t>
-            </a:r>
-            <a:endParaRPr lang="en-US" sz="1600" dirty="0"/>
-          </a:p>
-        </p:txBody>
-      </p:sp>
-      <p:sp>
-        <p:nvSpPr>
-          <p:cNvPr id="14" name="text-102"/>
-          <p:cNvSpPr txBox="1"/>
-          <p:nvPr/>
-        </p:nvSpPr>
-        <p:spPr>
-          <a:xfrm>
-            <a:off x="4582058" y="3703320"/>
-            <a:ext cx="3027578" cy="1463040"/>
-          </a:xfrm>
-          <a:prstGeom prst="rect">
-            <a:avLst/>
-          </a:prstGeom>
-          <a:noFill/>
-          <a:ln/>
-        </p:spPr>
-        <p:txBody>
-          <a:bodyPr wrap="square" lIns="0" tIns="0" rIns="0" bIns="0" rtlCol="0" anchor="t"/>
-          <a:lstStyle/>
-          <a:p>
-            <a:pPr marL="342900" indent="-342900">
-              <a:spcAft>
-                <a:spcPts val="600"/>
-              </a:spcAft>
-              <a:buSzPct val="100000"/>
-              <a:buChar char="•"/>
-            </a:pPr>
-            <a:r>
-              <a:rPr lang="en-US" sz="1500" dirty="0">
-                <a:solidFill>
-                  <a:schemeClr val="bg1"/>
-                </a:solidFill>
-              </a:rPr>
-              <a:t>Менша ціна й затримка</a:t>
-            </a:r>
-            <a:endParaRPr lang="en-US" sz="1500" dirty="0"/>
-          </a:p>
-          <a:p>
-            <a:pPr marL="342900" indent="-342900">
-              <a:spcAft>
-                <a:spcPts val="600"/>
-              </a:spcAft>
-              <a:buSzPct val="100000"/>
-              <a:buChar char="•"/>
-            </a:pPr>
-            <a:r>
-              <a:rPr lang="en-US" sz="1500" dirty="0">
-                <a:solidFill>
-                  <a:schemeClr val="bg1"/>
-                </a:solidFill>
-              </a:rPr>
-              <a:t>JWT-авторизація, CORS «з коробки»</a:t>
-            </a:r>
-            <a:endParaRPr lang="en-US" sz="1500" dirty="0"/>
-          </a:p>
-          <a:p>
-            <a:pPr marL="342900" indent="-342900">
-              <a:spcAft>
-                <a:spcPts val="600"/>
-              </a:spcAft>
-              <a:buSzPct val="100000"/>
-              <a:buChar char="•"/>
-            </a:pPr>
-            <a:r>
-              <a:rPr lang="en-US" sz="1500" dirty="0">
-                <a:solidFill>
-                  <a:schemeClr val="bg1"/>
-                </a:solidFill>
-              </a:rPr>
-              <a:t>Без API-ключів і кешування</a:t>
-            </a:r>
-            <a:endParaRPr lang="en-US" sz="1500" dirty="0"/>
-          </a:p>
-        </p:txBody>
-      </p:sp>
-      <p:sp>
-        <p:nvSpPr>
-          <p:cNvPr id="15" name="panel-103"/>
-          <p:cNvSpPr/>
-          <p:nvPr/>
-        </p:nvSpPr>
-        <p:spPr>
-          <a:xfrm>
-            <a:off x="8066837" y="1463040"/>
-            <a:ext cx="3576218" cy="3840480"/>
-          </a:xfrm>
-          <a:prstGeom prst="roundRect">
-            <a:avLst>
-              <a:gd name="adj" fmla="val 3068"/>
-            </a:avLst>
-          </a:prstGeom>
-          <a:solidFill>
-            <a:schemeClr val="tx2"/>
-          </a:solidFill>
-          <a:ln/>
-        </p:spPr>
-      </p:sp>
-      <p:sp>
-        <p:nvSpPr>
-          <p:cNvPr id="16" name="icon-circle-104"/>
-          <p:cNvSpPr/>
-          <p:nvPr/>
-        </p:nvSpPr>
-        <p:spPr>
-          <a:xfrm>
-            <a:off x="8341157" y="1737360"/>
-            <a:ext cx="731520" cy="731520"/>
-          </a:xfrm>
-          <a:prstGeom prst="ellipse">
-            <a:avLst/>
-          </a:prstGeom>
-          <a:solidFill>
-            <a:schemeClr val="accent1"/>
-          </a:solidFill>
-          <a:ln/>
-        </p:spPr>
-      </p:sp>
-      <p:pic>
-        <p:nvPicPr>
-          <p:cNvPr id="17" name="icon-105" descr="ExchangeAlt icon">    </p:cNvPr>
+          <p:cNvPr id="5" name="icon-93" descr="Cogs icon"/>
           <p:cNvPicPr>
             <a:picLocks noChangeAspect="1"/>
           </p:cNvPicPr>
@@ -6795,7 +6523,7 @@
         </p:blipFill>
         <p:spPr>
           <a:xfrm>
-            <a:off x="8524037" y="1920240"/>
+            <a:off x="1005840" y="2442754"/>
             <a:ext cx="365760" cy="365760"/>
           </a:xfrm>
           <a:prstGeom prst="rect">
@@ -6805,13 +6533,13 @@
       </p:pic>
       <p:sp>
         <p:nvSpPr>
-          <p:cNvPr id="18" name="text-106"/>
-          <p:cNvSpPr txBox="1"/>
-          <p:nvPr/>
-        </p:nvSpPr>
-        <p:spPr>
-          <a:xfrm>
-            <a:off x="8341157" y="2697480"/>
+          <p:cNvPr id="6" name="text-94"/>
+          <p:cNvSpPr txBox="1"/>
+          <p:nvPr/>
+        </p:nvSpPr>
+        <p:spPr>
+          <a:xfrm>
+            <a:off x="822960" y="3219994"/>
             <a:ext cx="3027578" cy="457200"/>
           </a:xfrm>
           <a:prstGeom prst="rect">
@@ -6824,7 +6552,7 @@
           <a:bodyPr wrap="square" lIns="0" tIns="0" rIns="0" bIns="0" rtlCol="0" anchor="t"/>
           <a:lstStyle/>
           <a:p>
-            <a:pPr indent="0" marL="0">
+            <a:pPr marL="0" indent="0">
               <a:buNone/>
             </a:pPr>
             <a:r>
@@ -6833,7 +6561,7 @@
                   <a:schemeClr val="bg1"/>
                 </a:solidFill>
               </a:rPr>
-              <a:t>WebSocket API</a:t>
+              <a:t>REST API</a:t>
             </a:r>
             <a:endParaRPr lang="en-US" sz="2600" dirty="0"/>
           </a:p>
@@ -6841,13 +6569,13 @@
       </p:sp>
       <p:sp>
         <p:nvSpPr>
-          <p:cNvPr id="19" name="text-107"/>
-          <p:cNvSpPr txBox="1"/>
-          <p:nvPr/>
-        </p:nvSpPr>
-        <p:spPr>
-          <a:xfrm>
-            <a:off x="8341157" y="3200400"/>
+          <p:cNvPr id="7" name="text-95"/>
+          <p:cNvSpPr txBox="1"/>
+          <p:nvPr/>
+        </p:nvSpPr>
+        <p:spPr>
+          <a:xfrm>
+            <a:off x="822960" y="3722914"/>
             <a:ext cx="3027578" cy="320040"/>
           </a:xfrm>
           <a:prstGeom prst="rect">
@@ -6860,7 +6588,7 @@
           <a:bodyPr wrap="square" lIns="0" tIns="0" rIns="0" bIns="0" rtlCol="0" anchor="t"/>
           <a:lstStyle/>
           <a:p>
-            <a:pPr indent="0" marL="0">
+            <a:pPr marL="0" indent="0">
               <a:buNone/>
             </a:pPr>
             <a:r>
@@ -6869,7 +6597,7 @@
                   <a:schemeClr val="accent1"/>
                 </a:solidFill>
               </a:rPr>
-              <a:t>Двосторонній зв'язок</a:t>
+              <a:t>Максимум можливостей</a:t>
             </a:r>
             <a:endParaRPr lang="en-US" sz="1600" dirty="0"/>
           </a:p>
@@ -6877,13 +6605,13 @@
       </p:sp>
       <p:sp>
         <p:nvSpPr>
-          <p:cNvPr id="20" name="text-108"/>
-          <p:cNvSpPr txBox="1"/>
-          <p:nvPr/>
-        </p:nvSpPr>
-        <p:spPr>
-          <a:xfrm>
-            <a:off x="8341157" y="3703320"/>
+          <p:cNvPr id="8" name="text-96"/>
+          <p:cNvSpPr txBox="1"/>
+          <p:nvPr/>
+        </p:nvSpPr>
+        <p:spPr>
+          <a:xfrm>
+            <a:off x="822960" y="4225834"/>
             <a:ext cx="3027578" cy="1463040"/>
           </a:xfrm>
           <a:prstGeom prst="rect">
@@ -6909,7 +6637,7 @@
                   <a:schemeClr val="bg1"/>
                 </a:solidFill>
               </a:rPr>
-              <a:t>Постійне з'єднання з клієнтом</a:t>
+              <a:t>API-ключі та usage plans</a:t>
             </a:r>
             <a:endParaRPr lang="en-US" sz="1500" dirty="0"/>
           </a:p>
@@ -6927,7 +6655,7 @@
                   <a:schemeClr val="bg1"/>
                 </a:solidFill>
               </a:rPr>
-              <a:t>Чати, сповіщення, онлайн-ігри</a:t>
+              <a:t>Кешування й валідація запитів</a:t>
             </a:r>
             <a:endParaRPr lang="en-US" sz="1500" dirty="0"/>
           </a:p>
@@ -6945,7 +6673,7 @@
                   <a:schemeClr val="bg1"/>
                 </a:solidFill>
               </a:rPr>
-              <a:t>Маршрути $connect, $disconnect</a:t>
+              <a:t>Інтеграція з WAF, Cognito, IAM</a:t>
             </a:r>
             <a:endParaRPr lang="en-US" sz="1500" dirty="0"/>
           </a:p>
@@ -6953,59 +6681,457 @@
       </p:sp>
       <p:sp>
         <p:nvSpPr>
-          <p:cNvPr id="21" name="panel-109"/>
+          <p:cNvPr id="9" name="panel-97"/>
           <p:cNvSpPr/>
           <p:nvPr/>
         </p:nvSpPr>
         <p:spPr>
           <a:xfrm>
-            <a:off x="548640" y="5532120"/>
-            <a:ext cx="11094415" cy="731520"/>
+            <a:off x="4307738" y="1985554"/>
+            <a:ext cx="3576218" cy="3840480"/>
           </a:xfrm>
           <a:prstGeom prst="roundRect">
             <a:avLst>
-              <a:gd name="adj" fmla="val 15000"/>
+              <a:gd name="adj" fmla="val 3068"/>
             </a:avLst>
           </a:prstGeom>
           <a:solidFill>
+            <a:schemeClr val="tx2"/>
+          </a:solidFill>
+          <a:ln/>
+        </p:spPr>
+        <p:txBody>
+          <a:bodyPr/>
+          <a:lstStyle/>
+          <a:p>
+            <a:endParaRPr lang="en-UA"/>
+          </a:p>
+        </p:txBody>
+      </p:sp>
+      <p:sp>
+        <p:nvSpPr>
+          <p:cNvPr id="10" name="icon-circle-98"/>
+          <p:cNvSpPr/>
+          <p:nvPr/>
+        </p:nvSpPr>
+        <p:spPr>
+          <a:xfrm>
+            <a:off x="4582058" y="2259874"/>
+            <a:ext cx="731520" cy="731520"/>
+          </a:xfrm>
+          <a:prstGeom prst="ellipse">
+            <a:avLst/>
+          </a:prstGeom>
+          <a:solidFill>
             <a:schemeClr val="accent1"/>
           </a:solidFill>
           <a:ln/>
         </p:spPr>
-      </p:sp>
-      <p:sp>
-        <p:nvSpPr>
-          <p:cNvPr id="22" name="text-110"/>
-          <p:cNvSpPr txBox="1"/>
-          <p:nvPr/>
-        </p:nvSpPr>
-        <p:spPr>
-          <a:xfrm>
-            <a:off x="822960" y="5532120"/>
-            <a:ext cx="10515600" cy="731520"/>
-          </a:xfrm>
-          <a:prstGeom prst="rect">
-            <a:avLst/>
-          </a:prstGeom>
-          <a:noFill/>
-          <a:ln/>
-        </p:spPr>
-        <p:txBody>
-          <a:bodyPr wrap="square" lIns="0" tIns="0" rIns="0" bIns="0" rtlCol="0" anchor="ctr"/>
-          <a:lstStyle/>
-          <a:p>
-            <a:pPr indent="0" marL="0">
-              <a:buNone/>
-            </a:pPr>
-            <a:r>
-              <a:rPr lang="en-US" sz="1700" b="1" dirty="0">
-                <a:solidFill>
-                  <a:schemeClr val="tx1"/>
-                </a:solidFill>
-              </a:rPr>
-              <a:t>На практиці працюємо з REST API: на ньому видно всі можливості — ключі, ліміти й кеш.</a:t>
-            </a:r>
-            <a:endParaRPr lang="en-US" sz="1700" dirty="0"/>
+        <p:txBody>
+          <a:bodyPr/>
+          <a:lstStyle/>
+          <a:p>
+            <a:endParaRPr lang="en-UA"/>
+          </a:p>
+        </p:txBody>
+      </p:sp>
+      <p:pic>
+        <p:nvPicPr>
+          <p:cNvPr id="11" name="icon-99" descr="Rocket icon"/>
+          <p:cNvPicPr>
+            <a:picLocks noChangeAspect="1"/>
+          </p:cNvPicPr>
+          <p:nvPr/>
+        </p:nvPicPr>
+        <p:blipFill>
+          <a:blip r:embed="rId4"/>
+          <a:stretch>
+            <a:fillRect/>
+          </a:stretch>
+        </p:blipFill>
+        <p:spPr>
+          <a:xfrm>
+            <a:off x="4764938" y="2442754"/>
+            <a:ext cx="365760" cy="365760"/>
+          </a:xfrm>
+          <a:prstGeom prst="rect">
+            <a:avLst/>
+          </a:prstGeom>
+        </p:spPr>
+      </p:pic>
+      <p:sp>
+        <p:nvSpPr>
+          <p:cNvPr id="12" name="text-100"/>
+          <p:cNvSpPr txBox="1"/>
+          <p:nvPr/>
+        </p:nvSpPr>
+        <p:spPr>
+          <a:xfrm>
+            <a:off x="4582058" y="3219994"/>
+            <a:ext cx="3027578" cy="457200"/>
+          </a:xfrm>
+          <a:prstGeom prst="rect">
+            <a:avLst/>
+          </a:prstGeom>
+          <a:noFill/>
+          <a:ln/>
+        </p:spPr>
+        <p:txBody>
+          <a:bodyPr wrap="square" lIns="0" tIns="0" rIns="0" bIns="0" rtlCol="0" anchor="t"/>
+          <a:lstStyle/>
+          <a:p>
+            <a:pPr marL="0" indent="0">
+              <a:buNone/>
+            </a:pPr>
+            <a:r>
+              <a:rPr lang="en-US" sz="2600" b="1" dirty="0">
+                <a:solidFill>
+                  <a:schemeClr val="bg1"/>
+                </a:solidFill>
+              </a:rPr>
+              <a:t>HTTP API</a:t>
+            </a:r>
+            <a:endParaRPr lang="en-US" sz="2600" dirty="0"/>
+          </a:p>
+        </p:txBody>
+      </p:sp>
+      <p:sp>
+        <p:nvSpPr>
+          <p:cNvPr id="13" name="text-101"/>
+          <p:cNvSpPr txBox="1"/>
+          <p:nvPr/>
+        </p:nvSpPr>
+        <p:spPr>
+          <a:xfrm>
+            <a:off x="4582058" y="3722914"/>
+            <a:ext cx="3027578" cy="320040"/>
+          </a:xfrm>
+          <a:prstGeom prst="rect">
+            <a:avLst/>
+          </a:prstGeom>
+          <a:noFill/>
+          <a:ln/>
+        </p:spPr>
+        <p:txBody>
+          <a:bodyPr wrap="square" lIns="0" tIns="0" rIns="0" bIns="0" rtlCol="0" anchor="t"/>
+          <a:lstStyle/>
+          <a:p>
+            <a:pPr marL="0" indent="0">
+              <a:buNone/>
+            </a:pPr>
+            <a:r>
+              <a:rPr lang="en-US" sz="1600" b="1" dirty="0">
+                <a:solidFill>
+                  <a:schemeClr val="accent1"/>
+                </a:solidFill>
+              </a:rPr>
+              <a:t>Просто, швидко, дешевше</a:t>
+            </a:r>
+            <a:endParaRPr lang="en-US" sz="1600" dirty="0"/>
+          </a:p>
+        </p:txBody>
+      </p:sp>
+      <p:sp>
+        <p:nvSpPr>
+          <p:cNvPr id="14" name="text-102"/>
+          <p:cNvSpPr txBox="1"/>
+          <p:nvPr/>
+        </p:nvSpPr>
+        <p:spPr>
+          <a:xfrm>
+            <a:off x="4582058" y="4225834"/>
+            <a:ext cx="3027578" cy="1463040"/>
+          </a:xfrm>
+          <a:prstGeom prst="rect">
+            <a:avLst/>
+          </a:prstGeom>
+          <a:noFill/>
+          <a:ln/>
+        </p:spPr>
+        <p:txBody>
+          <a:bodyPr wrap="square" lIns="0" tIns="0" rIns="0" bIns="0" rtlCol="0" anchor="t"/>
+          <a:lstStyle/>
+          <a:p>
+            <a:pPr marL="342900" indent="-342900">
+              <a:spcAft>
+                <a:spcPts val="600"/>
+              </a:spcAft>
+              <a:buSzPct val="100000"/>
+              <a:buChar char="•"/>
+            </a:pPr>
+            <a:r>
+              <a:rPr lang="en-US" sz="1500" dirty="0">
+                <a:solidFill>
+                  <a:schemeClr val="bg1"/>
+                </a:solidFill>
+              </a:rPr>
+              <a:t>Менша ціна й затримка</a:t>
+            </a:r>
+            <a:endParaRPr lang="en-US" sz="1500" dirty="0"/>
+          </a:p>
+          <a:p>
+            <a:pPr marL="342900" indent="-342900">
+              <a:spcAft>
+                <a:spcPts val="600"/>
+              </a:spcAft>
+              <a:buSzPct val="100000"/>
+              <a:buChar char="•"/>
+            </a:pPr>
+            <a:r>
+              <a:rPr lang="en-US" sz="1500" dirty="0">
+                <a:solidFill>
+                  <a:schemeClr val="bg1"/>
+                </a:solidFill>
+              </a:rPr>
+              <a:t>JWT-авторизація, CORS «з коробки»</a:t>
+            </a:r>
+            <a:endParaRPr lang="en-US" sz="1500" dirty="0"/>
+          </a:p>
+          <a:p>
+            <a:pPr marL="342900" indent="-342900">
+              <a:spcAft>
+                <a:spcPts val="600"/>
+              </a:spcAft>
+              <a:buSzPct val="100000"/>
+              <a:buChar char="•"/>
+            </a:pPr>
+            <a:r>
+              <a:rPr lang="en-US" sz="1500" dirty="0">
+                <a:solidFill>
+                  <a:schemeClr val="bg1"/>
+                </a:solidFill>
+              </a:rPr>
+              <a:t>Без API-ключів і кешування</a:t>
+            </a:r>
+            <a:endParaRPr lang="en-US" sz="1500" dirty="0"/>
+          </a:p>
+        </p:txBody>
+      </p:sp>
+      <p:sp>
+        <p:nvSpPr>
+          <p:cNvPr id="15" name="panel-103"/>
+          <p:cNvSpPr/>
+          <p:nvPr/>
+        </p:nvSpPr>
+        <p:spPr>
+          <a:xfrm>
+            <a:off x="8066837" y="1985554"/>
+            <a:ext cx="3576218" cy="3840480"/>
+          </a:xfrm>
+          <a:prstGeom prst="roundRect">
+            <a:avLst>
+              <a:gd name="adj" fmla="val 3068"/>
+            </a:avLst>
+          </a:prstGeom>
+          <a:solidFill>
+            <a:schemeClr val="tx2"/>
+          </a:solidFill>
+          <a:ln/>
+        </p:spPr>
+        <p:txBody>
+          <a:bodyPr/>
+          <a:lstStyle/>
+          <a:p>
+            <a:endParaRPr lang="en-UA"/>
+          </a:p>
+        </p:txBody>
+      </p:sp>
+      <p:sp>
+        <p:nvSpPr>
+          <p:cNvPr id="16" name="icon-circle-104"/>
+          <p:cNvSpPr/>
+          <p:nvPr/>
+        </p:nvSpPr>
+        <p:spPr>
+          <a:xfrm>
+            <a:off x="8341157" y="2259874"/>
+            <a:ext cx="731520" cy="731520"/>
+          </a:xfrm>
+          <a:prstGeom prst="ellipse">
+            <a:avLst/>
+          </a:prstGeom>
+          <a:solidFill>
+            <a:schemeClr val="accent1"/>
+          </a:solidFill>
+          <a:ln/>
+        </p:spPr>
+        <p:txBody>
+          <a:bodyPr/>
+          <a:lstStyle/>
+          <a:p>
+            <a:endParaRPr lang="en-UA"/>
+          </a:p>
+        </p:txBody>
+      </p:sp>
+      <p:pic>
+        <p:nvPicPr>
+          <p:cNvPr id="17" name="icon-105" descr="ExchangeAlt icon"/>
+          <p:cNvPicPr>
+            <a:picLocks noChangeAspect="1"/>
+          </p:cNvPicPr>
+          <p:nvPr/>
+        </p:nvPicPr>
+        <p:blipFill>
+          <a:blip r:embed="rId5"/>
+          <a:stretch>
+            <a:fillRect/>
+          </a:stretch>
+        </p:blipFill>
+        <p:spPr>
+          <a:xfrm>
+            <a:off x="8524037" y="2442754"/>
+            <a:ext cx="365760" cy="365760"/>
+          </a:xfrm>
+          <a:prstGeom prst="rect">
+            <a:avLst/>
+          </a:prstGeom>
+        </p:spPr>
+      </p:pic>
+      <p:sp>
+        <p:nvSpPr>
+          <p:cNvPr id="18" name="text-106"/>
+          <p:cNvSpPr txBox="1"/>
+          <p:nvPr/>
+        </p:nvSpPr>
+        <p:spPr>
+          <a:xfrm>
+            <a:off x="8341157" y="3219994"/>
+            <a:ext cx="3027578" cy="457200"/>
+          </a:xfrm>
+          <a:prstGeom prst="rect">
+            <a:avLst/>
+          </a:prstGeom>
+          <a:noFill/>
+          <a:ln/>
+        </p:spPr>
+        <p:txBody>
+          <a:bodyPr wrap="square" lIns="0" tIns="0" rIns="0" bIns="0" rtlCol="0" anchor="t"/>
+          <a:lstStyle/>
+          <a:p>
+            <a:pPr marL="0" indent="0">
+              <a:buNone/>
+            </a:pPr>
+            <a:r>
+              <a:rPr lang="en-US" sz="2600" b="1" dirty="0">
+                <a:solidFill>
+                  <a:schemeClr val="bg1"/>
+                </a:solidFill>
+              </a:rPr>
+              <a:t>WebSocket API</a:t>
+            </a:r>
+            <a:endParaRPr lang="en-US" sz="2600" dirty="0"/>
+          </a:p>
+        </p:txBody>
+      </p:sp>
+      <p:sp>
+        <p:nvSpPr>
+          <p:cNvPr id="19" name="text-107"/>
+          <p:cNvSpPr txBox="1"/>
+          <p:nvPr/>
+        </p:nvSpPr>
+        <p:spPr>
+          <a:xfrm>
+            <a:off x="8341157" y="3722914"/>
+            <a:ext cx="3027578" cy="320040"/>
+          </a:xfrm>
+          <a:prstGeom prst="rect">
+            <a:avLst/>
+          </a:prstGeom>
+          <a:noFill/>
+          <a:ln/>
+        </p:spPr>
+        <p:txBody>
+          <a:bodyPr wrap="square" lIns="0" tIns="0" rIns="0" bIns="0" rtlCol="0" anchor="t"/>
+          <a:lstStyle/>
+          <a:p>
+            <a:pPr marL="0" indent="0">
+              <a:buNone/>
+            </a:pPr>
+            <a:r>
+              <a:rPr lang="en-US" sz="1600" b="1" dirty="0">
+                <a:solidFill>
+                  <a:schemeClr val="accent1"/>
+                </a:solidFill>
+              </a:rPr>
+              <a:t>Двосторонній зв'язок</a:t>
+            </a:r>
+            <a:endParaRPr lang="en-US" sz="1600" dirty="0"/>
+          </a:p>
+        </p:txBody>
+      </p:sp>
+      <p:sp>
+        <p:nvSpPr>
+          <p:cNvPr id="20" name="text-108"/>
+          <p:cNvSpPr txBox="1"/>
+          <p:nvPr/>
+        </p:nvSpPr>
+        <p:spPr>
+          <a:xfrm>
+            <a:off x="8341157" y="4225834"/>
+            <a:ext cx="3027578" cy="1463040"/>
+          </a:xfrm>
+          <a:prstGeom prst="rect">
+            <a:avLst/>
+          </a:prstGeom>
+          <a:noFill/>
+          <a:ln/>
+        </p:spPr>
+        <p:txBody>
+          <a:bodyPr wrap="square" lIns="0" tIns="0" rIns="0" bIns="0" rtlCol="0" anchor="t"/>
+          <a:lstStyle/>
+          <a:p>
+            <a:pPr marL="342900" indent="-342900">
+              <a:spcAft>
+                <a:spcPts val="600"/>
+              </a:spcAft>
+              <a:buSzPct val="100000"/>
+              <a:buChar char="•"/>
+            </a:pPr>
+            <a:r>
+              <a:rPr lang="en-US" sz="1500" dirty="0">
+                <a:solidFill>
+                  <a:schemeClr val="bg1"/>
+                </a:solidFill>
+              </a:rPr>
+              <a:t>Постійне з'єднання з клієнтом</a:t>
+            </a:r>
+            <a:endParaRPr lang="en-US" sz="1500" dirty="0"/>
+          </a:p>
+          <a:p>
+            <a:pPr marL="342900" indent="-342900">
+              <a:spcAft>
+                <a:spcPts val="600"/>
+              </a:spcAft>
+              <a:buSzPct val="100000"/>
+              <a:buChar char="•"/>
+            </a:pPr>
+            <a:r>
+              <a:rPr lang="en-US" sz="1500" dirty="0">
+                <a:solidFill>
+                  <a:schemeClr val="bg1"/>
+                </a:solidFill>
+              </a:rPr>
+              <a:t>Чати, сповіщення, онлайн-ігри</a:t>
+            </a:r>
+            <a:endParaRPr lang="en-US" sz="1500" dirty="0"/>
+          </a:p>
+          <a:p>
+            <a:pPr marL="342900" indent="-342900">
+              <a:spcAft>
+                <a:spcPts val="600"/>
+              </a:spcAft>
+              <a:buSzPct val="100000"/>
+              <a:buChar char="•"/>
+            </a:pPr>
+            <a:r>
+              <a:rPr lang="en-US" sz="1500" dirty="0">
+                <a:solidFill>
+                  <a:schemeClr val="bg1"/>
+                </a:solidFill>
+              </a:rPr>
+              <a:t>Маршрути $connect, $disconnect</a:t>
+            </a:r>
+            <a:endParaRPr lang="en-US" sz="1500" dirty="0"/>
           </a:p>
         </p:txBody>
       </p:sp>
@@ -7029,7 +7155,7 @@
           </a:prstGeom>
           <a:extLst>
             <a:ext uri="{C572A759-6A51-4108-AA02-DFA0A04FC94B}">
-              <ma14:wrappingTextBoxFlag xmlns:ma14="http://schemas.microsoft.com/office/mac/drawingml/2011/main" val="0"/>
+              <ma14:wrappingTextBoxFlag xmlns:ma14="http://schemas.microsoft.com/office/mac/drawingml/2011/main" xmlns="" val="0"/>
             </a:ext>
           </a:extLst>
         </p:spPr>
@@ -7047,7 +7173,7 @@
           <a:p>
             <a:pPr algn="r"/>
             <a:fld id="{F7021451-1387-4CA6-816F-3879F97B5CBC}" type="slidenum">
-              <a:rPr b="0" lang="en-US"/>
+              <a:rPr lang="en-US" b="0"/>
               <a:t>3</a:t>
             </a:fld>
             <a:endParaRPr lang="en-US"/>
@@ -7082,9 +7208,11 @@
       <p:sp>
         <p:nvSpPr>
           <p:cNvPr id="2" name="Text 0"/>
-          <p:cNvSpPr/>
+          <p:cNvSpPr>
+            <a:spLocks noGrp="1"/>
+          </p:cNvSpPr>
           <p:nvPr>
-            <p:ph idx="100" type="title" hasCustomPrompt="1"/>
+            <p:ph type="title" idx="100" hasCustomPrompt="1"/>
           </p:nvPr>
         </p:nvSpPr>
         <p:spPr>
@@ -7102,7 +7230,7 @@
           <a:bodyPr wrap="square" lIns="0" tIns="0" rIns="0" bIns="0" rtlCol="0" anchor="ctr"/>
           <a:lstStyle/>
           <a:p>
-            <a:pPr algn="l" indent="0" marL="0">
+            <a:pPr marL="0" indent="0" algn="l">
               <a:buNone/>
             </a:pPr>
             <a:r>
@@ -7138,13 +7266,20 @@
           </a:solidFill>
           <a:ln/>
           <a:effectLst>
-            <a:outerShdw sx="100000" sy="100000" kx="0" ky="0" algn="bl" rotWithShape="0" blurRad="101600" dist="25400" dir="5400000">
+            <a:outerShdw blurRad="101600" dist="25400" dir="5400000" algn="bl" rotWithShape="0">
               <a:srgbClr val="000000">
                 <a:alpha val="12000"/>
               </a:srgbClr>
             </a:outerShdw>
           </a:effectLst>
         </p:spPr>
+        <p:txBody>
+          <a:bodyPr/>
+          <a:lstStyle/>
+          <a:p>
+            <a:endParaRPr lang="en-UA"/>
+          </a:p>
+        </p:txBody>
       </p:sp>
       <p:sp>
         <p:nvSpPr>
@@ -7169,7 +7304,7 @@
           <a:bodyPr wrap="square" lIns="0" tIns="0" rIns="0" bIns="0" rtlCol="0" anchor="ctr"/>
           <a:lstStyle/>
           <a:p>
-            <a:pPr algn="ctr" indent="0" marL="0">
+            <a:pPr marL="0" indent="0" algn="ctr">
               <a:buNone/>
             </a:pPr>
             <a:r>
@@ -7205,7 +7340,7 @@
           <a:bodyPr wrap="square" lIns="0" tIns="0" rIns="0" bIns="0" rtlCol="0" anchor="t"/>
           <a:lstStyle/>
           <a:p>
-            <a:pPr indent="0" marL="0">
+            <a:pPr marL="0" indent="0">
               <a:buNone/>
             </a:pPr>
             <a:r>
@@ -7241,7 +7376,7 @@
           <a:bodyPr wrap="square" lIns="0" tIns="0" rIns="0" bIns="0" rtlCol="0" anchor="t"/>
           <a:lstStyle/>
           <a:p>
-            <a:pPr indent="0" marL="0">
+            <a:pPr marL="0" indent="0">
               <a:buNone/>
             </a:pPr>
             <a:r>
@@ -7279,6 +7414,13 @@
             <a:tailEnd type="triangle"/>
           </a:ln>
         </p:spPr>
+        <p:txBody>
+          <a:bodyPr/>
+          <a:lstStyle/>
+          <a:p>
+            <a:endParaRPr lang="en-UA"/>
+          </a:p>
+        </p:txBody>
       </p:sp>
       <p:sp>
         <p:nvSpPr>
@@ -7301,13 +7443,20 @@
           </a:solidFill>
           <a:ln/>
           <a:effectLst>
-            <a:outerShdw sx="100000" sy="100000" kx="0" ky="0" algn="bl" rotWithShape="0" blurRad="101600" dist="25400" dir="5400000">
+            <a:outerShdw blurRad="101600" dist="25400" dir="5400000" algn="bl" rotWithShape="0">
               <a:srgbClr val="000000">
                 <a:alpha val="12000"/>
               </a:srgbClr>
             </a:outerShdw>
           </a:effectLst>
         </p:spPr>
+        <p:txBody>
+          <a:bodyPr/>
+          <a:lstStyle/>
+          <a:p>
+            <a:endParaRPr lang="en-UA"/>
+          </a:p>
+        </p:txBody>
       </p:sp>
       <p:sp>
         <p:nvSpPr>
@@ -7332,7 +7481,7 @@
           <a:bodyPr wrap="square" lIns="0" tIns="0" rIns="0" bIns="0" rtlCol="0" anchor="ctr"/>
           <a:lstStyle/>
           <a:p>
-            <a:pPr algn="ctr" indent="0" marL="0">
+            <a:pPr marL="0" indent="0" algn="ctr">
               <a:buNone/>
             </a:pPr>
             <a:r>
@@ -7368,7 +7517,7 @@
           <a:bodyPr wrap="square" lIns="0" tIns="0" rIns="0" bIns="0" rtlCol="0" anchor="t"/>
           <a:lstStyle/>
           <a:p>
-            <a:pPr indent="0" marL="0">
+            <a:pPr marL="0" indent="0">
               <a:buNone/>
             </a:pPr>
             <a:r>
@@ -7404,7 +7553,7 @@
           <a:bodyPr wrap="square" lIns="0" tIns="0" rIns="0" bIns="0" rtlCol="0" anchor="t"/>
           <a:lstStyle/>
           <a:p>
-            <a:pPr indent="0" marL="0">
+            <a:pPr marL="0" indent="0">
               <a:buNone/>
             </a:pPr>
             <a:r>
@@ -7442,6 +7591,13 @@
             <a:tailEnd type="triangle"/>
           </a:ln>
         </p:spPr>
+        <p:txBody>
+          <a:bodyPr/>
+          <a:lstStyle/>
+          <a:p>
+            <a:endParaRPr lang="en-UA"/>
+          </a:p>
+        </p:txBody>
       </p:sp>
       <p:sp>
         <p:nvSpPr>
@@ -7464,13 +7620,20 @@
           </a:solidFill>
           <a:ln/>
           <a:effectLst>
-            <a:outerShdw sx="100000" sy="100000" kx="0" ky="0" algn="bl" rotWithShape="0" blurRad="101600" dist="25400" dir="5400000">
+            <a:outerShdw blurRad="101600" dist="25400" dir="5400000" algn="bl" rotWithShape="0">
               <a:srgbClr val="000000">
                 <a:alpha val="12000"/>
               </a:srgbClr>
             </a:outerShdw>
           </a:effectLst>
         </p:spPr>
+        <p:txBody>
+          <a:bodyPr/>
+          <a:lstStyle/>
+          <a:p>
+            <a:endParaRPr lang="en-UA"/>
+          </a:p>
+        </p:txBody>
       </p:sp>
       <p:sp>
         <p:nvSpPr>
@@ -7495,7 +7658,7 @@
           <a:bodyPr wrap="square" lIns="0" tIns="0" rIns="0" bIns="0" rtlCol="0" anchor="ctr"/>
           <a:lstStyle/>
           <a:p>
-            <a:pPr algn="ctr" indent="0" marL="0">
+            <a:pPr marL="0" indent="0" algn="ctr">
               <a:buNone/>
             </a:pPr>
             <a:r>
@@ -7531,7 +7694,7 @@
           <a:bodyPr wrap="square" lIns="0" tIns="0" rIns="0" bIns="0" rtlCol="0" anchor="t"/>
           <a:lstStyle/>
           <a:p>
-            <a:pPr indent="0" marL="0">
+            <a:pPr marL="0" indent="0">
               <a:buNone/>
             </a:pPr>
             <a:r>
@@ -7567,7 +7730,7 @@
           <a:bodyPr wrap="square" lIns="0" tIns="0" rIns="0" bIns="0" rtlCol="0" anchor="t"/>
           <a:lstStyle/>
           <a:p>
-            <a:pPr indent="0" marL="0">
+            <a:pPr marL="0" indent="0">
               <a:buNone/>
             </a:pPr>
             <a:r>
@@ -7605,6 +7768,13 @@
             <a:tailEnd type="triangle"/>
           </a:ln>
         </p:spPr>
+        <p:txBody>
+          <a:bodyPr/>
+          <a:lstStyle/>
+          <a:p>
+            <a:endParaRPr lang="en-UA"/>
+          </a:p>
+        </p:txBody>
       </p:sp>
       <p:sp>
         <p:nvSpPr>
@@ -7627,13 +7797,20 @@
           </a:solidFill>
           <a:ln/>
           <a:effectLst>
-            <a:outerShdw sx="100000" sy="100000" kx="0" ky="0" algn="bl" rotWithShape="0" blurRad="101600" dist="25400" dir="5400000">
+            <a:outerShdw blurRad="101600" dist="25400" dir="5400000" algn="bl" rotWithShape="0">
               <a:srgbClr val="000000">
                 <a:alpha val="12000"/>
               </a:srgbClr>
             </a:outerShdw>
           </a:effectLst>
         </p:spPr>
+        <p:txBody>
+          <a:bodyPr/>
+          <a:lstStyle/>
+          <a:p>
+            <a:endParaRPr lang="en-UA"/>
+          </a:p>
+        </p:txBody>
       </p:sp>
       <p:sp>
         <p:nvSpPr>
@@ -7658,7 +7835,7 @@
           <a:bodyPr wrap="square" lIns="0" tIns="0" rIns="0" bIns="0" rtlCol="0" anchor="ctr"/>
           <a:lstStyle/>
           <a:p>
-            <a:pPr algn="ctr" indent="0" marL="0">
+            <a:pPr marL="0" indent="0" algn="ctr">
               <a:buNone/>
             </a:pPr>
             <a:r>
@@ -7694,7 +7871,7 @@
           <a:bodyPr wrap="square" lIns="0" tIns="0" rIns="0" bIns="0" rtlCol="0" anchor="t"/>
           <a:lstStyle/>
           <a:p>
-            <a:pPr indent="0" marL="0">
+            <a:pPr marL="0" indent="0">
               <a:buNone/>
             </a:pPr>
             <a:r>
@@ -7730,7 +7907,7 @@
           <a:bodyPr wrap="square" lIns="0" tIns="0" rIns="0" bIns="0" rtlCol="0" anchor="t"/>
           <a:lstStyle/>
           <a:p>
-            <a:pPr indent="0" marL="0">
+            <a:pPr marL="0" indent="0">
               <a:buNone/>
             </a:pPr>
             <a:r>
@@ -7768,6 +7945,13 @@
             <a:tailEnd type="triangle"/>
           </a:ln>
         </p:spPr>
+        <p:txBody>
+          <a:bodyPr/>
+          <a:lstStyle/>
+          <a:p>
+            <a:endParaRPr lang="en-UA"/>
+          </a:p>
+        </p:txBody>
       </p:sp>
       <p:sp>
         <p:nvSpPr>
@@ -7790,13 +7974,20 @@
           </a:solidFill>
           <a:ln/>
           <a:effectLst>
-            <a:outerShdw sx="100000" sy="100000" kx="0" ky="0" algn="bl" rotWithShape="0" blurRad="101600" dist="25400" dir="5400000">
+            <a:outerShdw blurRad="101600" dist="25400" dir="5400000" algn="bl" rotWithShape="0">
               <a:srgbClr val="000000">
                 <a:alpha val="12000"/>
               </a:srgbClr>
             </a:outerShdw>
           </a:effectLst>
         </p:spPr>
+        <p:txBody>
+          <a:bodyPr/>
+          <a:lstStyle/>
+          <a:p>
+            <a:endParaRPr lang="en-UA"/>
+          </a:p>
+        </p:txBody>
       </p:sp>
       <p:sp>
         <p:nvSpPr>
@@ -7821,7 +8012,7 @@
           <a:bodyPr wrap="square" lIns="0" tIns="0" rIns="0" bIns="0" rtlCol="0" anchor="ctr"/>
           <a:lstStyle/>
           <a:p>
-            <a:pPr algn="ctr" indent="0" marL="0">
+            <a:pPr marL="0" indent="0" algn="ctr">
               <a:buNone/>
             </a:pPr>
             <a:r>
@@ -7857,7 +8048,7 @@
           <a:bodyPr wrap="square" lIns="0" tIns="0" rIns="0" bIns="0" rtlCol="0" anchor="t"/>
           <a:lstStyle/>
           <a:p>
-            <a:pPr indent="0" marL="0">
+            <a:pPr marL="0" indent="0">
               <a:buNone/>
             </a:pPr>
             <a:r>
@@ -7893,7 +8084,7 @@
           <a:bodyPr wrap="square" lIns="0" tIns="0" rIns="0" bIns="0" rtlCol="0" anchor="t"/>
           <a:lstStyle/>
           <a:p>
-            <a:pPr indent="0" marL="0">
+            <a:pPr marL="0" indent="0">
               <a:buNone/>
             </a:pPr>
             <a:r>
@@ -7929,6 +8120,13 @@
           </a:solidFill>
           <a:ln/>
         </p:spPr>
+        <p:txBody>
+          <a:bodyPr/>
+          <a:lstStyle/>
+          <a:p>
+            <a:endParaRPr lang="en-UA"/>
+          </a:p>
+        </p:txBody>
       </p:sp>
       <p:sp>
         <p:nvSpPr>
@@ -7951,7 +8149,7 @@
           <a:bodyPr wrap="square" lIns="0" tIns="0" rIns="0" bIns="0" rtlCol="0" anchor="t"/>
           <a:lstStyle/>
           <a:p>
-            <a:pPr indent="0" marL="0">
+            <a:pPr marL="0" indent="0">
               <a:buNone/>
             </a:pPr>
             <a:r>
@@ -7987,7 +8185,7 @@
           <a:bodyPr wrap="square" lIns="0" tIns="0" rIns="0" bIns="0" rtlCol="0" anchor="t"/>
           <a:lstStyle/>
           <a:p>
-            <a:pPr indent="0" marL="0">
+            <a:pPr marL="0" indent="0">
               <a:buNone/>
             </a:pPr>
             <a:r>
@@ -8004,7 +8202,7 @@
             <a:endParaRPr lang="en-US" sz="1300" dirty="0"/>
           </a:p>
           <a:p>
-            <a:pPr indent="0" marL="0">
+            <a:pPr marL="0" indent="0">
               <a:buNone/>
             </a:pPr>
             <a:r>
@@ -8021,7 +8219,7 @@
             <a:endParaRPr lang="en-US" sz="1300" dirty="0"/>
           </a:p>
           <a:p>
-            <a:pPr indent="0" marL="0">
+            <a:pPr marL="0" indent="0">
               <a:buNone/>
             </a:pPr>
             <a:r>
@@ -8038,7 +8236,7 @@
             <a:endParaRPr lang="en-US" sz="1300" dirty="0"/>
           </a:p>
           <a:p>
-            <a:pPr indent="0" marL="0">
+            <a:pPr marL="0" indent="0">
               <a:buNone/>
             </a:pPr>
             <a:r>
@@ -8055,7 +8253,7 @@
             <a:endParaRPr lang="en-US" sz="1300" dirty="0"/>
           </a:p>
           <a:p>
-            <a:pPr indent="0" marL="0">
+            <a:pPr marL="0" indent="0">
               <a:buNone/>
             </a:pPr>
             <a:r>
@@ -8072,7 +8270,7 @@
             <a:endParaRPr lang="en-US" sz="1300" dirty="0"/>
           </a:p>
           <a:p>
-            <a:pPr indent="0" marL="0">
+            <a:pPr marL="0" indent="0">
               <a:buNone/>
             </a:pPr>
             <a:r>
@@ -8089,7 +8287,7 @@
             <a:endParaRPr lang="en-US" sz="1300" dirty="0"/>
           </a:p>
           <a:p>
-            <a:pPr indent="0" marL="0">
+            <a:pPr marL="0" indent="0">
               <a:buNone/>
             </a:pPr>
             <a:r>
@@ -8106,7 +8304,7 @@
             <a:endParaRPr lang="en-US" sz="1300" dirty="0"/>
           </a:p>
           <a:p>
-            <a:pPr indent="0" marL="0">
+            <a:pPr marL="0" indent="0">
               <a:buNone/>
             </a:pPr>
             <a:r>
@@ -8123,7 +8321,7 @@
             <a:endParaRPr lang="en-US" sz="1300" dirty="0"/>
           </a:p>
           <a:p>
-            <a:pPr indent="0" marL="0">
+            <a:pPr marL="0" indent="0">
               <a:buNone/>
             </a:pPr>
             <a:r>
@@ -8162,13 +8360,20 @@
           </a:solidFill>
           <a:ln/>
           <a:effectLst>
-            <a:outerShdw sx="100000" sy="100000" kx="0" ky="0" algn="bl" rotWithShape="0" blurRad="101600" dist="25400" dir="5400000">
+            <a:outerShdw blurRad="101600" dist="25400" dir="5400000" algn="bl" rotWithShape="0">
               <a:srgbClr val="000000">
                 <a:alpha val="12000"/>
               </a:srgbClr>
             </a:outerShdw>
           </a:effectLst>
         </p:spPr>
+        <p:txBody>
+          <a:bodyPr/>
+          <a:lstStyle/>
+          <a:p>
+            <a:endParaRPr lang="en-UA"/>
+          </a:p>
+        </p:txBody>
       </p:sp>
       <p:sp>
         <p:nvSpPr>
@@ -8191,7 +8396,7 @@
           <a:bodyPr wrap="square" lIns="0" tIns="0" rIns="0" bIns="0" rtlCol="0" anchor="t"/>
           <a:lstStyle/>
           <a:p>
-            <a:pPr indent="0" marL="0">
+            <a:pPr marL="0" indent="0">
               <a:buNone/>
             </a:pPr>
             <a:r>
@@ -8227,7 +8432,7 @@
           <a:bodyPr wrap="square" lIns="0" tIns="0" rIns="0" bIns="0" rtlCol="0" anchor="t"/>
           <a:lstStyle/>
           <a:p>
-            <a:pPr indent="0" marL="0">
+            <a:pPr marL="0" indent="0">
               <a:buNone/>
             </a:pPr>
             <a:r>
@@ -8263,13 +8468,20 @@
           </a:solidFill>
           <a:ln/>
           <a:effectLst>
-            <a:outerShdw sx="100000" sy="100000" kx="0" ky="0" algn="bl" rotWithShape="0" blurRad="101600" dist="25400" dir="5400000">
+            <a:outerShdw blurRad="101600" dist="25400" dir="5400000" algn="bl" rotWithShape="0">
               <a:srgbClr val="000000">
                 <a:alpha val="12000"/>
               </a:srgbClr>
             </a:outerShdw>
           </a:effectLst>
         </p:spPr>
+        <p:txBody>
+          <a:bodyPr/>
+          <a:lstStyle/>
+          <a:p>
+            <a:endParaRPr lang="en-UA"/>
+          </a:p>
+        </p:txBody>
       </p:sp>
       <p:sp>
         <p:nvSpPr>
@@ -8292,7 +8504,7 @@
           <a:bodyPr wrap="square" lIns="0" tIns="0" rIns="0" bIns="0" rtlCol="0" anchor="t"/>
           <a:lstStyle/>
           <a:p>
-            <a:pPr indent="0" marL="0">
+            <a:pPr marL="0" indent="0">
               <a:buNone/>
             </a:pPr>
             <a:r>
@@ -8328,7 +8540,7 @@
           <a:bodyPr wrap="square" lIns="0" tIns="0" rIns="0" bIns="0" rtlCol="0" anchor="t"/>
           <a:lstStyle/>
           <a:p>
-            <a:pPr indent="0" marL="0">
+            <a:pPr marL="0" indent="0">
               <a:buNone/>
             </a:pPr>
             <a:r>
@@ -8345,7 +8557,7 @@
             <a:endParaRPr lang="en-US" sz="1200" dirty="0"/>
           </a:p>
           <a:p>
-            <a:pPr indent="0" marL="0">
+            <a:pPr marL="0" indent="0">
               <a:buNone/>
             </a:pPr>
             <a:r>
@@ -8365,7 +8577,7 @@
       </p:sp>
       <p:sp>
         <p:nvSpPr>
-          <p:cNvPr id="25" name="Slide Number Placeholder 0"/>
+          <p:cNvPr id="36" name="Slide Number Placeholder 0"/>
           <p:cNvSpPr>
             <a:spLocks noGrp="1"/>
           </p:cNvSpPr>
@@ -8383,7 +8595,7 @@
           </a:prstGeom>
           <a:extLst>
             <a:ext uri="{C572A759-6A51-4108-AA02-DFA0A04FC94B}">
-              <ma14:wrappingTextBoxFlag xmlns:ma14="http://schemas.microsoft.com/office/mac/drawingml/2011/main" val="0"/>
+              <ma14:wrappingTextBoxFlag xmlns:ma14="http://schemas.microsoft.com/office/mac/drawingml/2011/main" xmlns="" val="0"/>
             </a:ext>
           </a:extLst>
         </p:spPr>
@@ -8401,7 +8613,7 @@
           <a:p>
             <a:pPr algn="r"/>
             <a:fld id="{F7021451-1387-4CA6-816F-3879F97B5CBC}" type="slidenum">
-              <a:rPr b="0" lang="en-US"/>
+              <a:rPr lang="en-US" b="0"/>
               <a:t>4</a:t>
             </a:fld>
             <a:endParaRPr lang="en-US"/>
@@ -8436,9 +8648,11 @@
       <p:sp>
         <p:nvSpPr>
           <p:cNvPr id="2" name="Text 0"/>
-          <p:cNvSpPr/>
+          <p:cNvSpPr>
+            <a:spLocks noGrp="1"/>
+          </p:cNvSpPr>
           <p:nvPr>
-            <p:ph idx="100" type="title" hasCustomPrompt="1"/>
+            <p:ph type="title" idx="100" hasCustomPrompt="1"/>
           </p:nvPr>
         </p:nvSpPr>
         <p:spPr>
@@ -8456,7 +8670,7 @@
           <a:bodyPr wrap="square" lIns="0" tIns="0" rIns="0" bIns="0" rtlCol="0" anchor="ctr"/>
           <a:lstStyle/>
           <a:p>
-            <a:pPr algn="l" indent="0" marL="0">
+            <a:pPr marL="0" indent="0" algn="l">
               <a:buNone/>
             </a:pPr>
             <a:r>
@@ -8492,6 +8706,13 @@
           </a:solidFill>
           <a:ln/>
         </p:spPr>
+        <p:txBody>
+          <a:bodyPr/>
+          <a:lstStyle/>
+          <a:p>
+            <a:endParaRPr lang="en-UA"/>
+          </a:p>
+        </p:txBody>
       </p:sp>
       <p:sp>
         <p:nvSpPr>
@@ -8512,17 +8733,24 @@
           </a:solidFill>
           <a:ln/>
         </p:spPr>
+        <p:txBody>
+          <a:bodyPr/>
+          <a:lstStyle/>
+          <a:p>
+            <a:endParaRPr lang="en-UA"/>
+          </a:p>
+        </p:txBody>
       </p:sp>
       <p:pic>
         <p:nvPicPr>
-          <p:cNvPr id="5" name="icon-146" descr="Globe icon">    </p:cNvPr>
+          <p:cNvPr id="5" name="icon-146" descr="Globe icon"/>
           <p:cNvPicPr>
             <a:picLocks noChangeAspect="1"/>
           </p:cNvPicPr>
           <p:nvPr/>
         </p:nvPicPr>
         <p:blipFill>
-          <a:blip r:embed="rId1"/>
+          <a:blip r:embed="rId3"/>
           <a:stretch>
             <a:fillRect/>
           </a:stretch>
@@ -8558,7 +8786,7 @@
           <a:bodyPr wrap="square" lIns="0" tIns="0" rIns="0" bIns="0" rtlCol="0" anchor="t"/>
           <a:lstStyle/>
           <a:p>
-            <a:pPr indent="0" marL="0">
+            <a:pPr marL="0" indent="0">
               <a:buNone/>
             </a:pPr>
             <a:r>
@@ -8594,7 +8822,7 @@
           <a:bodyPr wrap="square" lIns="0" tIns="0" rIns="0" bIns="0" rtlCol="0" anchor="t"/>
           <a:lstStyle/>
           <a:p>
-            <a:pPr indent="0" marL="0">
+            <a:pPr marL="0" indent="0">
               <a:buNone/>
             </a:pPr>
             <a:r>
@@ -8632,6 +8860,13 @@
             <a:tailEnd type="triangle"/>
           </a:ln>
         </p:spPr>
+        <p:txBody>
+          <a:bodyPr/>
+          <a:lstStyle/>
+          <a:p>
+            <a:endParaRPr lang="en-UA"/>
+          </a:p>
+        </p:txBody>
       </p:sp>
       <p:sp>
         <p:nvSpPr>
@@ -8654,6 +8889,13 @@
           </a:solidFill>
           <a:ln/>
         </p:spPr>
+        <p:txBody>
+          <a:bodyPr/>
+          <a:lstStyle/>
+          <a:p>
+            <a:endParaRPr lang="en-UA"/>
+          </a:p>
+        </p:txBody>
       </p:sp>
       <p:sp>
         <p:nvSpPr>
@@ -8674,17 +8916,24 @@
           </a:solidFill>
           <a:ln/>
         </p:spPr>
+        <p:txBody>
+          <a:bodyPr/>
+          <a:lstStyle/>
+          <a:p>
+            <a:endParaRPr lang="en-UA"/>
+          </a:p>
+        </p:txBody>
       </p:sp>
       <p:pic>
         <p:nvPicPr>
-          <p:cNvPr id="11" name="icon-152" descr="NetworkWired icon">    </p:cNvPr>
+          <p:cNvPr id="11" name="icon-152" descr="NetworkWired icon"/>
           <p:cNvPicPr>
             <a:picLocks noChangeAspect="1"/>
           </p:cNvPicPr>
           <p:nvPr/>
         </p:nvPicPr>
         <p:blipFill>
-          <a:blip r:embed="rId2"/>
+          <a:blip r:embed="rId4"/>
           <a:stretch>
             <a:fillRect/>
           </a:stretch>
@@ -8720,7 +8969,7 @@
           <a:bodyPr wrap="square" lIns="0" tIns="0" rIns="0" bIns="0" rtlCol="0" anchor="t"/>
           <a:lstStyle/>
           <a:p>
-            <a:pPr indent="0" marL="0">
+            <a:pPr marL="0" indent="0">
               <a:buNone/>
             </a:pPr>
             <a:r>
@@ -8756,7 +9005,7 @@
           <a:bodyPr wrap="square" lIns="0" tIns="0" rIns="0" bIns="0" rtlCol="0" anchor="t"/>
           <a:lstStyle/>
           <a:p>
-            <a:pPr indent="0" marL="0">
+            <a:pPr marL="0" indent="0">
               <a:buNone/>
             </a:pPr>
             <a:r>
@@ -8794,6 +9043,13 @@
             <a:tailEnd type="triangle"/>
           </a:ln>
         </p:spPr>
+        <p:txBody>
+          <a:bodyPr/>
+          <a:lstStyle/>
+          <a:p>
+            <a:endParaRPr lang="en-UA"/>
+          </a:p>
+        </p:txBody>
       </p:sp>
       <p:sp>
         <p:nvSpPr>
@@ -8816,6 +9072,13 @@
           </a:solidFill>
           <a:ln/>
         </p:spPr>
+        <p:txBody>
+          <a:bodyPr/>
+          <a:lstStyle/>
+          <a:p>
+            <a:endParaRPr lang="en-UA"/>
+          </a:p>
+        </p:txBody>
       </p:sp>
       <p:sp>
         <p:nvSpPr>
@@ -8836,17 +9099,24 @@
           </a:solidFill>
           <a:ln/>
         </p:spPr>
+        <p:txBody>
+          <a:bodyPr/>
+          <a:lstStyle/>
+          <a:p>
+            <a:endParaRPr lang="en-UA"/>
+          </a:p>
+        </p:txBody>
       </p:sp>
       <p:pic>
         <p:nvPicPr>
-          <p:cNvPr id="17" name="icon-158" descr="Bolt icon">    </p:cNvPr>
+          <p:cNvPr id="17" name="icon-158" descr="Bolt icon"/>
           <p:cNvPicPr>
             <a:picLocks noChangeAspect="1"/>
           </p:cNvPicPr>
           <p:nvPr/>
         </p:nvPicPr>
         <p:blipFill>
-          <a:blip r:embed="rId3"/>
+          <a:blip r:embed="rId5"/>
           <a:stretch>
             <a:fillRect/>
           </a:stretch>
@@ -8882,7 +9152,7 @@
           <a:bodyPr wrap="square" lIns="0" tIns="0" rIns="0" bIns="0" rtlCol="0" anchor="t"/>
           <a:lstStyle/>
           <a:p>
-            <a:pPr indent="0" marL="0">
+            <a:pPr marL="0" indent="0">
               <a:buNone/>
             </a:pPr>
             <a:r>
@@ -8918,7 +9188,7 @@
           <a:bodyPr wrap="square" lIns="0" tIns="0" rIns="0" bIns="0" rtlCol="0" anchor="t"/>
           <a:lstStyle/>
           <a:p>
-            <a:pPr indent="0" marL="0">
+            <a:pPr marL="0" indent="0">
               <a:buNone/>
             </a:pPr>
             <a:r>
@@ -8954,6 +9224,13 @@
           </a:solidFill>
           <a:ln/>
         </p:spPr>
+        <p:txBody>
+          <a:bodyPr/>
+          <a:lstStyle/>
+          <a:p>
+            <a:endParaRPr lang="en-UA"/>
+          </a:p>
+        </p:txBody>
       </p:sp>
       <p:sp>
         <p:nvSpPr>
@@ -8976,7 +9253,7 @@
           <a:bodyPr wrap="square" lIns="0" tIns="0" rIns="0" bIns="0" rtlCol="0" anchor="t"/>
           <a:lstStyle/>
           <a:p>
-            <a:pPr indent="0" marL="0">
+            <a:pPr marL="0" indent="0">
               <a:buNone/>
             </a:pPr>
             <a:r>
@@ -9012,7 +9289,7 @@
           <a:bodyPr wrap="square" lIns="0" tIns="0" rIns="0" bIns="0" rtlCol="0" anchor="t"/>
           <a:lstStyle/>
           <a:p>
-            <a:pPr indent="0" marL="0">
+            <a:pPr marL="0" indent="0">
               <a:buNone/>
             </a:pPr>
             <a:r>
@@ -9029,7 +9306,7 @@
             <a:endParaRPr lang="en-US" sz="1300" dirty="0"/>
           </a:p>
           <a:p>
-            <a:pPr indent="0" marL="0">
+            <a:pPr marL="0" indent="0">
               <a:buNone/>
             </a:pPr>
             <a:r>
@@ -9046,7 +9323,7 @@
             <a:endParaRPr lang="en-US" sz="1300" dirty="0"/>
           </a:p>
           <a:p>
-            <a:pPr indent="0" marL="0">
+            <a:pPr marL="0" indent="0">
               <a:buNone/>
             </a:pPr>
             <a:r>
@@ -9063,7 +9340,7 @@
             <a:endParaRPr lang="en-US" sz="1300" dirty="0"/>
           </a:p>
           <a:p>
-            <a:pPr indent="0" marL="0">
+            <a:pPr marL="0" indent="0">
               <a:buNone/>
             </a:pPr>
             <a:r>
@@ -9080,7 +9357,7 @@
             <a:endParaRPr lang="en-US" sz="1300" dirty="0"/>
           </a:p>
           <a:p>
-            <a:pPr indent="0" marL="0">
+            <a:pPr marL="0" indent="0">
               <a:buNone/>
             </a:pPr>
             <a:r>
@@ -9097,7 +9374,7 @@
             <a:endParaRPr lang="en-US" sz="1300" dirty="0"/>
           </a:p>
           <a:p>
-            <a:pPr indent="0" marL="0">
+            <a:pPr marL="0" indent="0">
               <a:buNone/>
             </a:pPr>
             <a:r>
@@ -9114,7 +9391,7 @@
             <a:endParaRPr lang="en-US" sz="1300" dirty="0"/>
           </a:p>
           <a:p>
-            <a:pPr indent="0" marL="0">
+            <a:pPr marL="0" indent="0">
               <a:buNone/>
             </a:pPr>
             <a:r>
@@ -9131,7 +9408,7 @@
             <a:endParaRPr lang="en-US" sz="1300" dirty="0"/>
           </a:p>
           <a:p>
-            <a:pPr indent="0" marL="0">
+            <a:pPr marL="0" indent="0">
               <a:buNone/>
             </a:pPr>
             <a:r>
@@ -9246,6 +9523,13 @@
           </a:solidFill>
           <a:ln/>
         </p:spPr>
+        <p:txBody>
+          <a:bodyPr/>
+          <a:lstStyle/>
+          <a:p>
+            <a:endParaRPr lang="en-UA"/>
+          </a:p>
+        </p:txBody>
       </p:sp>
       <p:sp>
         <p:nvSpPr>
@@ -9268,7 +9552,7 @@
           <a:bodyPr wrap="square" lIns="0" tIns="0" rIns="0" bIns="0" rtlCol="0" anchor="t"/>
           <a:lstStyle/>
           <a:p>
-            <a:pPr indent="0" marL="0">
+            <a:pPr marL="0" indent="0">
               <a:buNone/>
             </a:pPr>
             <a:r>
@@ -9304,7 +9588,7 @@
           <a:bodyPr wrap="square" lIns="0" tIns="0" rIns="0" bIns="0" rtlCol="0" anchor="t"/>
           <a:lstStyle/>
           <a:p>
-            <a:pPr indent="0" marL="0">
+            <a:pPr marL="0" indent="0">
               <a:buNone/>
             </a:pPr>
             <a:r>
@@ -9321,7 +9605,7 @@
             <a:endParaRPr lang="en-US" sz="1300" dirty="0"/>
           </a:p>
           <a:p>
-            <a:pPr indent="0" marL="0">
+            <a:pPr marL="0" indent="0">
               <a:buNone/>
             </a:pPr>
             <a:r>
@@ -9338,7 +9622,7 @@
             <a:endParaRPr lang="en-US" sz="1300" dirty="0"/>
           </a:p>
           <a:p>
-            <a:pPr indent="0" marL="0">
+            <a:pPr marL="0" indent="0">
               <a:buNone/>
             </a:pPr>
             <a:r>
@@ -9355,7 +9639,7 @@
             <a:endParaRPr lang="en-US" sz="1300" dirty="0"/>
           </a:p>
           <a:p>
-            <a:pPr indent="0" marL="0">
+            <a:pPr marL="0" indent="0">
               <a:buNone/>
             </a:pPr>
             <a:r>
@@ -9372,7 +9656,7 @@
             <a:endParaRPr lang="en-US" sz="1300" dirty="0"/>
           </a:p>
           <a:p>
-            <a:pPr indent="0" marL="0">
+            <a:pPr marL="0" indent="0">
               <a:buNone/>
             </a:pPr>
             <a:r>
@@ -9411,6 +9695,13 @@
           </a:solidFill>
           <a:ln/>
         </p:spPr>
+        <p:txBody>
+          <a:bodyPr/>
+          <a:lstStyle/>
+          <a:p>
+            <a:endParaRPr lang="en-UA"/>
+          </a:p>
+        </p:txBody>
       </p:sp>
       <p:sp>
         <p:nvSpPr>
@@ -9433,7 +9724,7 @@
           <a:bodyPr wrap="square" lIns="0" tIns="0" rIns="0" bIns="0" rtlCol="0" anchor="ctr"/>
           <a:lstStyle/>
           <a:p>
-            <a:pPr indent="0" marL="0">
+            <a:pPr marL="0" indent="0">
               <a:buNone/>
             </a:pPr>
             <a:r>
@@ -9450,7 +9741,7 @@
       </p:sp>
       <p:sp>
         <p:nvSpPr>
-          <p:cNvPr id="25" name="Slide Number Placeholder 0"/>
+          <p:cNvPr id="29" name="Slide Number Placeholder 0"/>
           <p:cNvSpPr>
             <a:spLocks noGrp="1"/>
           </p:cNvSpPr>
@@ -9468,7 +9759,7 @@
           </a:prstGeom>
           <a:extLst>
             <a:ext uri="{C572A759-6A51-4108-AA02-DFA0A04FC94B}">
-              <ma14:wrappingTextBoxFlag xmlns:ma14="http://schemas.microsoft.com/office/mac/drawingml/2011/main" val="0"/>
+              <ma14:wrappingTextBoxFlag xmlns:ma14="http://schemas.microsoft.com/office/mac/drawingml/2011/main" xmlns="" val="0"/>
             </a:ext>
           </a:extLst>
         </p:spPr>
@@ -9486,7 +9777,7 @@
           <a:p>
             <a:pPr algn="r"/>
             <a:fld id="{F7021451-1387-4CA6-816F-3879F97B5CBC}" type="slidenum">
-              <a:rPr b="0" lang="en-US"/>
+              <a:rPr lang="en-US" b="0"/>
               <a:t>5</a:t>
             </a:fld>
             <a:endParaRPr lang="en-US"/>
@@ -9521,9 +9812,11 @@
       <p:sp>
         <p:nvSpPr>
           <p:cNvPr id="2" name="Text 0"/>
-          <p:cNvSpPr/>
+          <p:cNvSpPr>
+            <a:spLocks noGrp="1"/>
+          </p:cNvSpPr>
           <p:nvPr>
-            <p:ph idx="100" type="title" hasCustomPrompt="1"/>
+            <p:ph type="title" idx="100" hasCustomPrompt="1"/>
           </p:nvPr>
         </p:nvSpPr>
         <p:spPr>
@@ -9541,7 +9834,7 @@
           <a:bodyPr wrap="square" lIns="0" tIns="0" rIns="0" bIns="0" rtlCol="0" anchor="ctr"/>
           <a:lstStyle/>
           <a:p>
-            <a:pPr algn="l" indent="0" marL="0">
+            <a:pPr marL="0" indent="0" algn="l">
               <a:buNone/>
             </a:pPr>
             <a:r>
@@ -9577,13 +9870,20 @@
           </a:solidFill>
           <a:ln/>
           <a:effectLst>
-            <a:outerShdw sx="100000" sy="100000" kx="0" ky="0" algn="bl" rotWithShape="0" blurRad="101600" dist="25400" dir="5400000">
+            <a:outerShdw blurRad="101600" dist="25400" dir="5400000" algn="bl" rotWithShape="0">
               <a:srgbClr val="000000">
                 <a:alpha val="12000"/>
               </a:srgbClr>
             </a:outerShdw>
           </a:effectLst>
         </p:spPr>
+        <p:txBody>
+          <a:bodyPr/>
+          <a:lstStyle/>
+          <a:p>
+            <a:endParaRPr lang="en-UA"/>
+          </a:p>
+        </p:txBody>
       </p:sp>
       <p:sp>
         <p:nvSpPr>
@@ -9604,300 +9904,17 @@
           </a:solidFill>
           <a:ln/>
         </p:spPr>
+        <p:txBody>
+          <a:bodyPr/>
+          <a:lstStyle/>
+          <a:p>
+            <a:endParaRPr lang="en-UA"/>
+          </a:p>
+        </p:txBody>
       </p:sp>
       <p:pic>
         <p:nvPicPr>
-          <p:cNvPr id="5" name="icon-172" descr="Key icon">    </p:cNvPr>
-          <p:cNvPicPr>
-            <a:picLocks noChangeAspect="1"/>
-          </p:cNvPicPr>
-          <p:nvPr/>
-        </p:nvPicPr>
-        <p:blipFill>
-          <a:blip r:embed="rId1"/>
-          <a:stretch>
-            <a:fillRect/>
-          </a:stretch>
-        </p:blipFill>
-        <p:spPr>
-          <a:xfrm>
-            <a:off x="914400" y="1828800"/>
-            <a:ext cx="274320" cy="274320"/>
-          </a:xfrm>
-          <a:prstGeom prst="rect">
-            <a:avLst/>
-          </a:prstGeom>
-        </p:spPr>
-      </p:pic>
-      <p:sp>
-        <p:nvSpPr>
-          <p:cNvPr id="6" name="text-173"/>
-          <p:cNvSpPr txBox="1"/>
-          <p:nvPr/>
-        </p:nvSpPr>
-        <p:spPr>
-          <a:xfrm>
-            <a:off x="1463040" y="1691640"/>
-            <a:ext cx="2103120" cy="548640"/>
-          </a:xfrm>
-          <a:prstGeom prst="rect">
-            <a:avLst/>
-          </a:prstGeom>
-          <a:noFill/>
-          <a:ln/>
-        </p:spPr>
-        <p:txBody>
-          <a:bodyPr wrap="square" lIns="0" tIns="0" rIns="0" bIns="0" rtlCol="0" anchor="ctr"/>
-          <a:lstStyle/>
-          <a:p>
-            <a:pPr indent="0" marL="0">
-              <a:buNone/>
-            </a:pPr>
-            <a:r>
-              <a:rPr lang="en-US" sz="1700" b="1" dirty="0">
-                <a:solidFill>
-                  <a:schemeClr val="tx1"/>
-                </a:solidFill>
-              </a:rPr>
-              <a:t>API Key + Usage Plan</a:t>
-            </a:r>
-            <a:endParaRPr lang="en-US" sz="1700" dirty="0"/>
-          </a:p>
-        </p:txBody>
-      </p:sp>
-      <p:sp>
-        <p:nvSpPr>
-          <p:cNvPr id="7" name="text-174"/>
-          <p:cNvSpPr txBox="1"/>
-          <p:nvPr/>
-        </p:nvSpPr>
-        <p:spPr>
-          <a:xfrm>
-            <a:off x="777240" y="2423160"/>
-            <a:ext cx="2697480" cy="1188720"/>
-          </a:xfrm>
-          <a:prstGeom prst="rect">
-            <a:avLst/>
-          </a:prstGeom>
-          <a:noFill/>
-          <a:ln/>
-        </p:spPr>
-        <p:txBody>
-          <a:bodyPr wrap="square" lIns="0" tIns="0" rIns="0" bIns="0" rtlCol="0" anchor="t"/>
-          <a:lstStyle/>
-          <a:p>
-            <a:pPr indent="0" marL="0">
-              <a:buNone/>
-            </a:pPr>
-            <a:r>
-              <a:rPr lang="en-US" sz="1400" dirty="0">
-                <a:solidFill>
-                  <a:schemeClr val="accent6"/>
-                </a:solidFill>
-              </a:rPr>
-              <a:t>Ідентифікує клієнта й підключає його до лімітів. Це не повноцінна авторизація.</a:t>
-            </a:r>
-            <a:endParaRPr lang="en-US" sz="1400" dirty="0"/>
-          </a:p>
-        </p:txBody>
-      </p:sp>
-      <p:sp>
-        <p:nvSpPr>
-          <p:cNvPr id="8" name="panel-175"/>
-          <p:cNvSpPr/>
-          <p:nvPr/>
-        </p:nvSpPr>
-        <p:spPr>
-          <a:xfrm>
-            <a:off x="3840480" y="1463040"/>
-            <a:ext cx="3108960" cy="2240280"/>
-          </a:xfrm>
-          <a:prstGeom prst="roundRect">
-            <a:avLst>
-              <a:gd name="adj" fmla="val 4898"/>
-            </a:avLst>
-          </a:prstGeom>
-          <a:solidFill>
-            <a:schemeClr val="bg1"/>
-          </a:solidFill>
-          <a:ln/>
-          <a:effectLst>
-            <a:outerShdw sx="100000" sy="100000" kx="0" ky="0" algn="bl" rotWithShape="0" blurRad="101600" dist="25400" dir="5400000">
-              <a:srgbClr val="000000">
-                <a:alpha val="12000"/>
-              </a:srgbClr>
-            </a:outerShdw>
-          </a:effectLst>
-        </p:spPr>
-      </p:sp>
-      <p:sp>
-        <p:nvSpPr>
-          <p:cNvPr id="9" name="icon-circle-176"/>
-          <p:cNvSpPr/>
-          <p:nvPr/>
-        </p:nvSpPr>
-        <p:spPr>
-          <a:xfrm>
-            <a:off x="4069080" y="1691640"/>
-            <a:ext cx="548640" cy="548640"/>
-          </a:xfrm>
-          <a:prstGeom prst="ellipse">
-            <a:avLst/>
-          </a:prstGeom>
-          <a:solidFill>
-            <a:schemeClr val="accent1"/>
-          </a:solidFill>
-          <a:ln/>
-        </p:spPr>
-      </p:sp>
-      <p:pic>
-        <p:nvPicPr>
-          <p:cNvPr id="10" name="icon-177" descr="UserShield icon">    </p:cNvPr>
-          <p:cNvPicPr>
-            <a:picLocks noChangeAspect="1"/>
-          </p:cNvPicPr>
-          <p:nvPr/>
-        </p:nvPicPr>
-        <p:blipFill>
-          <a:blip r:embed="rId2"/>
-          <a:stretch>
-            <a:fillRect/>
-          </a:stretch>
-        </p:blipFill>
-        <p:spPr>
-          <a:xfrm>
-            <a:off x="4206240" y="1828800"/>
-            <a:ext cx="274320" cy="274320"/>
-          </a:xfrm>
-          <a:prstGeom prst="rect">
-            <a:avLst/>
-          </a:prstGeom>
-        </p:spPr>
-      </p:pic>
-      <p:sp>
-        <p:nvSpPr>
-          <p:cNvPr id="11" name="text-178"/>
-          <p:cNvSpPr txBox="1"/>
-          <p:nvPr/>
-        </p:nvSpPr>
-        <p:spPr>
-          <a:xfrm>
-            <a:off x="4754880" y="1691640"/>
-            <a:ext cx="2103120" cy="548640"/>
-          </a:xfrm>
-          <a:prstGeom prst="rect">
-            <a:avLst/>
-          </a:prstGeom>
-          <a:noFill/>
-          <a:ln/>
-        </p:spPr>
-        <p:txBody>
-          <a:bodyPr wrap="square" lIns="0" tIns="0" rIns="0" bIns="0" rtlCol="0" anchor="ctr"/>
-          <a:lstStyle/>
-          <a:p>
-            <a:pPr indent="0" marL="0">
-              <a:buNone/>
-            </a:pPr>
-            <a:r>
-              <a:rPr lang="en-US" sz="1700" b="1" dirty="0">
-                <a:solidFill>
-                  <a:schemeClr val="tx1"/>
-                </a:solidFill>
-              </a:rPr>
-              <a:t>IAM</a:t>
-            </a:r>
-            <a:endParaRPr lang="en-US" sz="1700" dirty="0"/>
-          </a:p>
-        </p:txBody>
-      </p:sp>
-      <p:sp>
-        <p:nvSpPr>
-          <p:cNvPr id="12" name="text-179"/>
-          <p:cNvSpPr txBox="1"/>
-          <p:nvPr/>
-        </p:nvSpPr>
-        <p:spPr>
-          <a:xfrm>
-            <a:off x="4069080" y="2423160"/>
-            <a:ext cx="2697480" cy="1188720"/>
-          </a:xfrm>
-          <a:prstGeom prst="rect">
-            <a:avLst/>
-          </a:prstGeom>
-          <a:noFill/>
-          <a:ln/>
-        </p:spPr>
-        <p:txBody>
-          <a:bodyPr wrap="square" lIns="0" tIns="0" rIns="0" bIns="0" rtlCol="0" anchor="t"/>
-          <a:lstStyle/>
-          <a:p>
-            <a:pPr indent="0" marL="0">
-              <a:buNone/>
-            </a:pPr>
-            <a:r>
-              <a:rPr lang="en-US" sz="1400" dirty="0">
-                <a:solidFill>
-                  <a:schemeClr val="accent6"/>
-                </a:solidFill>
-              </a:rPr>
-              <a:t>Підпис запитів SigV4. Для викликів між сервісами AWS і внутрішніх систем.</a:t>
-            </a:r>
-            <a:endParaRPr lang="en-US" sz="1400" dirty="0"/>
-          </a:p>
-        </p:txBody>
-      </p:sp>
-      <p:sp>
-        <p:nvSpPr>
-          <p:cNvPr id="13" name="panel-180"/>
-          <p:cNvSpPr/>
-          <p:nvPr/>
-        </p:nvSpPr>
-        <p:spPr>
-          <a:xfrm>
-            <a:off x="548640" y="3886200"/>
-            <a:ext cx="3108960" cy="2240280"/>
-          </a:xfrm>
-          <a:prstGeom prst="roundRect">
-            <a:avLst>
-              <a:gd name="adj" fmla="val 4898"/>
-            </a:avLst>
-          </a:prstGeom>
-          <a:solidFill>
-            <a:schemeClr val="bg1"/>
-          </a:solidFill>
-          <a:ln/>
-          <a:effectLst>
-            <a:outerShdw sx="100000" sy="100000" kx="0" ky="0" algn="bl" rotWithShape="0" blurRad="101600" dist="25400" dir="5400000">
-              <a:srgbClr val="000000">
-                <a:alpha val="12000"/>
-              </a:srgbClr>
-            </a:outerShdw>
-          </a:effectLst>
-        </p:spPr>
-      </p:sp>
-      <p:sp>
-        <p:nvSpPr>
-          <p:cNvPr id="14" name="icon-circle-181"/>
-          <p:cNvSpPr/>
-          <p:nvPr/>
-        </p:nvSpPr>
-        <p:spPr>
-          <a:xfrm>
-            <a:off x="777240" y="4114800"/>
-            <a:ext cx="548640" cy="548640"/>
-          </a:xfrm>
-          <a:prstGeom prst="ellipse">
-            <a:avLst/>
-          </a:prstGeom>
-          <a:solidFill>
-            <a:schemeClr val="accent1"/>
-          </a:solidFill>
-          <a:ln/>
-        </p:spPr>
-      </p:sp>
-      <p:pic>
-        <p:nvPicPr>
-          <p:cNvPr id="15" name="icon-182" descr="Users icon">    </p:cNvPr>
+          <p:cNvPr id="5" name="icon-172" descr="Key icon"/>
           <p:cNvPicPr>
             <a:picLocks noChangeAspect="1"/>
           </p:cNvPicPr>
@@ -9911,7 +9928,7 @@
         </p:blipFill>
         <p:spPr>
           <a:xfrm>
-            <a:off x="914400" y="4251960"/>
+            <a:off x="914400" y="1828800"/>
             <a:ext cx="274320" cy="274320"/>
           </a:xfrm>
           <a:prstGeom prst="rect">
@@ -9921,13 +9938,13 @@
       </p:pic>
       <p:sp>
         <p:nvSpPr>
-          <p:cNvPr id="16" name="text-183"/>
-          <p:cNvSpPr txBox="1"/>
-          <p:nvPr/>
-        </p:nvSpPr>
-        <p:spPr>
-          <a:xfrm>
-            <a:off x="1463040" y="4114800"/>
+          <p:cNvPr id="6" name="text-173"/>
+          <p:cNvSpPr txBox="1"/>
+          <p:nvPr/>
+        </p:nvSpPr>
+        <p:spPr>
+          <a:xfrm>
+            <a:off x="1463040" y="1691640"/>
             <a:ext cx="2103120" cy="548640"/>
           </a:xfrm>
           <a:prstGeom prst="rect">
@@ -9940,7 +9957,7 @@
           <a:bodyPr wrap="square" lIns="0" tIns="0" rIns="0" bIns="0" rtlCol="0" anchor="ctr"/>
           <a:lstStyle/>
           <a:p>
-            <a:pPr indent="0" marL="0">
+            <a:pPr marL="0" indent="0">
               <a:buNone/>
             </a:pPr>
             <a:r>
@@ -9949,7 +9966,7 @@
                   <a:schemeClr val="tx1"/>
                 </a:solidFill>
               </a:rPr>
-              <a:t>Cognito Authorizer</a:t>
+              <a:t>API Key + Usage Plan</a:t>
             </a:r>
             <a:endParaRPr lang="en-US" sz="1700" dirty="0"/>
           </a:p>
@@ -9957,13 +9974,13 @@
       </p:sp>
       <p:sp>
         <p:nvSpPr>
-          <p:cNvPr id="17" name="text-184"/>
-          <p:cNvSpPr txBox="1"/>
-          <p:nvPr/>
-        </p:nvSpPr>
-        <p:spPr>
-          <a:xfrm>
-            <a:off x="777240" y="4846320"/>
+          <p:cNvPr id="7" name="text-174"/>
+          <p:cNvSpPr txBox="1"/>
+          <p:nvPr/>
+        </p:nvSpPr>
+        <p:spPr>
+          <a:xfrm>
+            <a:off x="777240" y="2423160"/>
             <a:ext cx="2697480" cy="1188720"/>
           </a:xfrm>
           <a:prstGeom prst="rect">
@@ -9976,7 +9993,7 @@
           <a:bodyPr wrap="square" lIns="0" tIns="0" rIns="0" bIns="0" rtlCol="0" anchor="t"/>
           <a:lstStyle/>
           <a:p>
-            <a:pPr indent="0" marL="0">
+            <a:pPr marL="0" indent="0">
               <a:buNone/>
             </a:pPr>
             <a:r>
@@ -9985,7 +10002,7 @@
                   <a:schemeClr val="accent6"/>
                 </a:solidFill>
               </a:rPr>
-              <a:t>Перевіряє JWT-токен користувача вашого застосунку після входу в систему.</a:t>
+              <a:t>Ідентифікує клієнта й підключає його до лімітів. Це не повноцінна авторизація.</a:t>
             </a:r>
             <a:endParaRPr lang="en-US" sz="1400" dirty="0"/>
           </a:p>
@@ -9993,13 +10010,13 @@
       </p:sp>
       <p:sp>
         <p:nvSpPr>
-          <p:cNvPr id="18" name="panel-185"/>
+          <p:cNvPr id="8" name="panel-175"/>
           <p:cNvSpPr/>
           <p:nvPr/>
         </p:nvSpPr>
         <p:spPr>
           <a:xfrm>
-            <a:off x="3840480" y="3886200"/>
+            <a:off x="3840480" y="1463040"/>
             <a:ext cx="3108960" cy="2240280"/>
           </a:xfrm>
           <a:prstGeom prst="roundRect">
@@ -10012,23 +10029,30 @@
           </a:solidFill>
           <a:ln/>
           <a:effectLst>
-            <a:outerShdw sx="100000" sy="100000" kx="0" ky="0" algn="bl" rotWithShape="0" blurRad="101600" dist="25400" dir="5400000">
+            <a:outerShdw blurRad="101600" dist="25400" dir="5400000" algn="bl" rotWithShape="0">
               <a:srgbClr val="000000">
                 <a:alpha val="12000"/>
               </a:srgbClr>
             </a:outerShdw>
           </a:effectLst>
         </p:spPr>
-      </p:sp>
-      <p:sp>
-        <p:nvSpPr>
-          <p:cNvPr id="19" name="icon-circle-186"/>
+        <p:txBody>
+          <a:bodyPr/>
+          <a:lstStyle/>
+          <a:p>
+            <a:endParaRPr lang="en-UA"/>
+          </a:p>
+        </p:txBody>
+      </p:sp>
+      <p:sp>
+        <p:nvSpPr>
+          <p:cNvPr id="9" name="icon-circle-176"/>
           <p:cNvSpPr/>
           <p:nvPr/>
         </p:nvSpPr>
         <p:spPr>
           <a:xfrm>
-            <a:off x="4069080" y="4114800"/>
+            <a:off x="4069080" y="1691640"/>
             <a:ext cx="548640" cy="548640"/>
           </a:xfrm>
           <a:prstGeom prst="ellipse">
@@ -10039,10 +10063,17 @@
           </a:solidFill>
           <a:ln/>
         </p:spPr>
+        <p:txBody>
+          <a:bodyPr/>
+          <a:lstStyle/>
+          <a:p>
+            <a:endParaRPr lang="en-UA"/>
+          </a:p>
+        </p:txBody>
       </p:sp>
       <p:pic>
         <p:nvPicPr>
-          <p:cNvPr id="20" name="icon-187" descr="Code icon">    </p:cNvPr>
+          <p:cNvPr id="10" name="icon-177" descr="UserShield icon"/>
           <p:cNvPicPr>
             <a:picLocks noChangeAspect="1"/>
           </p:cNvPicPr>
@@ -10056,6 +10087,324 @@
         </p:blipFill>
         <p:spPr>
           <a:xfrm>
+            <a:off x="4206240" y="1828800"/>
+            <a:ext cx="274320" cy="274320"/>
+          </a:xfrm>
+          <a:prstGeom prst="rect">
+            <a:avLst/>
+          </a:prstGeom>
+        </p:spPr>
+      </p:pic>
+      <p:sp>
+        <p:nvSpPr>
+          <p:cNvPr id="11" name="text-178"/>
+          <p:cNvSpPr txBox="1"/>
+          <p:nvPr/>
+        </p:nvSpPr>
+        <p:spPr>
+          <a:xfrm>
+            <a:off x="4754880" y="1691640"/>
+            <a:ext cx="2103120" cy="548640"/>
+          </a:xfrm>
+          <a:prstGeom prst="rect">
+            <a:avLst/>
+          </a:prstGeom>
+          <a:noFill/>
+          <a:ln/>
+        </p:spPr>
+        <p:txBody>
+          <a:bodyPr wrap="square" lIns="0" tIns="0" rIns="0" bIns="0" rtlCol="0" anchor="ctr"/>
+          <a:lstStyle/>
+          <a:p>
+            <a:pPr marL="0" indent="0">
+              <a:buNone/>
+            </a:pPr>
+            <a:r>
+              <a:rPr lang="en-US" sz="1700" b="1" dirty="0">
+                <a:solidFill>
+                  <a:schemeClr val="tx1"/>
+                </a:solidFill>
+              </a:rPr>
+              <a:t>IAM</a:t>
+            </a:r>
+            <a:endParaRPr lang="en-US" sz="1700" dirty="0"/>
+          </a:p>
+        </p:txBody>
+      </p:sp>
+      <p:sp>
+        <p:nvSpPr>
+          <p:cNvPr id="12" name="text-179"/>
+          <p:cNvSpPr txBox="1"/>
+          <p:nvPr/>
+        </p:nvSpPr>
+        <p:spPr>
+          <a:xfrm>
+            <a:off x="4069080" y="2423160"/>
+            <a:ext cx="2697480" cy="1188720"/>
+          </a:xfrm>
+          <a:prstGeom prst="rect">
+            <a:avLst/>
+          </a:prstGeom>
+          <a:noFill/>
+          <a:ln/>
+        </p:spPr>
+        <p:txBody>
+          <a:bodyPr wrap="square" lIns="0" tIns="0" rIns="0" bIns="0" rtlCol="0" anchor="t"/>
+          <a:lstStyle/>
+          <a:p>
+            <a:pPr marL="0" indent="0">
+              <a:buNone/>
+            </a:pPr>
+            <a:r>
+              <a:rPr lang="en-US" sz="1400" dirty="0">
+                <a:solidFill>
+                  <a:schemeClr val="accent6"/>
+                </a:solidFill>
+              </a:rPr>
+              <a:t>Підпис запитів SigV4. Для викликів між сервісами AWS і внутрішніх систем.</a:t>
+            </a:r>
+            <a:endParaRPr lang="en-US" sz="1400" dirty="0"/>
+          </a:p>
+        </p:txBody>
+      </p:sp>
+      <p:sp>
+        <p:nvSpPr>
+          <p:cNvPr id="13" name="panel-180"/>
+          <p:cNvSpPr/>
+          <p:nvPr/>
+        </p:nvSpPr>
+        <p:spPr>
+          <a:xfrm>
+            <a:off x="548640" y="3886200"/>
+            <a:ext cx="3108960" cy="2240280"/>
+          </a:xfrm>
+          <a:prstGeom prst="roundRect">
+            <a:avLst>
+              <a:gd name="adj" fmla="val 4898"/>
+            </a:avLst>
+          </a:prstGeom>
+          <a:solidFill>
+            <a:schemeClr val="bg1"/>
+          </a:solidFill>
+          <a:ln/>
+          <a:effectLst>
+            <a:outerShdw blurRad="101600" dist="25400" dir="5400000" algn="bl" rotWithShape="0">
+              <a:srgbClr val="000000">
+                <a:alpha val="12000"/>
+              </a:srgbClr>
+            </a:outerShdw>
+          </a:effectLst>
+        </p:spPr>
+        <p:txBody>
+          <a:bodyPr/>
+          <a:lstStyle/>
+          <a:p>
+            <a:endParaRPr lang="en-UA"/>
+          </a:p>
+        </p:txBody>
+      </p:sp>
+      <p:sp>
+        <p:nvSpPr>
+          <p:cNvPr id="14" name="icon-circle-181"/>
+          <p:cNvSpPr/>
+          <p:nvPr/>
+        </p:nvSpPr>
+        <p:spPr>
+          <a:xfrm>
+            <a:off x="777240" y="4114800"/>
+            <a:ext cx="548640" cy="548640"/>
+          </a:xfrm>
+          <a:prstGeom prst="ellipse">
+            <a:avLst/>
+          </a:prstGeom>
+          <a:solidFill>
+            <a:schemeClr val="accent1"/>
+          </a:solidFill>
+          <a:ln/>
+        </p:spPr>
+        <p:txBody>
+          <a:bodyPr/>
+          <a:lstStyle/>
+          <a:p>
+            <a:endParaRPr lang="en-UA"/>
+          </a:p>
+        </p:txBody>
+      </p:sp>
+      <p:pic>
+        <p:nvPicPr>
+          <p:cNvPr id="15" name="icon-182" descr="Users icon"/>
+          <p:cNvPicPr>
+            <a:picLocks noChangeAspect="1"/>
+          </p:cNvPicPr>
+          <p:nvPr/>
+        </p:nvPicPr>
+        <p:blipFill>
+          <a:blip r:embed="rId5"/>
+          <a:stretch>
+            <a:fillRect/>
+          </a:stretch>
+        </p:blipFill>
+        <p:spPr>
+          <a:xfrm>
+            <a:off x="914400" y="4251960"/>
+            <a:ext cx="274320" cy="274320"/>
+          </a:xfrm>
+          <a:prstGeom prst="rect">
+            <a:avLst/>
+          </a:prstGeom>
+        </p:spPr>
+      </p:pic>
+      <p:sp>
+        <p:nvSpPr>
+          <p:cNvPr id="16" name="text-183"/>
+          <p:cNvSpPr txBox="1"/>
+          <p:nvPr/>
+        </p:nvSpPr>
+        <p:spPr>
+          <a:xfrm>
+            <a:off x="1463040" y="4114800"/>
+            <a:ext cx="2103120" cy="548640"/>
+          </a:xfrm>
+          <a:prstGeom prst="rect">
+            <a:avLst/>
+          </a:prstGeom>
+          <a:noFill/>
+          <a:ln/>
+        </p:spPr>
+        <p:txBody>
+          <a:bodyPr wrap="square" lIns="0" tIns="0" rIns="0" bIns="0" rtlCol="0" anchor="ctr"/>
+          <a:lstStyle/>
+          <a:p>
+            <a:pPr marL="0" indent="0">
+              <a:buNone/>
+            </a:pPr>
+            <a:r>
+              <a:rPr lang="en-US" sz="1700" b="1" dirty="0">
+                <a:solidFill>
+                  <a:schemeClr val="tx1"/>
+                </a:solidFill>
+              </a:rPr>
+              <a:t>Cognito Authorizer</a:t>
+            </a:r>
+            <a:endParaRPr lang="en-US" sz="1700" dirty="0"/>
+          </a:p>
+        </p:txBody>
+      </p:sp>
+      <p:sp>
+        <p:nvSpPr>
+          <p:cNvPr id="17" name="text-184"/>
+          <p:cNvSpPr txBox="1"/>
+          <p:nvPr/>
+        </p:nvSpPr>
+        <p:spPr>
+          <a:xfrm>
+            <a:off x="777240" y="4846320"/>
+            <a:ext cx="2697480" cy="1188720"/>
+          </a:xfrm>
+          <a:prstGeom prst="rect">
+            <a:avLst/>
+          </a:prstGeom>
+          <a:noFill/>
+          <a:ln/>
+        </p:spPr>
+        <p:txBody>
+          <a:bodyPr wrap="square" lIns="0" tIns="0" rIns="0" bIns="0" rtlCol="0" anchor="t"/>
+          <a:lstStyle/>
+          <a:p>
+            <a:pPr marL="0" indent="0">
+              <a:buNone/>
+            </a:pPr>
+            <a:r>
+              <a:rPr lang="en-US" sz="1400" dirty="0">
+                <a:solidFill>
+                  <a:schemeClr val="accent6"/>
+                </a:solidFill>
+              </a:rPr>
+              <a:t>Перевіряє JWT-токен користувача вашого застосунку після входу в систему.</a:t>
+            </a:r>
+            <a:endParaRPr lang="en-US" sz="1400" dirty="0"/>
+          </a:p>
+        </p:txBody>
+      </p:sp>
+      <p:sp>
+        <p:nvSpPr>
+          <p:cNvPr id="18" name="panel-185"/>
+          <p:cNvSpPr/>
+          <p:nvPr/>
+        </p:nvSpPr>
+        <p:spPr>
+          <a:xfrm>
+            <a:off x="3840480" y="3886200"/>
+            <a:ext cx="3108960" cy="2240280"/>
+          </a:xfrm>
+          <a:prstGeom prst="roundRect">
+            <a:avLst>
+              <a:gd name="adj" fmla="val 4898"/>
+            </a:avLst>
+          </a:prstGeom>
+          <a:solidFill>
+            <a:schemeClr val="bg1"/>
+          </a:solidFill>
+          <a:ln/>
+          <a:effectLst>
+            <a:outerShdw blurRad="101600" dist="25400" dir="5400000" algn="bl" rotWithShape="0">
+              <a:srgbClr val="000000">
+                <a:alpha val="12000"/>
+              </a:srgbClr>
+            </a:outerShdw>
+          </a:effectLst>
+        </p:spPr>
+        <p:txBody>
+          <a:bodyPr/>
+          <a:lstStyle/>
+          <a:p>
+            <a:endParaRPr lang="en-UA"/>
+          </a:p>
+        </p:txBody>
+      </p:sp>
+      <p:sp>
+        <p:nvSpPr>
+          <p:cNvPr id="19" name="icon-circle-186"/>
+          <p:cNvSpPr/>
+          <p:nvPr/>
+        </p:nvSpPr>
+        <p:spPr>
+          <a:xfrm>
+            <a:off x="4069080" y="4114800"/>
+            <a:ext cx="548640" cy="548640"/>
+          </a:xfrm>
+          <a:prstGeom prst="ellipse">
+            <a:avLst/>
+          </a:prstGeom>
+          <a:solidFill>
+            <a:schemeClr val="accent1"/>
+          </a:solidFill>
+          <a:ln/>
+        </p:spPr>
+        <p:txBody>
+          <a:bodyPr/>
+          <a:lstStyle/>
+          <a:p>
+            <a:endParaRPr lang="en-UA"/>
+          </a:p>
+        </p:txBody>
+      </p:sp>
+      <p:pic>
+        <p:nvPicPr>
+          <p:cNvPr id="20" name="icon-187" descr="Code icon"/>
+          <p:cNvPicPr>
+            <a:picLocks noChangeAspect="1"/>
+          </p:cNvPicPr>
+          <p:nvPr/>
+        </p:nvPicPr>
+        <p:blipFill>
+          <a:blip r:embed="rId6"/>
+          <a:stretch>
+            <a:fillRect/>
+          </a:stretch>
+        </p:blipFill>
+        <p:spPr>
+          <a:xfrm>
             <a:off x="4206240" y="4251960"/>
             <a:ext cx="274320" cy="274320"/>
           </a:xfrm>
@@ -10085,7 +10434,7 @@
           <a:bodyPr wrap="square" lIns="0" tIns="0" rIns="0" bIns="0" rtlCol="0" anchor="ctr"/>
           <a:lstStyle/>
           <a:p>
-            <a:pPr indent="0" marL="0">
+            <a:pPr marL="0" indent="0">
               <a:buNone/>
             </a:pPr>
             <a:r>
@@ -10121,7 +10470,7 @@
           <a:bodyPr wrap="square" lIns="0" tIns="0" rIns="0" bIns="0" rtlCol="0" anchor="t"/>
           <a:lstStyle/>
           <a:p>
-            <a:pPr indent="0" marL="0">
+            <a:pPr marL="0" indent="0">
               <a:buNone/>
             </a:pPr>
             <a:r>
@@ -10157,6 +10506,13 @@
           </a:solidFill>
           <a:ln/>
         </p:spPr>
+        <p:txBody>
+          <a:bodyPr/>
+          <a:lstStyle/>
+          <a:p>
+            <a:endParaRPr lang="en-UA"/>
+          </a:p>
+        </p:txBody>
       </p:sp>
       <p:sp>
         <p:nvSpPr>
@@ -10179,7 +10535,7 @@
           <a:bodyPr wrap="square" lIns="0" tIns="0" rIns="0" bIns="0" rtlCol="0" anchor="t"/>
           <a:lstStyle/>
           <a:p>
-            <a:pPr indent="0" marL="0">
+            <a:pPr marL="0" indent="0">
               <a:buNone/>
             </a:pPr>
             <a:r>
@@ -10221,7 +10577,7 @@
               </a:spcAft>
               <a:buSzPct val="100000"/>
               <a:buFont typeface="+mj-lt"/>
-              <a:buAutoNum type="arabicPeriod" startAt="1"/>
+              <a:buAutoNum type="arabicPeriod"/>
             </a:pPr>
             <a:r>
               <a:rPr lang="en-US" sz="1500" dirty="0">
@@ -10240,7 +10596,7 @@
               </a:spcAft>
               <a:buSzPct val="100000"/>
               <a:buFont typeface="+mj-lt"/>
-              <a:buAutoNum type="arabicPeriod" startAt="1"/>
+              <a:buAutoNum type="arabicPeriod"/>
             </a:pPr>
             <a:r>
               <a:rPr lang="en-US" sz="1500" dirty="0">
@@ -10259,7 +10615,7 @@
               </a:spcAft>
               <a:buSzPct val="100000"/>
               <a:buFont typeface="+mj-lt"/>
-              <a:buAutoNum type="arabicPeriod" startAt="1"/>
+              <a:buAutoNum type="arabicPeriod"/>
             </a:pPr>
             <a:r>
               <a:rPr lang="en-US" sz="1500" dirty="0">
@@ -10278,7 +10634,7 @@
               </a:spcAft>
               <a:buSzPct val="100000"/>
               <a:buFont typeface="+mj-lt"/>
-              <a:buAutoNum type="arabicPeriod" startAt="1"/>
+              <a:buAutoNum type="arabicPeriod"/>
             </a:pPr>
             <a:r>
               <a:rPr lang="en-US" sz="1500" dirty="0">
@@ -10297,7 +10653,7 @@
               </a:spcAft>
               <a:buSzPct val="100000"/>
               <a:buFont typeface="+mj-lt"/>
-              <a:buAutoNum type="arabicPeriod" startAt="1"/>
+              <a:buAutoNum type="arabicPeriod"/>
             </a:pPr>
             <a:r>
               <a:rPr lang="en-US" sz="1500" dirty="0">
@@ -10332,6 +10688,13 @@
           </a:solidFill>
           <a:ln/>
         </p:spPr>
+        <p:txBody>
+          <a:bodyPr/>
+          <a:lstStyle/>
+          <a:p>
+            <a:endParaRPr lang="en-UA"/>
+          </a:p>
+        </p:txBody>
       </p:sp>
       <p:sp>
         <p:nvSpPr>
@@ -10354,7 +10717,7 @@
           <a:bodyPr wrap="square" lIns="0" tIns="0" rIns="0" bIns="0" rtlCol="0" anchor="ctr"/>
           <a:lstStyle/>
           <a:p>
-            <a:pPr indent="0" marL="0">
+            <a:pPr marL="0" indent="0">
               <a:buNone/>
             </a:pPr>
             <a:r>
@@ -10371,7 +10734,7 @@
       </p:sp>
       <p:sp>
         <p:nvSpPr>
-          <p:cNvPr id="25" name="Slide Number Placeholder 0"/>
+          <p:cNvPr id="28" name="Slide Number Placeholder 0"/>
           <p:cNvSpPr>
             <a:spLocks noGrp="1"/>
           </p:cNvSpPr>
@@ -10389,7 +10752,7 @@
           </a:prstGeom>
           <a:extLst>
             <a:ext uri="{C572A759-6A51-4108-AA02-DFA0A04FC94B}">
-              <ma14:wrappingTextBoxFlag xmlns:ma14="http://schemas.microsoft.com/office/mac/drawingml/2011/main" val="0"/>
+              <ma14:wrappingTextBoxFlag xmlns:ma14="http://schemas.microsoft.com/office/mac/drawingml/2011/main" xmlns="" val="0"/>
             </a:ext>
           </a:extLst>
         </p:spPr>
@@ -10407,7 +10770,7 @@
           <a:p>
             <a:pPr algn="r"/>
             <a:fld id="{F7021451-1387-4CA6-816F-3879F97B5CBC}" type="slidenum">
-              <a:rPr b="0" lang="en-US"/>
+              <a:rPr lang="en-US" b="0"/>
               <a:t>6</a:t>
             </a:fld>
             <a:endParaRPr lang="en-US"/>
@@ -10442,9 +10805,11 @@
       <p:sp>
         <p:nvSpPr>
           <p:cNvPr id="2" name="Text 0"/>
-          <p:cNvSpPr/>
+          <p:cNvSpPr>
+            <a:spLocks noGrp="1"/>
+          </p:cNvSpPr>
           <p:nvPr>
-            <p:ph idx="100" type="title" hasCustomPrompt="1"/>
+            <p:ph type="title" idx="100" hasCustomPrompt="1"/>
           </p:nvPr>
         </p:nvSpPr>
         <p:spPr>
@@ -10462,7 +10827,7 @@
           <a:bodyPr wrap="square" lIns="0" tIns="0" rIns="0" bIns="0" rtlCol="0" anchor="ctr"/>
           <a:lstStyle/>
           <a:p>
-            <a:pPr algn="l" indent="0" marL="0">
+            <a:pPr marL="0" indent="0" algn="l">
               <a:buNone/>
             </a:pPr>
             <a:r>
@@ -10498,6 +10863,13 @@
           </a:solidFill>
           <a:ln/>
         </p:spPr>
+        <p:txBody>
+          <a:bodyPr/>
+          <a:lstStyle/>
+          <a:p>
+            <a:endParaRPr lang="en-UA"/>
+          </a:p>
+        </p:txBody>
       </p:sp>
       <p:sp>
         <p:nvSpPr>
@@ -10518,17 +10890,24 @@
           </a:solidFill>
           <a:ln/>
         </p:spPr>
+        <p:txBody>
+          <a:bodyPr/>
+          <a:lstStyle/>
+          <a:p>
+            <a:endParaRPr lang="en-UA"/>
+          </a:p>
+        </p:txBody>
       </p:sp>
       <p:pic>
         <p:nvPicPr>
-          <p:cNvPr id="5" name="icon-197" descr="TachometerAlt icon">    </p:cNvPr>
+          <p:cNvPr id="5" name="icon-197" descr="TachometerAlt icon"/>
           <p:cNvPicPr>
             <a:picLocks noChangeAspect="1"/>
           </p:cNvPicPr>
           <p:nvPr/>
         </p:nvPicPr>
         <p:blipFill>
-          <a:blip r:embed="rId1"/>
+          <a:blip r:embed="rId3"/>
           <a:stretch>
             <a:fillRect/>
           </a:stretch>
@@ -10564,7 +10943,7 @@
           <a:bodyPr wrap="square" lIns="0" tIns="0" rIns="0" bIns="0" rtlCol="0" anchor="t"/>
           <a:lstStyle/>
           <a:p>
-            <a:pPr indent="0" marL="0">
+            <a:pPr marL="0" indent="0">
               <a:buNone/>
             </a:pPr>
             <a:r>
@@ -10600,7 +10979,7 @@
           <a:bodyPr wrap="square" lIns="0" tIns="0" rIns="0" bIns="0" rtlCol="0" anchor="t"/>
           <a:lstStyle/>
           <a:p>
-            <a:pPr indent="0" marL="0">
+            <a:pPr marL="0" indent="0">
               <a:buNone/>
             </a:pPr>
             <a:r>
@@ -10636,7 +11015,7 @@
           <a:bodyPr wrap="square" lIns="0" tIns="0" rIns="0" bIns="0" rtlCol="0" anchor="t"/>
           <a:lstStyle/>
           <a:p>
-            <a:pPr indent="0" marL="0">
+            <a:pPr marL="0" indent="0">
               <a:buNone/>
             </a:pPr>
             <a:r>
@@ -10672,7 +11051,7 @@
           <a:bodyPr wrap="square" lIns="0" tIns="0" rIns="0" bIns="0" rtlCol="0" anchor="t"/>
           <a:lstStyle/>
           <a:p>
-            <a:pPr indent="0" marL="0">
+            <a:pPr marL="0" indent="0">
               <a:buNone/>
             </a:pPr>
             <a:r>
@@ -10708,7 +11087,7 @@
           <a:bodyPr wrap="square" lIns="0" tIns="0" rIns="0" bIns="0" rtlCol="0" anchor="t"/>
           <a:lstStyle/>
           <a:p>
-            <a:pPr indent="0" marL="0">
+            <a:pPr marL="0" indent="0">
               <a:buNone/>
             </a:pPr>
             <a:r>
@@ -10744,7 +11123,7 @@
           <a:bodyPr wrap="square" lIns="0" tIns="0" rIns="0" bIns="0" rtlCol="0" anchor="t"/>
           <a:lstStyle/>
           <a:p>
-            <a:pPr indent="0" marL="0">
+            <a:pPr marL="0" indent="0">
               <a:buNone/>
             </a:pPr>
             <a:r>
@@ -10780,7 +11159,7 @@
           <a:bodyPr wrap="square" lIns="0" tIns="0" rIns="0" bIns="0" rtlCol="0" anchor="t"/>
           <a:lstStyle/>
           <a:p>
-            <a:pPr indent="0" marL="0">
+            <a:pPr marL="0" indent="0">
               <a:buNone/>
             </a:pPr>
             <a:r>
@@ -10816,7 +11195,7 @@
           <a:bodyPr wrap="square" lIns="0" tIns="0" rIns="0" bIns="0" rtlCol="0" anchor="t"/>
           <a:lstStyle/>
           <a:p>
-            <a:pPr indent="0" marL="0">
+            <a:pPr marL="0" indent="0">
               <a:buNone/>
             </a:pPr>
             <a:r>
@@ -10852,7 +11231,7 @@
           <a:bodyPr wrap="square" lIns="0" tIns="0" rIns="0" bIns="0" rtlCol="0" anchor="t"/>
           <a:lstStyle/>
           <a:p>
-            <a:pPr indent="0" marL="0">
+            <a:pPr marL="0" indent="0">
               <a:buNone/>
             </a:pPr>
             <a:r>
@@ -10886,6 +11265,13 @@
           </a:solidFill>
           <a:ln/>
         </p:spPr>
+        <p:txBody>
+          <a:bodyPr/>
+          <a:lstStyle/>
+          <a:p>
+            <a:endParaRPr lang="en-UA"/>
+          </a:p>
+        </p:txBody>
       </p:sp>
       <p:sp>
         <p:nvSpPr>
@@ -10906,6 +11292,13 @@
           </a:solidFill>
           <a:ln/>
         </p:spPr>
+        <p:txBody>
+          <a:bodyPr/>
+          <a:lstStyle/>
+          <a:p>
+            <a:endParaRPr lang="en-UA"/>
+          </a:p>
+        </p:txBody>
       </p:sp>
       <p:sp>
         <p:nvSpPr>
@@ -10926,6 +11319,13 @@
           </a:solidFill>
           <a:ln/>
         </p:spPr>
+        <p:txBody>
+          <a:bodyPr/>
+          <a:lstStyle/>
+          <a:p>
+            <a:endParaRPr lang="en-UA"/>
+          </a:p>
+        </p:txBody>
       </p:sp>
       <p:sp>
         <p:nvSpPr>
@@ -10946,6 +11346,13 @@
           </a:solidFill>
           <a:ln/>
         </p:spPr>
+        <p:txBody>
+          <a:bodyPr/>
+          <a:lstStyle/>
+          <a:p>
+            <a:endParaRPr lang="en-UA"/>
+          </a:p>
+        </p:txBody>
       </p:sp>
       <p:sp>
         <p:nvSpPr>
@@ -10966,6 +11373,13 @@
           </a:solidFill>
           <a:ln/>
         </p:spPr>
+        <p:txBody>
+          <a:bodyPr/>
+          <a:lstStyle/>
+          <a:p>
+            <a:endParaRPr lang="en-UA"/>
+          </a:p>
+        </p:txBody>
       </p:sp>
       <p:sp>
         <p:nvSpPr>
@@ -10986,6 +11400,13 @@
           </a:solidFill>
           <a:ln/>
         </p:spPr>
+        <p:txBody>
+          <a:bodyPr/>
+          <a:lstStyle/>
+          <a:p>
+            <a:endParaRPr lang="en-UA"/>
+          </a:p>
+        </p:txBody>
       </p:sp>
       <p:sp>
         <p:nvSpPr>
@@ -11006,6 +11427,13 @@
           </a:solidFill>
           <a:ln/>
         </p:spPr>
+        <p:txBody>
+          <a:bodyPr/>
+          <a:lstStyle/>
+          <a:p>
+            <a:endParaRPr lang="en-UA"/>
+          </a:p>
+        </p:txBody>
       </p:sp>
       <p:sp>
         <p:nvSpPr>
@@ -11031,6 +11459,13 @@
             <a:prstDash val="solid"/>
           </a:ln>
         </p:spPr>
+        <p:txBody>
+          <a:bodyPr/>
+          <a:lstStyle/>
+          <a:p>
+            <a:endParaRPr lang="en-UA"/>
+          </a:p>
+        </p:txBody>
       </p:sp>
       <p:sp>
         <p:nvSpPr>
@@ -11056,6 +11491,13 @@
             <a:prstDash val="solid"/>
           </a:ln>
         </p:spPr>
+        <p:txBody>
+          <a:bodyPr/>
+          <a:lstStyle/>
+          <a:p>
+            <a:endParaRPr lang="en-UA"/>
+          </a:p>
+        </p:txBody>
       </p:sp>
       <p:sp>
         <p:nvSpPr>
@@ -11081,6 +11523,13 @@
             <a:prstDash val="solid"/>
           </a:ln>
         </p:spPr>
+        <p:txBody>
+          <a:bodyPr/>
+          <a:lstStyle/>
+          <a:p>
+            <a:endParaRPr lang="en-UA"/>
+          </a:p>
+        </p:txBody>
       </p:sp>
       <p:sp>
         <p:nvSpPr>
@@ -11103,7 +11552,7 @@
           <a:bodyPr wrap="square" lIns="0" tIns="0" rIns="0" bIns="0" rtlCol="0" anchor="t"/>
           <a:lstStyle/>
           <a:p>
-            <a:pPr indent="0" marL="0">
+            <a:pPr marL="0" indent="0">
               <a:buNone/>
             </a:pPr>
             <a:r>
@@ -11139,6 +11588,13 @@
           </a:solidFill>
           <a:ln/>
         </p:spPr>
+        <p:txBody>
+          <a:bodyPr/>
+          <a:lstStyle/>
+          <a:p>
+            <a:endParaRPr lang="en-UA"/>
+          </a:p>
+        </p:txBody>
       </p:sp>
       <p:sp>
         <p:nvSpPr>
@@ -11159,17 +11615,24 @@
           </a:solidFill>
           <a:ln/>
         </p:spPr>
+        <p:txBody>
+          <a:bodyPr/>
+          <a:lstStyle/>
+          <a:p>
+            <a:endParaRPr lang="en-UA"/>
+          </a:p>
+        </p:txBody>
       </p:sp>
       <p:pic>
         <p:nvPicPr>
-          <p:cNvPr id="28" name="icon-220" descr="Memory icon">    </p:cNvPr>
+          <p:cNvPr id="28" name="icon-220" descr="Memory icon"/>
           <p:cNvPicPr>
             <a:picLocks noChangeAspect="1"/>
           </p:cNvPicPr>
           <p:nvPr/>
         </p:nvPicPr>
         <p:blipFill>
-          <a:blip r:embed="rId2"/>
+          <a:blip r:embed="rId4"/>
           <a:stretch>
             <a:fillRect/>
           </a:stretch>
@@ -11205,7 +11668,7 @@
           <a:bodyPr wrap="square" lIns="0" tIns="0" rIns="0" bIns="0" rtlCol="0" anchor="t"/>
           <a:lstStyle/>
           <a:p>
-            <a:pPr indent="0" marL="0">
+            <a:pPr marL="0" indent="0">
               <a:buNone/>
             </a:pPr>
             <a:r>
@@ -11241,7 +11704,7 @@
           <a:bodyPr wrap="square" lIns="0" tIns="0" rIns="0" bIns="0" rtlCol="0" anchor="t"/>
           <a:lstStyle/>
           <a:p>
-            <a:pPr indent="0" marL="0">
+            <a:pPr marL="0" indent="0">
               <a:buNone/>
             </a:pPr>
             <a:r>
@@ -11277,7 +11740,7 @@
           <a:bodyPr wrap="square" lIns="0" tIns="0" rIns="0" bIns="0" rtlCol="0" anchor="t"/>
           <a:lstStyle/>
           <a:p>
-            <a:pPr indent="0" marL="0">
+            <a:pPr marL="0" indent="0">
               <a:buNone/>
             </a:pPr>
             <a:r>
@@ -11317,7 +11780,7 @@
           <a:bodyPr wrap="square" lIns="0" tIns="0" rIns="0" bIns="0" rtlCol="0" anchor="ctr"/>
           <a:lstStyle/>
           <a:p>
-            <a:pPr algn="ctr" indent="0" marL="0">
+            <a:pPr marL="0" indent="0" algn="ctr">
               <a:buNone/>
             </a:pPr>
             <a:r>
@@ -11355,6 +11818,13 @@
             <a:tailEnd type="triangle"/>
           </a:ln>
         </p:spPr>
+        <p:txBody>
+          <a:bodyPr/>
+          <a:lstStyle/>
+          <a:p>
+            <a:endParaRPr lang="en-UA"/>
+          </a:p>
+        </p:txBody>
       </p:sp>
       <p:sp>
         <p:nvSpPr>
@@ -11381,7 +11851,7 @@
           <a:bodyPr wrap="square" lIns="0" tIns="0" rIns="0" bIns="0" rtlCol="0" anchor="ctr"/>
           <a:lstStyle/>
           <a:p>
-            <a:pPr algn="ctr" indent="0" marL="0">
+            <a:pPr marL="0" indent="0" algn="ctr">
               <a:buNone/>
             </a:pPr>
             <a:r>
@@ -11417,7 +11887,7 @@
           <a:bodyPr wrap="square" lIns="0" tIns="0" rIns="0" bIns="0" rtlCol="0" anchor="ctr"/>
           <a:lstStyle/>
           <a:p>
-            <a:pPr indent="0" marL="0">
+            <a:pPr marL="0" indent="0">
               <a:buNone/>
             </a:pPr>
             <a:r>
@@ -11453,7 +11923,7 @@
           <a:bodyPr wrap="square" lIns="0" tIns="0" rIns="0" bIns="0" rtlCol="0" anchor="t"/>
           <a:lstStyle/>
           <a:p>
-            <a:pPr indent="0" marL="0">
+            <a:pPr marL="0" indent="0">
               <a:buNone/>
             </a:pPr>
             <a:r>
@@ -11493,7 +11963,7 @@
           <a:bodyPr wrap="square" lIns="0" tIns="0" rIns="0" bIns="0" rtlCol="0" anchor="ctr"/>
           <a:lstStyle/>
           <a:p>
-            <a:pPr algn="ctr" indent="0" marL="0">
+            <a:pPr marL="0" indent="0" algn="ctr">
               <a:buNone/>
             </a:pPr>
             <a:r>
@@ -11531,6 +12001,13 @@
             <a:tailEnd type="triangle"/>
           </a:ln>
         </p:spPr>
+        <p:txBody>
+          <a:bodyPr/>
+          <a:lstStyle/>
+          <a:p>
+            <a:endParaRPr lang="en-UA"/>
+          </a:p>
+        </p:txBody>
       </p:sp>
       <p:sp>
         <p:nvSpPr>
@@ -11557,7 +12034,7 @@
           <a:bodyPr wrap="square" lIns="0" tIns="0" rIns="0" bIns="0" rtlCol="0" anchor="ctr"/>
           <a:lstStyle/>
           <a:p>
-            <a:pPr algn="ctr" indent="0" marL="0">
+            <a:pPr marL="0" indent="0" algn="ctr">
               <a:buNone/>
             </a:pPr>
             <a:r>
@@ -11595,6 +12072,13 @@
             <a:tailEnd type="triangle"/>
           </a:ln>
         </p:spPr>
+        <p:txBody>
+          <a:bodyPr/>
+          <a:lstStyle/>
+          <a:p>
+            <a:endParaRPr lang="en-UA"/>
+          </a:p>
+        </p:txBody>
       </p:sp>
       <p:sp>
         <p:nvSpPr>
@@ -11621,7 +12105,7 @@
           <a:bodyPr wrap="square" lIns="0" tIns="0" rIns="0" bIns="0" rtlCol="0" anchor="ctr"/>
           <a:lstStyle/>
           <a:p>
-            <a:pPr algn="ctr" indent="0" marL="0">
+            <a:pPr marL="0" indent="0" algn="ctr">
               <a:buNone/>
             </a:pPr>
             <a:r>
@@ -11659,6 +12143,13 @@
             <a:tailEnd type="triangle"/>
           </a:ln>
         </p:spPr>
+        <p:txBody>
+          <a:bodyPr/>
+          <a:lstStyle/>
+          <a:p>
+            <a:endParaRPr lang="en-UA"/>
+          </a:p>
+        </p:txBody>
       </p:sp>
       <p:sp>
         <p:nvSpPr>
@@ -11685,7 +12176,7 @@
           <a:bodyPr wrap="square" lIns="0" tIns="0" rIns="0" bIns="0" rtlCol="0" anchor="ctr"/>
           <a:lstStyle/>
           <a:p>
-            <a:pPr algn="ctr" indent="0" marL="0">
+            <a:pPr marL="0" indent="0" algn="ctr">
               <a:buNone/>
             </a:pPr>
             <a:r>
@@ -11778,7 +12269,7 @@
       </p:sp>
       <p:sp>
         <p:nvSpPr>
-          <p:cNvPr id="25" name="Slide Number Placeholder 0"/>
+          <p:cNvPr id="45" name="Slide Number Placeholder 0"/>
           <p:cNvSpPr>
             <a:spLocks noGrp="1"/>
           </p:cNvSpPr>
@@ -11796,7 +12287,7 @@
           </a:prstGeom>
           <a:extLst>
             <a:ext uri="{C572A759-6A51-4108-AA02-DFA0A04FC94B}">
-              <ma14:wrappingTextBoxFlag xmlns:ma14="http://schemas.microsoft.com/office/mac/drawingml/2011/main" val="0"/>
+              <ma14:wrappingTextBoxFlag xmlns:ma14="http://schemas.microsoft.com/office/mac/drawingml/2011/main" xmlns="" val="0"/>
             </a:ext>
           </a:extLst>
         </p:spPr>
@@ -11814,7 +12305,7 @@
           <a:p>
             <a:pPr algn="r"/>
             <a:fld id="{F7021451-1387-4CA6-816F-3879F97B5CBC}" type="slidenum">
-              <a:rPr b="0" lang="en-US"/>
+              <a:rPr lang="en-US" b="0"/>
               <a:t>7</a:t>
             </a:fld>
             <a:endParaRPr lang="en-US"/>
@@ -11849,9 +12340,11 @@
       <p:sp>
         <p:nvSpPr>
           <p:cNvPr id="2" name="Text 0"/>
-          <p:cNvSpPr/>
+          <p:cNvSpPr>
+            <a:spLocks noGrp="1"/>
+          </p:cNvSpPr>
           <p:nvPr>
-            <p:ph idx="100" type="title" hasCustomPrompt="1"/>
+            <p:ph type="title" idx="100" hasCustomPrompt="1"/>
           </p:nvPr>
         </p:nvSpPr>
         <p:spPr>
@@ -11869,7 +12362,7 @@
           <a:bodyPr wrap="square" lIns="0" tIns="0" rIns="0" bIns="0" rtlCol="0" anchor="ctr"/>
           <a:lstStyle/>
           <a:p>
-            <a:pPr algn="l" indent="0" marL="0">
+            <a:pPr marL="0" indent="0" algn="l">
               <a:buNone/>
             </a:pPr>
             <a:r>
@@ -11905,13 +12398,20 @@
           </a:solidFill>
           <a:ln/>
           <a:effectLst>
-            <a:outerShdw sx="100000" sy="100000" kx="0" ky="0" algn="bl" rotWithShape="0" blurRad="101600" dist="25400" dir="5400000">
+            <a:outerShdw blurRad="101600" dist="25400" dir="5400000" algn="bl" rotWithShape="0">
               <a:srgbClr val="000000">
                 <a:alpha val="12000"/>
               </a:srgbClr>
             </a:outerShdw>
           </a:effectLst>
         </p:spPr>
+        <p:txBody>
+          <a:bodyPr/>
+          <a:lstStyle/>
+          <a:p>
+            <a:endParaRPr lang="en-UA"/>
+          </a:p>
+        </p:txBody>
       </p:sp>
       <p:sp>
         <p:nvSpPr>
@@ -11932,17 +12432,24 @@
           </a:solidFill>
           <a:ln/>
         </p:spPr>
+        <p:txBody>
+          <a:bodyPr/>
+          <a:lstStyle/>
+          <a:p>
+            <a:endParaRPr lang="en-UA"/>
+          </a:p>
+        </p:txBody>
       </p:sp>
       <p:pic>
         <p:nvPicPr>
-          <p:cNvPr id="5" name="icon-239" descr="Desktop icon">    </p:cNvPr>
+          <p:cNvPr id="5" name="icon-239" descr="Desktop icon"/>
           <p:cNvPicPr>
             <a:picLocks noChangeAspect="1"/>
           </p:cNvPicPr>
           <p:nvPr/>
         </p:nvPicPr>
         <p:blipFill>
-          <a:blip r:embed="rId1"/>
+          <a:blip r:embed="rId3"/>
           <a:stretch>
             <a:fillRect/>
           </a:stretch>
@@ -11978,7 +12485,7 @@
           <a:bodyPr wrap="square" lIns="0" tIns="0" rIns="0" bIns="0" rtlCol="0" anchor="t"/>
           <a:lstStyle/>
           <a:p>
-            <a:pPr indent="0" marL="0">
+            <a:pPr marL="0" indent="0">
               <a:buNone/>
             </a:pPr>
             <a:r>
@@ -12014,7 +12521,7 @@
           <a:bodyPr wrap="square" lIns="0" tIns="0" rIns="0" bIns="0" rtlCol="0" anchor="t"/>
           <a:lstStyle/>
           <a:p>
-            <a:pPr indent="0" marL="0">
+            <a:pPr marL="0" indent="0">
               <a:buNone/>
             </a:pPr>
             <a:r>
@@ -12052,6 +12559,13 @@
             <a:tailEnd type="triangle"/>
           </a:ln>
         </p:spPr>
+        <p:txBody>
+          <a:bodyPr/>
+          <a:lstStyle/>
+          <a:p>
+            <a:endParaRPr lang="en-UA"/>
+          </a:p>
+        </p:txBody>
       </p:sp>
       <p:sp>
         <p:nvSpPr>
@@ -12074,13 +12588,20 @@
           </a:solidFill>
           <a:ln/>
           <a:effectLst>
-            <a:outerShdw sx="100000" sy="100000" kx="0" ky="0" algn="bl" rotWithShape="0" blurRad="101600" dist="25400" dir="5400000">
+            <a:outerShdw blurRad="101600" dist="25400" dir="5400000" algn="bl" rotWithShape="0">
               <a:srgbClr val="000000">
                 <a:alpha val="12000"/>
               </a:srgbClr>
             </a:outerShdw>
           </a:effectLst>
         </p:spPr>
+        <p:txBody>
+          <a:bodyPr/>
+          <a:lstStyle/>
+          <a:p>
+            <a:endParaRPr lang="en-UA"/>
+          </a:p>
+        </p:txBody>
       </p:sp>
       <p:sp>
         <p:nvSpPr>
@@ -12101,17 +12622,24 @@
           </a:solidFill>
           <a:ln/>
         </p:spPr>
+        <p:txBody>
+          <a:bodyPr/>
+          <a:lstStyle/>
+          <a:p>
+            <a:endParaRPr lang="en-UA"/>
+          </a:p>
+        </p:txBody>
       </p:sp>
       <p:pic>
         <p:nvPicPr>
-          <p:cNvPr id="11" name="icon-245" descr="NetworkWired icon">    </p:cNvPr>
+          <p:cNvPr id="11" name="icon-245" descr="NetworkWired icon"/>
           <p:cNvPicPr>
             <a:picLocks noChangeAspect="1"/>
           </p:cNvPicPr>
           <p:nvPr/>
         </p:nvPicPr>
         <p:blipFill>
-          <a:blip r:embed="rId2"/>
+          <a:blip r:embed="rId4"/>
           <a:stretch>
             <a:fillRect/>
           </a:stretch>
@@ -12147,7 +12675,7 @@
           <a:bodyPr wrap="square" lIns="0" tIns="0" rIns="0" bIns="0" rtlCol="0" anchor="t"/>
           <a:lstStyle/>
           <a:p>
-            <a:pPr indent="0" marL="0">
+            <a:pPr marL="0" indent="0">
               <a:buNone/>
             </a:pPr>
             <a:r>
@@ -12183,7 +12711,7 @@
           <a:bodyPr wrap="square" lIns="0" tIns="0" rIns="0" bIns="0" rtlCol="0" anchor="t"/>
           <a:lstStyle/>
           <a:p>
-            <a:pPr indent="0" marL="0">
+            <a:pPr marL="0" indent="0">
               <a:buNone/>
             </a:pPr>
             <a:r>
@@ -12197,7 +12725,7 @@
             <a:endParaRPr lang="en-US" sz="1400" dirty="0"/>
           </a:p>
           <a:p>
-            <a:pPr indent="0" marL="0">
+            <a:pPr marL="0" indent="0">
               <a:buNone/>
             </a:pPr>
             <a:r>
@@ -12235,6 +12763,13 @@
             <a:tailEnd type="triangle"/>
           </a:ln>
         </p:spPr>
+        <p:txBody>
+          <a:bodyPr/>
+          <a:lstStyle/>
+          <a:p>
+            <a:endParaRPr lang="en-UA"/>
+          </a:p>
+        </p:txBody>
       </p:sp>
       <p:sp>
         <p:nvSpPr>
@@ -12257,13 +12792,20 @@
           </a:solidFill>
           <a:ln/>
           <a:effectLst>
-            <a:outerShdw sx="100000" sy="100000" kx="0" ky="0" algn="bl" rotWithShape="0" blurRad="101600" dist="25400" dir="5400000">
+            <a:outerShdw blurRad="101600" dist="25400" dir="5400000" algn="bl" rotWithShape="0">
               <a:srgbClr val="000000">
                 <a:alpha val="12000"/>
               </a:srgbClr>
             </a:outerShdw>
           </a:effectLst>
         </p:spPr>
+        <p:txBody>
+          <a:bodyPr/>
+          <a:lstStyle/>
+          <a:p>
+            <a:endParaRPr lang="en-UA"/>
+          </a:p>
+        </p:txBody>
       </p:sp>
       <p:sp>
         <p:nvSpPr>
@@ -12284,17 +12826,24 @@
           </a:solidFill>
           <a:ln/>
         </p:spPr>
+        <p:txBody>
+          <a:bodyPr/>
+          <a:lstStyle/>
+          <a:p>
+            <a:endParaRPr lang="en-UA"/>
+          </a:p>
+        </p:txBody>
       </p:sp>
       <p:pic>
         <p:nvPicPr>
-          <p:cNvPr id="17" name="icon-251" descr="Bolt icon">    </p:cNvPr>
+          <p:cNvPr id="17" name="icon-251" descr="Bolt icon"/>
           <p:cNvPicPr>
             <a:picLocks noChangeAspect="1"/>
           </p:cNvPicPr>
           <p:nvPr/>
         </p:nvPicPr>
         <p:blipFill>
-          <a:blip r:embed="rId3"/>
+          <a:blip r:embed="rId5"/>
           <a:stretch>
             <a:fillRect/>
           </a:stretch>
@@ -12330,7 +12879,7 @@
           <a:bodyPr wrap="square" lIns="0" tIns="0" rIns="0" bIns="0" rtlCol="0" anchor="t"/>
           <a:lstStyle/>
           <a:p>
-            <a:pPr indent="0" marL="0">
+            <a:pPr marL="0" indent="0">
               <a:buNone/>
             </a:pPr>
             <a:r>
@@ -12366,7 +12915,7 @@
           <a:bodyPr wrap="square" lIns="0" tIns="0" rIns="0" bIns="0" rtlCol="0" anchor="t"/>
           <a:lstStyle/>
           <a:p>
-            <a:pPr indent="0" marL="0">
+            <a:pPr marL="0" indent="0">
               <a:buNone/>
             </a:pPr>
             <a:r>
@@ -12404,6 +12953,13 @@
             <a:tailEnd type="triangle"/>
           </a:ln>
         </p:spPr>
+        <p:txBody>
+          <a:bodyPr/>
+          <a:lstStyle/>
+          <a:p>
+            <a:endParaRPr lang="en-UA"/>
+          </a:p>
+        </p:txBody>
       </p:sp>
       <p:sp>
         <p:nvSpPr>
@@ -12426,13 +12982,20 @@
           </a:solidFill>
           <a:ln/>
           <a:effectLst>
-            <a:outerShdw sx="100000" sy="100000" kx="0" ky="0" algn="bl" rotWithShape="0" blurRad="101600" dist="25400" dir="5400000">
+            <a:outerShdw blurRad="101600" dist="25400" dir="5400000" algn="bl" rotWithShape="0">
               <a:srgbClr val="000000">
                 <a:alpha val="12000"/>
               </a:srgbClr>
             </a:outerShdw>
           </a:effectLst>
         </p:spPr>
+        <p:txBody>
+          <a:bodyPr/>
+          <a:lstStyle/>
+          <a:p>
+            <a:endParaRPr lang="en-UA"/>
+          </a:p>
+        </p:txBody>
       </p:sp>
       <p:sp>
         <p:nvSpPr>
@@ -12453,264 +13016,17 @@
           </a:solidFill>
           <a:ln/>
         </p:spPr>
+        <p:txBody>
+          <a:bodyPr/>
+          <a:lstStyle/>
+          <a:p>
+            <a:endParaRPr lang="en-UA"/>
+          </a:p>
+        </p:txBody>
       </p:sp>
       <p:pic>
         <p:nvPicPr>
-          <p:cNvPr id="23" name="icon-257" descr="Database icon">    </p:cNvPr>
-          <p:cNvPicPr>
-            <a:picLocks noChangeAspect="1"/>
-          </p:cNvPicPr>
-          <p:nvPr/>
-        </p:nvPicPr>
-        <p:blipFill>
-          <a:blip r:embed="rId4"/>
-          <a:stretch>
-            <a:fillRect/>
-          </a:stretch>
-        </p:blipFill>
-        <p:spPr>
-          <a:xfrm>
-            <a:off x="9654235" y="1805940"/>
-            <a:ext cx="320040" cy="320040"/>
-          </a:xfrm>
-          <a:prstGeom prst="rect">
-            <a:avLst/>
-          </a:prstGeom>
-        </p:spPr>
-      </p:pic>
-      <p:sp>
-        <p:nvSpPr>
-          <p:cNvPr id="24" name="text-258"/>
-          <p:cNvSpPr txBox="1"/>
-          <p:nvPr/>
-        </p:nvSpPr>
-        <p:spPr>
-          <a:xfrm>
-            <a:off x="9494215" y="2423160"/>
-            <a:ext cx="2011680" cy="320040"/>
-          </a:xfrm>
-          <a:prstGeom prst="rect">
-            <a:avLst/>
-          </a:prstGeom>
-          <a:noFill/>
-          <a:ln/>
-        </p:spPr>
-        <p:txBody>
-          <a:bodyPr wrap="square" lIns="0" tIns="0" rIns="0" bIns="0" rtlCol="0" anchor="t"/>
-          <a:lstStyle/>
-          <a:p>
-            <a:pPr indent="0" marL="0">
-              <a:buNone/>
-            </a:pPr>
-            <a:r>
-              <a:rPr lang="en-US" sz="1800" b="1" dirty="0">
-                <a:solidFill>
-                  <a:schemeClr val="tx1"/>
-                </a:solidFill>
-              </a:rPr>
-              <a:t>DynamoDB</a:t>
-            </a:r>
-            <a:endParaRPr lang="en-US" sz="1800" dirty="0"/>
-          </a:p>
-        </p:txBody>
-      </p:sp>
-      <p:sp>
-        <p:nvSpPr>
-          <p:cNvPr id="25" name="text-259"/>
-          <p:cNvSpPr txBox="1"/>
-          <p:nvPr/>
-        </p:nvSpPr>
-        <p:spPr>
-          <a:xfrm>
-            <a:off x="9494215" y="2761488"/>
-            <a:ext cx="2011680" cy="502920"/>
-          </a:xfrm>
-          <a:prstGeom prst="rect">
-            <a:avLst/>
-          </a:prstGeom>
-          <a:noFill/>
-          <a:ln/>
-        </p:spPr>
-        <p:txBody>
-          <a:bodyPr wrap="square" lIns="0" tIns="0" rIns="0" bIns="0" rtlCol="0" anchor="t"/>
-          <a:lstStyle/>
-          <a:p>
-            <a:pPr indent="0" marL="0">
-              <a:buNone/>
-            </a:pPr>
-            <a:r>
-              <a:rPr lang="en-US" sz="1400" dirty="0">
-                <a:solidFill>
-                  <a:schemeClr val="accent6"/>
-                </a:solidFill>
-              </a:rPr>
-              <a:t>таблиця Items, ключ id</a:t>
-            </a:r>
-            <a:endParaRPr lang="en-US" sz="1400" dirty="0"/>
-          </a:p>
-        </p:txBody>
-      </p:sp>
-      <p:sp>
-        <p:nvSpPr>
-          <p:cNvPr id="26" name="panel-260"/>
-          <p:cNvSpPr/>
-          <p:nvPr/>
-        </p:nvSpPr>
-        <p:spPr>
-          <a:xfrm>
-            <a:off x="548640" y="3566160"/>
-            <a:ext cx="5283098" cy="685800"/>
-          </a:xfrm>
-          <a:prstGeom prst="roundRect">
-            <a:avLst>
-              <a:gd name="adj" fmla="val 16000"/>
-            </a:avLst>
-          </a:prstGeom>
-          <a:solidFill>
-            <a:schemeClr val="bg1"/>
-          </a:solidFill>
-          <a:ln/>
-          <a:effectLst>
-            <a:outerShdw sx="100000" sy="100000" kx="0" ky="0" algn="bl" rotWithShape="0" blurRad="101600" dist="25400" dir="5400000">
-              <a:srgbClr val="000000">
-                <a:alpha val="12000"/>
-              </a:srgbClr>
-            </a:outerShdw>
-          </a:effectLst>
-        </p:spPr>
-      </p:sp>
-      <p:sp>
-        <p:nvSpPr>
-          <p:cNvPr id="27" name="icon-circle-261"/>
-          <p:cNvSpPr/>
-          <p:nvPr/>
-        </p:nvSpPr>
-        <p:spPr>
-          <a:xfrm>
-            <a:off x="731520" y="3675888"/>
-            <a:ext cx="457200" cy="457200"/>
-          </a:xfrm>
-          <a:prstGeom prst="ellipse">
-            <a:avLst/>
-          </a:prstGeom>
-          <a:solidFill>
-            <a:schemeClr val="accent1"/>
-          </a:solidFill>
-          <a:ln/>
-        </p:spPr>
-      </p:sp>
-      <p:pic>
-        <p:nvPicPr>
-          <p:cNvPr id="28" name="icon-262" descr="ChartLine icon">    </p:cNvPr>
-          <p:cNvPicPr>
-            <a:picLocks noChangeAspect="1"/>
-          </p:cNvPicPr>
-          <p:nvPr/>
-        </p:nvPicPr>
-        <p:blipFill>
-          <a:blip r:embed="rId5"/>
-          <a:stretch>
-            <a:fillRect/>
-          </a:stretch>
-        </p:blipFill>
-        <p:spPr>
-          <a:xfrm>
-            <a:off x="845820" y="3790188"/>
-            <a:ext cx="228600" cy="228600"/>
-          </a:xfrm>
-          <a:prstGeom prst="rect">
-            <a:avLst/>
-          </a:prstGeom>
-        </p:spPr>
-      </p:pic>
-      <p:sp>
-        <p:nvSpPr>
-          <p:cNvPr id="29" name="text-263"/>
-          <p:cNvSpPr txBox="1"/>
-          <p:nvPr/>
-        </p:nvSpPr>
-        <p:spPr>
-          <a:xfrm>
-            <a:off x="1371600" y="3566160"/>
-            <a:ext cx="4023360" cy="685800"/>
-          </a:xfrm>
-          <a:prstGeom prst="rect">
-            <a:avLst/>
-          </a:prstGeom>
-          <a:noFill/>
-          <a:ln/>
-        </p:spPr>
-        <p:txBody>
-          <a:bodyPr wrap="square" lIns="0" tIns="0" rIns="0" bIns="0" rtlCol="0" anchor="ctr"/>
-          <a:lstStyle/>
-          <a:p>
-            <a:pPr indent="0" marL="0">
-              <a:buNone/>
-            </a:pPr>
-            <a:r>
-              <a:rPr lang="en-US" sz="1400" dirty="0">
-                <a:solidFill>
-                  <a:schemeClr val="tx1"/>
-                </a:solidFill>
-              </a:rPr>
-              <a:t>CloudWatch Logs — логи запитів і помилок</a:t>
-            </a:r>
-            <a:endParaRPr lang="en-US" sz="1400" dirty="0"/>
-          </a:p>
-        </p:txBody>
-      </p:sp>
-      <p:sp>
-        <p:nvSpPr>
-          <p:cNvPr id="30" name="panel-264"/>
-          <p:cNvSpPr/>
-          <p:nvPr/>
-        </p:nvSpPr>
-        <p:spPr>
-          <a:xfrm>
-            <a:off x="6359957" y="3566160"/>
-            <a:ext cx="5283098" cy="685800"/>
-          </a:xfrm>
-          <a:prstGeom prst="roundRect">
-            <a:avLst>
-              <a:gd name="adj" fmla="val 16000"/>
-            </a:avLst>
-          </a:prstGeom>
-          <a:solidFill>
-            <a:schemeClr val="bg1"/>
-          </a:solidFill>
-          <a:ln/>
-          <a:effectLst>
-            <a:outerShdw sx="100000" sy="100000" kx="0" ky="0" algn="bl" rotWithShape="0" blurRad="101600" dist="25400" dir="5400000">
-              <a:srgbClr val="000000">
-                <a:alpha val="12000"/>
-              </a:srgbClr>
-            </a:outerShdw>
-          </a:effectLst>
-        </p:spPr>
-      </p:sp>
-      <p:sp>
-        <p:nvSpPr>
-          <p:cNvPr id="31" name="icon-circle-265"/>
-          <p:cNvSpPr/>
-          <p:nvPr/>
-        </p:nvSpPr>
-        <p:spPr>
-          <a:xfrm>
-            <a:off x="6542837" y="3675888"/>
-            <a:ext cx="457200" cy="457200"/>
-          </a:xfrm>
-          <a:prstGeom prst="ellipse">
-            <a:avLst/>
-          </a:prstGeom>
-          <a:solidFill>
-            <a:schemeClr val="accent1"/>
-          </a:solidFill>
-          <a:ln/>
-        </p:spPr>
-      </p:sp>
-      <p:pic>
-        <p:nvPicPr>
-          <p:cNvPr id="32" name="icon-266" descr="UserShield icon">    </p:cNvPr>
+          <p:cNvPr id="23" name="icon-257" descr="Database icon"/>
           <p:cNvPicPr>
             <a:picLocks noChangeAspect="1"/>
           </p:cNvPicPr>
@@ -12724,8 +13040,8 @@
         </p:blipFill>
         <p:spPr>
           <a:xfrm>
-            <a:off x="6657137" y="3790188"/>
-            <a:ext cx="228600" cy="228600"/>
+            <a:off x="9654235" y="1805940"/>
+            <a:ext cx="320040" cy="320040"/>
           </a:xfrm>
           <a:prstGeom prst="rect">
             <a:avLst/>
@@ -12734,35 +13050,71 @@
       </p:pic>
       <p:sp>
         <p:nvSpPr>
-          <p:cNvPr id="33" name="text-267"/>
-          <p:cNvSpPr txBox="1"/>
-          <p:nvPr/>
-        </p:nvSpPr>
-        <p:spPr>
-          <a:xfrm>
-            <a:off x="7182917" y="3566160"/>
-            <a:ext cx="4023360" cy="685800"/>
-          </a:xfrm>
-          <a:prstGeom prst="rect">
-            <a:avLst/>
-          </a:prstGeom>
-          <a:noFill/>
-          <a:ln/>
-        </p:spPr>
-        <p:txBody>
-          <a:bodyPr wrap="square" lIns="0" tIns="0" rIns="0" bIns="0" rtlCol="0" anchor="ctr"/>
-          <a:lstStyle/>
-          <a:p>
-            <a:pPr indent="0" marL="0">
+          <p:cNvPr id="24" name="text-258"/>
+          <p:cNvSpPr txBox="1"/>
+          <p:nvPr/>
+        </p:nvSpPr>
+        <p:spPr>
+          <a:xfrm>
+            <a:off x="9494215" y="2423160"/>
+            <a:ext cx="2011680" cy="320040"/>
+          </a:xfrm>
+          <a:prstGeom prst="rect">
+            <a:avLst/>
+          </a:prstGeom>
+          <a:noFill/>
+          <a:ln/>
+        </p:spPr>
+        <p:txBody>
+          <a:bodyPr wrap="square" lIns="0" tIns="0" rIns="0" bIns="0" rtlCol="0" anchor="t"/>
+          <a:lstStyle/>
+          <a:p>
+            <a:pPr marL="0" indent="0">
+              <a:buNone/>
+            </a:pPr>
+            <a:r>
+              <a:rPr lang="en-US" sz="1800" b="1" dirty="0">
+                <a:solidFill>
+                  <a:schemeClr val="tx1"/>
+                </a:solidFill>
+              </a:rPr>
+              <a:t>DynamoDB</a:t>
+            </a:r>
+            <a:endParaRPr lang="en-US" sz="1800" dirty="0"/>
+          </a:p>
+        </p:txBody>
+      </p:sp>
+      <p:sp>
+        <p:nvSpPr>
+          <p:cNvPr id="25" name="text-259"/>
+          <p:cNvSpPr txBox="1"/>
+          <p:nvPr/>
+        </p:nvSpPr>
+        <p:spPr>
+          <a:xfrm>
+            <a:off x="9494215" y="2761488"/>
+            <a:ext cx="2011680" cy="502920"/>
+          </a:xfrm>
+          <a:prstGeom prst="rect">
+            <a:avLst/>
+          </a:prstGeom>
+          <a:noFill/>
+          <a:ln/>
+        </p:spPr>
+        <p:txBody>
+          <a:bodyPr wrap="square" lIns="0" tIns="0" rIns="0" bIns="0" rtlCol="0" anchor="t"/>
+          <a:lstStyle/>
+          <a:p>
+            <a:pPr marL="0" indent="0">
               <a:buNone/>
             </a:pPr>
             <a:r>
               <a:rPr lang="en-US" sz="1400" dirty="0">
                 <a:solidFill>
-                  <a:schemeClr val="tx1"/>
-                </a:solidFill>
-              </a:rPr>
-              <a:t>IAM-роль Lambda: дозволи dynamodb:PutItem і GetItem</a:t>
+                  <a:schemeClr val="accent6"/>
+                </a:solidFill>
+              </a:rPr>
+              <a:t>таблиця Items, ключ id</a:t>
             </a:r>
             <a:endParaRPr lang="en-US" sz="1400" dirty="0"/>
           </a:p>
@@ -12770,54 +13122,18 @@
       </p:sp>
       <p:sp>
         <p:nvSpPr>
-          <p:cNvPr id="34" name="text-268"/>
-          <p:cNvSpPr txBox="1"/>
-          <p:nvPr/>
-        </p:nvSpPr>
-        <p:spPr>
-          <a:xfrm>
-            <a:off x="548640" y="4480560"/>
-            <a:ext cx="5486400" cy="274320"/>
-          </a:xfrm>
-          <a:prstGeom prst="rect">
-            <a:avLst/>
-          </a:prstGeom>
-          <a:noFill/>
-          <a:ln/>
-        </p:spPr>
-        <p:txBody>
-          <a:bodyPr wrap="square" lIns="0" tIns="0" rIns="0" bIns="0" rtlCol="0" anchor="t"/>
-          <a:lstStyle/>
-          <a:p>
-            <a:pPr indent="0" marL="0">
-              <a:buNone/>
-            </a:pPr>
-            <a:r>
-              <a:rPr lang="en-US" sz="1600" b="1" dirty="0">
-                <a:solidFill>
-                  <a:schemeClr val="tx1"/>
-                </a:solidFill>
-              </a:rPr>
-              <a:t>План практики: 5 кроків</a:t>
-            </a:r>
-            <a:endParaRPr lang="en-US" sz="1600" dirty="0"/>
-          </a:p>
-        </p:txBody>
-      </p:sp>
-      <p:sp>
-        <p:nvSpPr>
-          <p:cNvPr id="35" name="panel-269"/>
+          <p:cNvPr id="26" name="panel-260"/>
           <p:cNvSpPr/>
           <p:nvPr/>
         </p:nvSpPr>
         <p:spPr>
           <a:xfrm>
-            <a:off x="548640" y="4846320"/>
-            <a:ext cx="2109155" cy="1463040"/>
+            <a:off x="548640" y="3566160"/>
+            <a:ext cx="5283098" cy="685800"/>
           </a:xfrm>
           <a:prstGeom prst="roundRect">
             <a:avLst>
-              <a:gd name="adj" fmla="val 7500"/>
+              <a:gd name="adj" fmla="val 16000"/>
             </a:avLst>
           </a:prstGeom>
           <a:solidFill>
@@ -12825,24 +13141,31 @@
           </a:solidFill>
           <a:ln/>
           <a:effectLst>
-            <a:outerShdw sx="100000" sy="100000" kx="0" ky="0" algn="bl" rotWithShape="0" blurRad="101600" dist="25400" dir="5400000">
+            <a:outerShdw blurRad="101600" dist="25400" dir="5400000" algn="bl" rotWithShape="0">
               <a:srgbClr val="000000">
                 <a:alpha val="12000"/>
               </a:srgbClr>
             </a:outerShdw>
           </a:effectLst>
         </p:spPr>
-      </p:sp>
-      <p:sp>
-        <p:nvSpPr>
-          <p:cNvPr id="36" name="num-270"/>
-          <p:cNvSpPr txBox="1"/>
-          <p:nvPr/>
-        </p:nvSpPr>
-        <p:spPr>
-          <a:xfrm>
-            <a:off x="731520" y="4983480"/>
-            <a:ext cx="411480" cy="411480"/>
+        <p:txBody>
+          <a:bodyPr/>
+          <a:lstStyle/>
+          <a:p>
+            <a:endParaRPr lang="en-UA"/>
+          </a:p>
+        </p:txBody>
+      </p:sp>
+      <p:sp>
+        <p:nvSpPr>
+          <p:cNvPr id="27" name="icon-circle-261"/>
+          <p:cNvSpPr/>
+          <p:nvPr/>
+        </p:nvSpPr>
+        <p:spPr>
+          <a:xfrm>
+            <a:off x="731520" y="3675888"/>
+            <a:ext cx="457200" cy="457200"/>
           </a:xfrm>
           <a:prstGeom prst="ellipse">
             <a:avLst/>
@@ -12853,55 +13176,68 @@
           <a:ln/>
         </p:spPr>
         <p:txBody>
+          <a:bodyPr/>
+          <a:lstStyle/>
+          <a:p>
+            <a:endParaRPr lang="en-UA"/>
+          </a:p>
+        </p:txBody>
+      </p:sp>
+      <p:pic>
+        <p:nvPicPr>
+          <p:cNvPr id="28" name="icon-262" descr="ChartLine icon"/>
+          <p:cNvPicPr>
+            <a:picLocks noChangeAspect="1"/>
+          </p:cNvPicPr>
+          <p:nvPr/>
+        </p:nvPicPr>
+        <p:blipFill>
+          <a:blip r:embed="rId7"/>
+          <a:stretch>
+            <a:fillRect/>
+          </a:stretch>
+        </p:blipFill>
+        <p:spPr>
+          <a:xfrm>
+            <a:off x="845820" y="3790188"/>
+            <a:ext cx="228600" cy="228600"/>
+          </a:xfrm>
+          <a:prstGeom prst="rect">
+            <a:avLst/>
+          </a:prstGeom>
+        </p:spPr>
+      </p:pic>
+      <p:sp>
+        <p:nvSpPr>
+          <p:cNvPr id="29" name="text-263"/>
+          <p:cNvSpPr txBox="1"/>
+          <p:nvPr/>
+        </p:nvSpPr>
+        <p:spPr>
+          <a:xfrm>
+            <a:off x="1371600" y="3566160"/>
+            <a:ext cx="4023360" cy="685800"/>
+          </a:xfrm>
+          <a:prstGeom prst="rect">
+            <a:avLst/>
+          </a:prstGeom>
+          <a:noFill/>
+          <a:ln/>
+        </p:spPr>
+        <p:txBody>
           <a:bodyPr wrap="square" lIns="0" tIns="0" rIns="0" bIns="0" rtlCol="0" anchor="ctr"/>
           <a:lstStyle/>
           <a:p>
-            <a:pPr algn="ctr" indent="0" marL="0">
-              <a:buNone/>
-            </a:pPr>
-            <a:r>
-              <a:rPr lang="en-US" sz="1500" b="1" dirty="0">
+            <a:pPr marL="0" indent="0">
+              <a:buNone/>
+            </a:pPr>
+            <a:r>
+              <a:rPr lang="en-US" sz="1400" dirty="0">
                 <a:solidFill>
                   <a:schemeClr val="tx1"/>
                 </a:solidFill>
               </a:rPr>
-              <a:t>1</a:t>
-            </a:r>
-            <a:endParaRPr lang="en-US" sz="1500" dirty="0"/>
-          </a:p>
-        </p:txBody>
-      </p:sp>
-      <p:sp>
-        <p:nvSpPr>
-          <p:cNvPr id="37" name="text-271"/>
-          <p:cNvSpPr txBox="1"/>
-          <p:nvPr/>
-        </p:nvSpPr>
-        <p:spPr>
-          <a:xfrm>
-            <a:off x="731520" y="5532120"/>
-            <a:ext cx="1789115" cy="731520"/>
-          </a:xfrm>
-          <a:prstGeom prst="rect">
-            <a:avLst/>
-          </a:prstGeom>
-          <a:noFill/>
-          <a:ln/>
-        </p:spPr>
-        <p:txBody>
-          <a:bodyPr wrap="square" lIns="0" tIns="0" rIns="0" bIns="0" rtlCol="0" anchor="t"/>
-          <a:lstStyle/>
-          <a:p>
-            <a:pPr indent="0" marL="0">
-              <a:buNone/>
-            </a:pPr>
-            <a:r>
-              <a:rPr lang="en-US" sz="1400" b="1" dirty="0">
-                <a:solidFill>
-                  <a:schemeClr val="tx1"/>
-                </a:solidFill>
-              </a:rPr>
-              <a:t>Створити таблицю DynamoDB</a:t>
+              <a:t>CloudWatch Logs — логи запитів і помилок</a:t>
             </a:r>
             <a:endParaRPr lang="en-US" sz="1400" dirty="0"/>
           </a:p>
@@ -12909,18 +13245,18 @@
       </p:sp>
       <p:sp>
         <p:nvSpPr>
-          <p:cNvPr id="38" name="panel-272"/>
+          <p:cNvPr id="30" name="panel-264"/>
           <p:cNvSpPr/>
           <p:nvPr/>
         </p:nvSpPr>
         <p:spPr>
           <a:xfrm>
-            <a:off x="2794955" y="4846320"/>
-            <a:ext cx="2109155" cy="1463040"/>
+            <a:off x="6359957" y="3566160"/>
+            <a:ext cx="5283098" cy="685800"/>
           </a:xfrm>
           <a:prstGeom prst="roundRect">
             <a:avLst>
-              <a:gd name="adj" fmla="val 7500"/>
+              <a:gd name="adj" fmla="val 16000"/>
             </a:avLst>
           </a:prstGeom>
           <a:solidFill>
@@ -12928,24 +13264,31 @@
           </a:solidFill>
           <a:ln/>
           <a:effectLst>
-            <a:outerShdw sx="100000" sy="100000" kx="0" ky="0" algn="bl" rotWithShape="0" blurRad="101600" dist="25400" dir="5400000">
+            <a:outerShdw blurRad="101600" dist="25400" dir="5400000" algn="bl" rotWithShape="0">
               <a:srgbClr val="000000">
                 <a:alpha val="12000"/>
               </a:srgbClr>
             </a:outerShdw>
           </a:effectLst>
         </p:spPr>
-      </p:sp>
-      <p:sp>
-        <p:nvSpPr>
-          <p:cNvPr id="39" name="num-273"/>
-          <p:cNvSpPr txBox="1"/>
-          <p:nvPr/>
-        </p:nvSpPr>
-        <p:spPr>
-          <a:xfrm>
-            <a:off x="2977835" y="4983480"/>
-            <a:ext cx="411480" cy="411480"/>
+        <p:txBody>
+          <a:bodyPr/>
+          <a:lstStyle/>
+          <a:p>
+            <a:endParaRPr lang="en-UA"/>
+          </a:p>
+        </p:txBody>
+      </p:sp>
+      <p:sp>
+        <p:nvSpPr>
+          <p:cNvPr id="31" name="icon-circle-265"/>
+          <p:cNvSpPr/>
+          <p:nvPr/>
+        </p:nvSpPr>
+        <p:spPr>
+          <a:xfrm>
+            <a:off x="6542837" y="3675888"/>
+            <a:ext cx="457200" cy="457200"/>
           </a:xfrm>
           <a:prstGeom prst="ellipse">
             <a:avLst/>
@@ -12956,34 +13299,83 @@
           <a:ln/>
         </p:spPr>
         <p:txBody>
+          <a:bodyPr/>
+          <a:lstStyle/>
+          <a:p>
+            <a:endParaRPr lang="en-UA"/>
+          </a:p>
+        </p:txBody>
+      </p:sp>
+      <p:pic>
+        <p:nvPicPr>
+          <p:cNvPr id="32" name="icon-266" descr="UserShield icon"/>
+          <p:cNvPicPr>
+            <a:picLocks noChangeAspect="1"/>
+          </p:cNvPicPr>
+          <p:nvPr/>
+        </p:nvPicPr>
+        <p:blipFill>
+          <a:blip r:embed="rId8"/>
+          <a:stretch>
+            <a:fillRect/>
+          </a:stretch>
+        </p:blipFill>
+        <p:spPr>
+          <a:xfrm>
+            <a:off x="6657137" y="3790188"/>
+            <a:ext cx="228600" cy="228600"/>
+          </a:xfrm>
+          <a:prstGeom prst="rect">
+            <a:avLst/>
+          </a:prstGeom>
+        </p:spPr>
+      </p:pic>
+      <p:sp>
+        <p:nvSpPr>
+          <p:cNvPr id="33" name="text-267"/>
+          <p:cNvSpPr txBox="1"/>
+          <p:nvPr/>
+        </p:nvSpPr>
+        <p:spPr>
+          <a:xfrm>
+            <a:off x="7182917" y="3566160"/>
+            <a:ext cx="4023360" cy="685800"/>
+          </a:xfrm>
+          <a:prstGeom prst="rect">
+            <a:avLst/>
+          </a:prstGeom>
+          <a:noFill/>
+          <a:ln/>
+        </p:spPr>
+        <p:txBody>
           <a:bodyPr wrap="square" lIns="0" tIns="0" rIns="0" bIns="0" rtlCol="0" anchor="ctr"/>
           <a:lstStyle/>
           <a:p>
-            <a:pPr algn="ctr" indent="0" marL="0">
-              <a:buNone/>
-            </a:pPr>
-            <a:r>
-              <a:rPr lang="en-US" sz="1500" b="1" dirty="0">
+            <a:pPr marL="0" indent="0">
+              <a:buNone/>
+            </a:pPr>
+            <a:r>
+              <a:rPr lang="en-US" sz="1400" dirty="0">
                 <a:solidFill>
                   <a:schemeClr val="tx1"/>
                 </a:solidFill>
               </a:rPr>
-              <a:t>2</a:t>
-            </a:r>
-            <a:endParaRPr lang="en-US" sz="1500" dirty="0"/>
-          </a:p>
-        </p:txBody>
-      </p:sp>
-      <p:sp>
-        <p:nvSpPr>
-          <p:cNvPr id="40" name="text-274"/>
-          <p:cNvSpPr txBox="1"/>
-          <p:nvPr/>
-        </p:nvSpPr>
-        <p:spPr>
-          <a:xfrm>
-            <a:off x="2977835" y="5532120"/>
-            <a:ext cx="1789115" cy="731520"/>
+              <a:t>IAM-роль Lambda: дозволи dynamodb:PutItem і GetItem</a:t>
+            </a:r>
+            <a:endParaRPr lang="en-US" sz="1400" dirty="0"/>
+          </a:p>
+        </p:txBody>
+      </p:sp>
+      <p:sp>
+        <p:nvSpPr>
+          <p:cNvPr id="34" name="text-268"/>
+          <p:cNvSpPr txBox="1"/>
+          <p:nvPr/>
+        </p:nvSpPr>
+        <p:spPr>
+          <a:xfrm>
+            <a:off x="548640" y="4480560"/>
+            <a:ext cx="5486400" cy="274320"/>
           </a:xfrm>
           <a:prstGeom prst="rect">
             <a:avLst/>
@@ -12995,30 +13387,38 @@
           <a:bodyPr wrap="square" lIns="0" tIns="0" rIns="0" bIns="0" rtlCol="0" anchor="t"/>
           <a:lstStyle/>
           <a:p>
-            <a:pPr indent="0" marL="0">
-              <a:buNone/>
-            </a:pPr>
-            <a:r>
-              <a:rPr lang="en-US" sz="1400" b="1" dirty="0">
+            <a:pPr marL="0" indent="0">
+              <a:buNone/>
+            </a:pPr>
+            <a:r>
+              <a:rPr lang="en-US" sz="1600" b="1" dirty="0" err="1">
                 <a:solidFill>
                   <a:schemeClr val="tx1"/>
                 </a:solidFill>
               </a:rPr>
-              <a:t>Створити Lambda з IAM-роллю</a:t>
-            </a:r>
-            <a:endParaRPr lang="en-US" sz="1400" dirty="0"/>
-          </a:p>
-        </p:txBody>
-      </p:sp>
-      <p:sp>
-        <p:nvSpPr>
-          <p:cNvPr id="41" name="panel-275"/>
+              <a:t>План</a:t>
+            </a:r>
+            <a:r>
+              <a:rPr lang="en-US" sz="1600" b="1" dirty="0">
+                <a:solidFill>
+                  <a:schemeClr val="tx1"/>
+                </a:solidFill>
+              </a:rPr>
+              <a:t>: 5 кроків</a:t>
+            </a:r>
+            <a:endParaRPr lang="en-US" sz="1600" dirty="0"/>
+          </a:p>
+        </p:txBody>
+      </p:sp>
+      <p:sp>
+        <p:nvSpPr>
+          <p:cNvPr id="35" name="panel-269"/>
           <p:cNvSpPr/>
           <p:nvPr/>
         </p:nvSpPr>
         <p:spPr>
           <a:xfrm>
-            <a:off x="5041270" y="4846320"/>
+            <a:off x="548640" y="4846320"/>
             <a:ext cx="2109155" cy="1463040"/>
           </a:xfrm>
           <a:prstGeom prst="roundRect">
@@ -13031,23 +13431,30 @@
           </a:solidFill>
           <a:ln/>
           <a:effectLst>
-            <a:outerShdw sx="100000" sy="100000" kx="0" ky="0" algn="bl" rotWithShape="0" blurRad="101600" dist="25400" dir="5400000">
+            <a:outerShdw blurRad="101600" dist="25400" dir="5400000" algn="bl" rotWithShape="0">
               <a:srgbClr val="000000">
                 <a:alpha val="12000"/>
               </a:srgbClr>
             </a:outerShdw>
           </a:effectLst>
         </p:spPr>
-      </p:sp>
-      <p:sp>
-        <p:nvSpPr>
-          <p:cNvPr id="42" name="num-276"/>
-          <p:cNvSpPr txBox="1"/>
-          <p:nvPr/>
-        </p:nvSpPr>
-        <p:spPr>
-          <a:xfrm>
-            <a:off x="5224150" y="4983480"/>
+        <p:txBody>
+          <a:bodyPr/>
+          <a:lstStyle/>
+          <a:p>
+            <a:endParaRPr lang="en-UA"/>
+          </a:p>
+        </p:txBody>
+      </p:sp>
+      <p:sp>
+        <p:nvSpPr>
+          <p:cNvPr id="36" name="num-270"/>
+          <p:cNvSpPr txBox="1"/>
+          <p:nvPr/>
+        </p:nvSpPr>
+        <p:spPr>
+          <a:xfrm>
+            <a:off x="731520" y="4983480"/>
             <a:ext cx="411480" cy="411480"/>
           </a:xfrm>
           <a:prstGeom prst="ellipse">
@@ -13062,7 +13469,7 @@
           <a:bodyPr wrap="square" lIns="0" tIns="0" rIns="0" bIns="0" rtlCol="0" anchor="ctr"/>
           <a:lstStyle/>
           <a:p>
-            <a:pPr algn="ctr" indent="0" marL="0">
+            <a:pPr marL="0" indent="0" algn="ctr">
               <a:buNone/>
             </a:pPr>
             <a:r>
@@ -13071,7 +13478,7 @@
                   <a:schemeClr val="tx1"/>
                 </a:solidFill>
               </a:rPr>
-              <a:t>3</a:t>
+              <a:t>1</a:t>
             </a:r>
             <a:endParaRPr lang="en-US" sz="1500" dirty="0"/>
           </a:p>
@@ -13079,13 +13486,13 @@
       </p:sp>
       <p:sp>
         <p:nvSpPr>
-          <p:cNvPr id="43" name="text-277"/>
-          <p:cNvSpPr txBox="1"/>
-          <p:nvPr/>
-        </p:nvSpPr>
-        <p:spPr>
-          <a:xfrm>
-            <a:off x="5224150" y="5532120"/>
+          <p:cNvPr id="37" name="text-271"/>
+          <p:cNvSpPr txBox="1"/>
+          <p:nvPr/>
+        </p:nvSpPr>
+        <p:spPr>
+          <a:xfrm>
+            <a:off x="731520" y="5532120"/>
             <a:ext cx="1789115" cy="731520"/>
           </a:xfrm>
           <a:prstGeom prst="rect">
@@ -13098,7 +13505,7 @@
           <a:bodyPr wrap="square" lIns="0" tIns="0" rIns="0" bIns="0" rtlCol="0" anchor="t"/>
           <a:lstStyle/>
           <a:p>
-            <a:pPr indent="0" marL="0">
+            <a:pPr marL="0" indent="0">
               <a:buNone/>
             </a:pPr>
             <a:r>
@@ -13107,7 +13514,7 @@
                   <a:schemeClr val="tx1"/>
                 </a:solidFill>
               </a:rPr>
-              <a:t>Створити REST API і ресурс /items</a:t>
+              <a:t>Створити таблицю DynamoDB</a:t>
             </a:r>
             <a:endParaRPr lang="en-US" sz="1400" dirty="0"/>
           </a:p>
@@ -13115,13 +13522,13 @@
       </p:sp>
       <p:sp>
         <p:nvSpPr>
-          <p:cNvPr id="44" name="panel-278"/>
+          <p:cNvPr id="38" name="panel-272"/>
           <p:cNvSpPr/>
           <p:nvPr/>
         </p:nvSpPr>
         <p:spPr>
           <a:xfrm>
-            <a:off x="7287585" y="4846320"/>
+            <a:off x="2794955" y="4846320"/>
             <a:ext cx="2109155" cy="1463040"/>
           </a:xfrm>
           <a:prstGeom prst="roundRect">
@@ -13134,23 +13541,30 @@
           </a:solidFill>
           <a:ln/>
           <a:effectLst>
-            <a:outerShdw sx="100000" sy="100000" kx="0" ky="0" algn="bl" rotWithShape="0" blurRad="101600" dist="25400" dir="5400000">
+            <a:outerShdw blurRad="101600" dist="25400" dir="5400000" algn="bl" rotWithShape="0">
               <a:srgbClr val="000000">
                 <a:alpha val="12000"/>
               </a:srgbClr>
             </a:outerShdw>
           </a:effectLst>
         </p:spPr>
-      </p:sp>
-      <p:sp>
-        <p:nvSpPr>
-          <p:cNvPr id="45" name="num-279"/>
-          <p:cNvSpPr txBox="1"/>
-          <p:nvPr/>
-        </p:nvSpPr>
-        <p:spPr>
-          <a:xfrm>
-            <a:off x="7470465" y="4983480"/>
+        <p:txBody>
+          <a:bodyPr/>
+          <a:lstStyle/>
+          <a:p>
+            <a:endParaRPr lang="en-UA"/>
+          </a:p>
+        </p:txBody>
+      </p:sp>
+      <p:sp>
+        <p:nvSpPr>
+          <p:cNvPr id="39" name="num-273"/>
+          <p:cNvSpPr txBox="1"/>
+          <p:nvPr/>
+        </p:nvSpPr>
+        <p:spPr>
+          <a:xfrm>
+            <a:off x="2977835" y="4983480"/>
             <a:ext cx="411480" cy="411480"/>
           </a:xfrm>
           <a:prstGeom prst="ellipse">
@@ -13165,7 +13579,7 @@
           <a:bodyPr wrap="square" lIns="0" tIns="0" rIns="0" bIns="0" rtlCol="0" anchor="ctr"/>
           <a:lstStyle/>
           <a:p>
-            <a:pPr algn="ctr" indent="0" marL="0">
+            <a:pPr marL="0" indent="0" algn="ctr">
               <a:buNone/>
             </a:pPr>
             <a:r>
@@ -13174,7 +13588,7 @@
                   <a:schemeClr val="tx1"/>
                 </a:solidFill>
               </a:rPr>
-              <a:t>4</a:t>
+              <a:t>2</a:t>
             </a:r>
             <a:endParaRPr lang="en-US" sz="1500" dirty="0"/>
           </a:p>
@@ -13182,13 +13596,13 @@
       </p:sp>
       <p:sp>
         <p:nvSpPr>
-          <p:cNvPr id="46" name="text-280"/>
-          <p:cNvSpPr txBox="1"/>
-          <p:nvPr/>
-        </p:nvSpPr>
-        <p:spPr>
-          <a:xfrm>
-            <a:off x="7470465" y="5532120"/>
+          <p:cNvPr id="40" name="text-274"/>
+          <p:cNvSpPr txBox="1"/>
+          <p:nvPr/>
+        </p:nvSpPr>
+        <p:spPr>
+          <a:xfrm>
+            <a:off x="2977835" y="5532120"/>
             <a:ext cx="1789115" cy="731520"/>
           </a:xfrm>
           <a:prstGeom prst="rect">
@@ -13201,7 +13615,7 @@
           <a:bodyPr wrap="square" lIns="0" tIns="0" rIns="0" bIns="0" rtlCol="0" anchor="t"/>
           <a:lstStyle/>
           <a:p>
-            <a:pPr indent="0" marL="0">
+            <a:pPr marL="0" indent="0">
               <a:buNone/>
             </a:pPr>
             <a:r>
@@ -13210,7 +13624,7 @@
                   <a:schemeClr val="tx1"/>
                 </a:solidFill>
               </a:rPr>
-              <a:t>Підключити Lambda та зробити Deploy</a:t>
+              <a:t>Створити Lambda з IAM-роллю</a:t>
             </a:r>
             <a:endParaRPr lang="en-US" sz="1400" dirty="0"/>
           </a:p>
@@ -13218,13 +13632,13 @@
       </p:sp>
       <p:sp>
         <p:nvSpPr>
-          <p:cNvPr id="47" name="panel-281"/>
+          <p:cNvPr id="41" name="panel-275"/>
           <p:cNvSpPr/>
           <p:nvPr/>
         </p:nvSpPr>
         <p:spPr>
           <a:xfrm>
-            <a:off x="9533900" y="4846320"/>
+            <a:off x="5041270" y="4846320"/>
             <a:ext cx="2109155" cy="1463040"/>
           </a:xfrm>
           <a:prstGeom prst="roundRect">
@@ -13237,13 +13651,240 @@
           </a:solidFill>
           <a:ln/>
           <a:effectLst>
-            <a:outerShdw sx="100000" sy="100000" kx="0" ky="0" algn="bl" rotWithShape="0" blurRad="101600" dist="25400" dir="5400000">
+            <a:outerShdw blurRad="101600" dist="25400" dir="5400000" algn="bl" rotWithShape="0">
               <a:srgbClr val="000000">
                 <a:alpha val="12000"/>
               </a:srgbClr>
             </a:outerShdw>
           </a:effectLst>
         </p:spPr>
+        <p:txBody>
+          <a:bodyPr/>
+          <a:lstStyle/>
+          <a:p>
+            <a:endParaRPr lang="en-UA"/>
+          </a:p>
+        </p:txBody>
+      </p:sp>
+      <p:sp>
+        <p:nvSpPr>
+          <p:cNvPr id="42" name="num-276"/>
+          <p:cNvSpPr txBox="1"/>
+          <p:nvPr/>
+        </p:nvSpPr>
+        <p:spPr>
+          <a:xfrm>
+            <a:off x="5224150" y="4983480"/>
+            <a:ext cx="411480" cy="411480"/>
+          </a:xfrm>
+          <a:prstGeom prst="ellipse">
+            <a:avLst/>
+          </a:prstGeom>
+          <a:solidFill>
+            <a:schemeClr val="accent1"/>
+          </a:solidFill>
+          <a:ln/>
+        </p:spPr>
+        <p:txBody>
+          <a:bodyPr wrap="square" lIns="0" tIns="0" rIns="0" bIns="0" rtlCol="0" anchor="ctr"/>
+          <a:lstStyle/>
+          <a:p>
+            <a:pPr marL="0" indent="0" algn="ctr">
+              <a:buNone/>
+            </a:pPr>
+            <a:r>
+              <a:rPr lang="en-US" sz="1500" b="1" dirty="0">
+                <a:solidFill>
+                  <a:schemeClr val="tx1"/>
+                </a:solidFill>
+              </a:rPr>
+              <a:t>3</a:t>
+            </a:r>
+            <a:endParaRPr lang="en-US" sz="1500" dirty="0"/>
+          </a:p>
+        </p:txBody>
+      </p:sp>
+      <p:sp>
+        <p:nvSpPr>
+          <p:cNvPr id="43" name="text-277"/>
+          <p:cNvSpPr txBox="1"/>
+          <p:nvPr/>
+        </p:nvSpPr>
+        <p:spPr>
+          <a:xfrm>
+            <a:off x="5224150" y="5532120"/>
+            <a:ext cx="1789115" cy="731520"/>
+          </a:xfrm>
+          <a:prstGeom prst="rect">
+            <a:avLst/>
+          </a:prstGeom>
+          <a:noFill/>
+          <a:ln/>
+        </p:spPr>
+        <p:txBody>
+          <a:bodyPr wrap="square" lIns="0" tIns="0" rIns="0" bIns="0" rtlCol="0" anchor="t"/>
+          <a:lstStyle/>
+          <a:p>
+            <a:pPr marL="0" indent="0">
+              <a:buNone/>
+            </a:pPr>
+            <a:r>
+              <a:rPr lang="en-US" sz="1400" b="1" dirty="0">
+                <a:solidFill>
+                  <a:schemeClr val="tx1"/>
+                </a:solidFill>
+              </a:rPr>
+              <a:t>Створити REST API і ресурс /items</a:t>
+            </a:r>
+            <a:endParaRPr lang="en-US" sz="1400" dirty="0"/>
+          </a:p>
+        </p:txBody>
+      </p:sp>
+      <p:sp>
+        <p:nvSpPr>
+          <p:cNvPr id="44" name="panel-278"/>
+          <p:cNvSpPr/>
+          <p:nvPr/>
+        </p:nvSpPr>
+        <p:spPr>
+          <a:xfrm>
+            <a:off x="7287585" y="4846320"/>
+            <a:ext cx="2109155" cy="1463040"/>
+          </a:xfrm>
+          <a:prstGeom prst="roundRect">
+            <a:avLst>
+              <a:gd name="adj" fmla="val 7500"/>
+            </a:avLst>
+          </a:prstGeom>
+          <a:solidFill>
+            <a:schemeClr val="bg1"/>
+          </a:solidFill>
+          <a:ln/>
+          <a:effectLst>
+            <a:outerShdw blurRad="101600" dist="25400" dir="5400000" algn="bl" rotWithShape="0">
+              <a:srgbClr val="000000">
+                <a:alpha val="12000"/>
+              </a:srgbClr>
+            </a:outerShdw>
+          </a:effectLst>
+        </p:spPr>
+        <p:txBody>
+          <a:bodyPr/>
+          <a:lstStyle/>
+          <a:p>
+            <a:endParaRPr lang="en-UA"/>
+          </a:p>
+        </p:txBody>
+      </p:sp>
+      <p:sp>
+        <p:nvSpPr>
+          <p:cNvPr id="45" name="num-279"/>
+          <p:cNvSpPr txBox="1"/>
+          <p:nvPr/>
+        </p:nvSpPr>
+        <p:spPr>
+          <a:xfrm>
+            <a:off x="7470465" y="4983480"/>
+            <a:ext cx="411480" cy="411480"/>
+          </a:xfrm>
+          <a:prstGeom prst="ellipse">
+            <a:avLst/>
+          </a:prstGeom>
+          <a:solidFill>
+            <a:schemeClr val="accent1"/>
+          </a:solidFill>
+          <a:ln/>
+        </p:spPr>
+        <p:txBody>
+          <a:bodyPr wrap="square" lIns="0" tIns="0" rIns="0" bIns="0" rtlCol="0" anchor="ctr"/>
+          <a:lstStyle/>
+          <a:p>
+            <a:pPr marL="0" indent="0" algn="ctr">
+              <a:buNone/>
+            </a:pPr>
+            <a:r>
+              <a:rPr lang="en-US" sz="1500" b="1" dirty="0">
+                <a:solidFill>
+                  <a:schemeClr val="tx1"/>
+                </a:solidFill>
+              </a:rPr>
+              <a:t>4</a:t>
+            </a:r>
+            <a:endParaRPr lang="en-US" sz="1500" dirty="0"/>
+          </a:p>
+        </p:txBody>
+      </p:sp>
+      <p:sp>
+        <p:nvSpPr>
+          <p:cNvPr id="46" name="text-280"/>
+          <p:cNvSpPr txBox="1"/>
+          <p:nvPr/>
+        </p:nvSpPr>
+        <p:spPr>
+          <a:xfrm>
+            <a:off x="7470465" y="5532120"/>
+            <a:ext cx="1789115" cy="731520"/>
+          </a:xfrm>
+          <a:prstGeom prst="rect">
+            <a:avLst/>
+          </a:prstGeom>
+          <a:noFill/>
+          <a:ln/>
+        </p:spPr>
+        <p:txBody>
+          <a:bodyPr wrap="square" lIns="0" tIns="0" rIns="0" bIns="0" rtlCol="0" anchor="t"/>
+          <a:lstStyle/>
+          <a:p>
+            <a:pPr marL="0" indent="0">
+              <a:buNone/>
+            </a:pPr>
+            <a:r>
+              <a:rPr lang="en-US" sz="1400" b="1" dirty="0">
+                <a:solidFill>
+                  <a:schemeClr val="tx1"/>
+                </a:solidFill>
+              </a:rPr>
+              <a:t>Підключити Lambda та зробити Deploy</a:t>
+            </a:r>
+            <a:endParaRPr lang="en-US" sz="1400" dirty="0"/>
+          </a:p>
+        </p:txBody>
+      </p:sp>
+      <p:sp>
+        <p:nvSpPr>
+          <p:cNvPr id="47" name="panel-281"/>
+          <p:cNvSpPr/>
+          <p:nvPr/>
+        </p:nvSpPr>
+        <p:spPr>
+          <a:xfrm>
+            <a:off x="9533900" y="4846320"/>
+            <a:ext cx="2109155" cy="1463040"/>
+          </a:xfrm>
+          <a:prstGeom prst="roundRect">
+            <a:avLst>
+              <a:gd name="adj" fmla="val 7500"/>
+            </a:avLst>
+          </a:prstGeom>
+          <a:solidFill>
+            <a:schemeClr val="bg1"/>
+          </a:solidFill>
+          <a:ln/>
+          <a:effectLst>
+            <a:outerShdw blurRad="101600" dist="25400" dir="5400000" algn="bl" rotWithShape="0">
+              <a:srgbClr val="000000">
+                <a:alpha val="12000"/>
+              </a:srgbClr>
+            </a:outerShdw>
+          </a:effectLst>
+        </p:spPr>
+        <p:txBody>
+          <a:bodyPr/>
+          <a:lstStyle/>
+          <a:p>
+            <a:endParaRPr lang="en-UA"/>
+          </a:p>
+        </p:txBody>
       </p:sp>
       <p:sp>
         <p:nvSpPr>
@@ -13268,7 +13909,7 @@
           <a:bodyPr wrap="square" lIns="0" tIns="0" rIns="0" bIns="0" rtlCol="0" anchor="ctr"/>
           <a:lstStyle/>
           <a:p>
-            <a:pPr algn="ctr" indent="0" marL="0">
+            <a:pPr marL="0" indent="0" algn="ctr">
               <a:buNone/>
             </a:pPr>
             <a:r>
@@ -13304,7 +13945,7 @@
           <a:bodyPr wrap="square" lIns="0" tIns="0" rIns="0" bIns="0" rtlCol="0" anchor="t"/>
           <a:lstStyle/>
           <a:p>
-            <a:pPr indent="0" marL="0">
+            <a:pPr marL="0" indent="0">
               <a:buNone/>
             </a:pPr>
             <a:r>
@@ -13321,7 +13962,7 @@
       </p:sp>
       <p:sp>
         <p:nvSpPr>
-          <p:cNvPr id="25" name="Slide Number Placeholder 0"/>
+          <p:cNvPr id="50" name="Slide Number Placeholder 0"/>
           <p:cNvSpPr>
             <a:spLocks noGrp="1"/>
           </p:cNvSpPr>
@@ -13339,7 +13980,7 @@
           </a:prstGeom>
           <a:extLst>
             <a:ext uri="{C572A759-6A51-4108-AA02-DFA0A04FC94B}">
-              <ma14:wrappingTextBoxFlag xmlns:ma14="http://schemas.microsoft.com/office/mac/drawingml/2011/main" val="0"/>
+              <ma14:wrappingTextBoxFlag xmlns:ma14="http://schemas.microsoft.com/office/mac/drawingml/2011/main" xmlns="" val="0"/>
             </a:ext>
           </a:extLst>
         </p:spPr>
@@ -13357,7 +13998,7 @@
           <a:p>
             <a:pPr algn="r"/>
             <a:fld id="{F7021451-1387-4CA6-816F-3879F97B5CBC}" type="slidenum">
-              <a:rPr b="0" lang="en-US"/>
+              <a:rPr lang="en-US" b="0"/>
               <a:t>8</a:t>
             </a:fld>
             <a:endParaRPr lang="en-US"/>
@@ -13392,9 +14033,11 @@
       <p:sp>
         <p:nvSpPr>
           <p:cNvPr id="2" name="Text 0"/>
-          <p:cNvSpPr/>
+          <p:cNvSpPr>
+            <a:spLocks noGrp="1"/>
+          </p:cNvSpPr>
           <p:nvPr>
-            <p:ph idx="100" type="title" hasCustomPrompt="1"/>
+            <p:ph type="title" idx="100" hasCustomPrompt="1"/>
           </p:nvPr>
         </p:nvSpPr>
         <p:spPr>
@@ -13412,7 +14055,7 @@
           <a:bodyPr wrap="square" lIns="0" tIns="0" rIns="0" bIns="0" rtlCol="0" anchor="ctr"/>
           <a:lstStyle/>
           <a:p>
-            <a:pPr algn="l" indent="0" marL="0">
+            <a:pPr marL="0" indent="0" algn="l">
               <a:buNone/>
             </a:pPr>
             <a:r>
@@ -13448,6 +14091,13 @@
           </a:solidFill>
           <a:ln/>
         </p:spPr>
+        <p:txBody>
+          <a:bodyPr/>
+          <a:lstStyle/>
+          <a:p>
+            <a:endParaRPr lang="en-UA"/>
+          </a:p>
+        </p:txBody>
       </p:sp>
       <p:sp>
         <p:nvSpPr>
@@ -13470,7 +14120,7 @@
           <a:bodyPr wrap="square" lIns="0" tIns="0" rIns="0" bIns="0" rtlCol="0" anchor="t"/>
           <a:lstStyle/>
           <a:p>
-            <a:pPr indent="0" marL="0">
+            <a:pPr marL="0" indent="0">
               <a:buNone/>
             </a:pPr>
             <a:r>
@@ -13506,7 +14156,7 @@
           <a:bodyPr wrap="square" lIns="0" tIns="0" rIns="0" bIns="0" rtlCol="0" anchor="t"/>
           <a:lstStyle/>
           <a:p>
-            <a:pPr indent="0" marL="0">
+            <a:pPr marL="0" indent="0">
               <a:buNone/>
             </a:pPr>
             <a:r>
@@ -13523,13 +14173,13 @@
             <a:endParaRPr lang="en-US" sz="1200" dirty="0"/>
           </a:p>
           <a:p>
-            <a:pPr indent="0" marL="0">
+            <a:pPr marL="0" indent="0">
               <a:buNone/>
             </a:pPr>
             <a:endParaRPr lang="en-US" sz="1200" dirty="0"/>
           </a:p>
           <a:p>
-            <a:pPr indent="0" marL="0">
+            <a:pPr marL="0" indent="0">
               <a:buNone/>
             </a:pPr>
             <a:r>
@@ -13546,13 +14196,13 @@
             <a:endParaRPr lang="en-US" sz="1200" dirty="0"/>
           </a:p>
           <a:p>
-            <a:pPr indent="0" marL="0">
+            <a:pPr marL="0" indent="0">
               <a:buNone/>
             </a:pPr>
             <a:endParaRPr lang="en-US" sz="1200" dirty="0"/>
           </a:p>
           <a:p>
-            <a:pPr indent="0" marL="0">
+            <a:pPr marL="0" indent="0">
               <a:buNone/>
             </a:pPr>
             <a:r>
@@ -13569,7 +14219,7 @@
             <a:endParaRPr lang="en-US" sz="1200" dirty="0"/>
           </a:p>
           <a:p>
-            <a:pPr indent="0" marL="0">
+            <a:pPr marL="0" indent="0">
               <a:buNone/>
             </a:pPr>
             <a:r>
@@ -13586,7 +14236,7 @@
             <a:endParaRPr lang="en-US" sz="1200" dirty="0"/>
           </a:p>
           <a:p>
-            <a:pPr indent="0" marL="0">
+            <a:pPr marL="0" indent="0">
               <a:buNone/>
             </a:pPr>
             <a:r>
@@ -13603,7 +14253,7 @@
             <a:endParaRPr lang="en-US" sz="1200" dirty="0"/>
           </a:p>
           <a:p>
-            <a:pPr indent="0" marL="0">
+            <a:pPr marL="0" indent="0">
               <a:buNone/>
             </a:pPr>
             <a:r>
@@ -13620,7 +14270,7 @@
             <a:endParaRPr lang="en-US" sz="1200" dirty="0"/>
           </a:p>
           <a:p>
-            <a:pPr indent="0" marL="0">
+            <a:pPr marL="0" indent="0">
               <a:buNone/>
             </a:pPr>
             <a:r>
@@ -13637,7 +14287,7 @@
             <a:endParaRPr lang="en-US" sz="1200" dirty="0"/>
           </a:p>
           <a:p>
-            <a:pPr indent="0" marL="0">
+            <a:pPr marL="0" indent="0">
               <a:buNone/>
             </a:pPr>
             <a:r>
@@ -13654,7 +14304,7 @@
             <a:endParaRPr lang="en-US" sz="1200" dirty="0"/>
           </a:p>
           <a:p>
-            <a:pPr indent="0" marL="0">
+            <a:pPr marL="0" indent="0">
               <a:buNone/>
             </a:pPr>
             <a:r>
@@ -13671,7 +14321,7 @@
             <a:endParaRPr lang="en-US" sz="1200" dirty="0"/>
           </a:p>
           <a:p>
-            <a:pPr indent="0" marL="0">
+            <a:pPr marL="0" indent="0">
               <a:buNone/>
             </a:pPr>
             <a:r>
@@ -13688,7 +14338,7 @@
             <a:endParaRPr lang="en-US" sz="1200" dirty="0"/>
           </a:p>
           <a:p>
-            <a:pPr indent="0" marL="0">
+            <a:pPr marL="0" indent="0">
               <a:buNone/>
             </a:pPr>
             <a:r>
@@ -13705,7 +14355,7 @@
             <a:endParaRPr lang="en-US" sz="1200" dirty="0"/>
           </a:p>
           <a:p>
-            <a:pPr indent="0" marL="0">
+            <a:pPr marL="0" indent="0">
               <a:buNone/>
             </a:pPr>
             <a:r>
@@ -13722,7 +14372,7 @@
             <a:endParaRPr lang="en-US" sz="1200" dirty="0"/>
           </a:p>
           <a:p>
-            <a:pPr indent="0" marL="0">
+            <a:pPr marL="0" indent="0">
               <a:buNone/>
             </a:pPr>
             <a:r>
@@ -13739,7 +14389,7 @@
             <a:endParaRPr lang="en-US" sz="1200" dirty="0"/>
           </a:p>
           <a:p>
-            <a:pPr indent="0" marL="0">
+            <a:pPr marL="0" indent="0">
               <a:buNone/>
             </a:pPr>
             <a:r>
@@ -13756,7 +14406,7 @@
             <a:endParaRPr lang="en-US" sz="1200" dirty="0"/>
           </a:p>
           <a:p>
-            <a:pPr indent="0" marL="0">
+            <a:pPr marL="0" indent="0">
               <a:buNone/>
             </a:pPr>
             <a:r>
@@ -13773,13 +14423,13 @@
             <a:endParaRPr lang="en-US" sz="1200" dirty="0"/>
           </a:p>
           <a:p>
-            <a:pPr indent="0" marL="0">
+            <a:pPr marL="0" indent="0">
               <a:buNone/>
             </a:pPr>
             <a:endParaRPr lang="en-US" sz="1200" dirty="0"/>
           </a:p>
           <a:p>
-            <a:pPr indent="0" marL="0">
+            <a:pPr marL="0" indent="0">
               <a:buNone/>
             </a:pPr>
             <a:r>
@@ -13796,7 +14446,7 @@
             <a:endParaRPr lang="en-US" sz="1200" dirty="0"/>
           </a:p>
           <a:p>
-            <a:pPr indent="0" marL="0">
+            <a:pPr marL="0" indent="0">
               <a:buNone/>
             </a:pPr>
             <a:r>
@@ -13813,7 +14463,7 @@
             <a:endParaRPr lang="en-US" sz="1200" dirty="0"/>
           </a:p>
           <a:p>
-            <a:pPr indent="0" marL="0">
+            <a:pPr marL="0" indent="0">
               <a:buNone/>
             </a:pPr>
             <a:r>
@@ -13830,7 +14480,7 @@
             <a:endParaRPr lang="en-US" sz="1200" dirty="0"/>
           </a:p>
           <a:p>
-            <a:pPr indent="0" marL="0">
+            <a:pPr marL="0" indent="0">
               <a:buNone/>
             </a:pPr>
             <a:r>
@@ -13871,7 +14521,7 @@
           <a:bodyPr wrap="square" lIns="0" tIns="0" rIns="0" bIns="0" rtlCol="0" anchor="ctr"/>
           <a:lstStyle/>
           <a:p>
-            <a:pPr algn="ctr" indent="0" marL="0">
+            <a:pPr marL="0" indent="0" algn="ctr">
               <a:buNone/>
             </a:pPr>
             <a:r>
@@ -13907,7 +14557,7 @@
           <a:bodyPr wrap="square" lIns="0" tIns="0" rIns="0" bIns="0" rtlCol="0" anchor="ctr"/>
           <a:lstStyle/>
           <a:p>
-            <a:pPr indent="0" marL="0">
+            <a:pPr marL="0" indent="0">
               <a:buNone/>
             </a:pPr>
             <a:r>
@@ -13945,7 +14595,7 @@
           <a:bodyPr wrap="square" lIns="0" tIns="0" rIns="0" bIns="0" rtlCol="0" anchor="ctr"/>
           <a:lstStyle/>
           <a:p>
-            <a:pPr algn="ctr" indent="0" marL="0">
+            <a:pPr marL="0" indent="0" algn="ctr">
               <a:buNone/>
             </a:pPr>
             <a:r>
@@ -13981,7 +14631,7 @@
           <a:bodyPr wrap="square" lIns="0" tIns="0" rIns="0" bIns="0" rtlCol="0" anchor="ctr"/>
           <a:lstStyle/>
           <a:p>
-            <a:pPr indent="0" marL="0">
+            <a:pPr marL="0" indent="0">
               <a:buNone/>
             </a:pPr>
             <a:r>
@@ -14019,7 +14669,7 @@
           <a:bodyPr wrap="square" lIns="0" tIns="0" rIns="0" bIns="0" rtlCol="0" anchor="ctr"/>
           <a:lstStyle/>
           <a:p>
-            <a:pPr algn="ctr" indent="0" marL="0">
+            <a:pPr marL="0" indent="0" algn="ctr">
               <a:buNone/>
             </a:pPr>
             <a:r>
@@ -14055,7 +14705,7 @@
           <a:bodyPr wrap="square" lIns="0" tIns="0" rIns="0" bIns="0" rtlCol="0" anchor="ctr"/>
           <a:lstStyle/>
           <a:p>
-            <a:pPr indent="0" marL="0">
+            <a:pPr marL="0" indent="0">
               <a:buNone/>
             </a:pPr>
             <a:r>
@@ -14093,7 +14743,7 @@
           <a:bodyPr wrap="square" lIns="0" tIns="0" rIns="0" bIns="0" rtlCol="0" anchor="ctr"/>
           <a:lstStyle/>
           <a:p>
-            <a:pPr algn="ctr" indent="0" marL="0">
+            <a:pPr marL="0" indent="0" algn="ctr">
               <a:buNone/>
             </a:pPr>
             <a:r>
@@ -14129,7 +14779,7 @@
           <a:bodyPr wrap="square" lIns="0" tIns="0" rIns="0" bIns="0" rtlCol="0" anchor="ctr"/>
           <a:lstStyle/>
           <a:p>
-            <a:pPr indent="0" marL="0">
+            <a:pPr marL="0" indent="0">
               <a:buNone/>
             </a:pPr>
             <a:r>
@@ -14165,6 +14815,13 @@
           </a:solidFill>
           <a:ln/>
         </p:spPr>
+        <p:txBody>
+          <a:bodyPr/>
+          <a:lstStyle/>
+          <a:p>
+            <a:endParaRPr lang="en-UA"/>
+          </a:p>
+        </p:txBody>
       </p:sp>
       <p:sp>
         <p:nvSpPr>
@@ -14187,7 +14844,7 @@
           <a:bodyPr wrap="square" lIns="0" tIns="0" rIns="0" bIns="0" rtlCol="0" anchor="ctr"/>
           <a:lstStyle/>
           <a:p>
-            <a:pPr indent="0" marL="0">
+            <a:pPr marL="0" indent="0">
               <a:buNone/>
             </a:pPr>
             <a:r>
@@ -14222,7 +14879,7 @@
           </a:prstGeom>
           <a:extLst>
             <a:ext uri="{C572A759-6A51-4108-AA02-DFA0A04FC94B}">
-              <ma14:wrappingTextBoxFlag xmlns:ma14="http://schemas.microsoft.com/office/mac/drawingml/2011/main" val="0"/>
+              <ma14:wrappingTextBoxFlag xmlns:ma14="http://schemas.microsoft.com/office/mac/drawingml/2011/main" xmlns="" val="0"/>
             </a:ext>
           </a:extLst>
         </p:spPr>
@@ -14240,7 +14897,7 @@
           <a:p>
             <a:pPr algn="r"/>
             <a:fld id="{F7021451-1387-4CA6-816F-3879F97B5CBC}" type="slidenum">
-              <a:rPr b="0" lang="en-US"/>
+              <a:rPr lang="en-US" b="0"/>
               <a:t>9</a:t>
             </a:fld>
             <a:endParaRPr lang="en-US"/>
@@ -14548,4 +15205,319 @@
     </a:ext>
   </a:extLst>
 </a:theme>
+</file>
+
+<file path=ppt/theme/theme2.xml><?xml version="1.0" encoding="utf-8"?>
+<a:theme xmlns:a="http://schemas.openxmlformats.org/drawingml/2006/main" name="Office Theme">
+  <a:themeElements>
+    <a:clrScheme name="Office">
+      <a:dk1>
+        <a:sysClr val="windowText" lastClr="000000"/>
+      </a:dk1>
+      <a:lt1>
+        <a:sysClr val="window" lastClr="FFFFFF"/>
+      </a:lt1>
+      <a:dk2>
+        <a:srgbClr val="0E2841"/>
+      </a:dk2>
+      <a:lt2>
+        <a:srgbClr val="E8E8E8"/>
+      </a:lt2>
+      <a:accent1>
+        <a:srgbClr val="156082"/>
+      </a:accent1>
+      <a:accent2>
+        <a:srgbClr val="E97132"/>
+      </a:accent2>
+      <a:accent3>
+        <a:srgbClr val="196B24"/>
+      </a:accent3>
+      <a:accent4>
+        <a:srgbClr val="0F9ED5"/>
+      </a:accent4>
+      <a:accent5>
+        <a:srgbClr val="A02B93"/>
+      </a:accent5>
+      <a:accent6>
+        <a:srgbClr val="4EA72E"/>
+      </a:accent6>
+      <a:hlink>
+        <a:srgbClr val="467886"/>
+      </a:hlink>
+      <a:folHlink>
+        <a:srgbClr val="96607D"/>
+      </a:folHlink>
+    </a:clrScheme>
+    <a:fontScheme name="Office">
+      <a:majorFont>
+        <a:latin typeface="Aptos Display" panose="02110004020202020204"/>
+        <a:ea typeface=""/>
+        <a:cs typeface=""/>
+        <a:font script="Jpan" typeface="游ゴシック Light"/>
+        <a:font script="Hang" typeface="맑은 고딕"/>
+        <a:font script="Hans" typeface="等线 Light"/>
+        <a:font script="Hant" typeface="新細明體"/>
+        <a:font script="Arab" typeface="Times New Roman"/>
+        <a:font script="Hebr" typeface="Times New Roman"/>
+        <a:font script="Thai" typeface="Angsana New"/>
+        <a:font script="Ethi" typeface="Nyala"/>
+        <a:font script="Beng" typeface="Vrinda"/>
+        <a:font script="Gujr" typeface="Shruti"/>
+        <a:font script="Khmr" typeface="MoolBoran"/>
+        <a:font script="Knda" typeface="Tunga"/>
+        <a:font script="Guru" typeface="Raavi"/>
+        <a:font script="Cans" typeface="Euphemia"/>
+        <a:font script="Cher" typeface="Plantagenet Cherokee"/>
+        <a:font script="Yiii" typeface="Microsoft Yi Baiti"/>
+        <a:font script="Tibt" typeface="Microsoft Himalaya"/>
+        <a:font script="Thaa" typeface="MV Boli"/>
+        <a:font script="Deva" typeface="Mangal"/>
+        <a:font script="Telu" typeface="Gautami"/>
+        <a:font script="Taml" typeface="Latha"/>
+        <a:font script="Syrc" typeface="Estrangelo Edessa"/>
+        <a:font script="Orya" typeface="Kalinga"/>
+        <a:font script="Mlym" typeface="Kartika"/>
+        <a:font script="Laoo" typeface="DokChampa"/>
+        <a:font script="Sinh" typeface="Iskoola Pota"/>
+        <a:font script="Mong" typeface="Mongolian Baiti"/>
+        <a:font script="Viet" typeface="Times New Roman"/>
+        <a:font script="Uigh" typeface="Microsoft Uighur"/>
+        <a:font script="Geor" typeface="Sylfaen"/>
+        <a:font script="Armn" typeface="Arial"/>
+        <a:font script="Bugi" typeface="Leelawadee UI"/>
+        <a:font script="Bopo" typeface="Microsoft JhengHei"/>
+        <a:font script="Java" typeface="Javanese Text"/>
+        <a:font script="Lisu" typeface="Segoe UI"/>
+        <a:font script="Mymr" typeface="Myanmar Text"/>
+        <a:font script="Nkoo" typeface="Ebrima"/>
+        <a:font script="Olck" typeface="Nirmala UI"/>
+        <a:font script="Osma" typeface="Ebrima"/>
+        <a:font script="Phag" typeface="Phagspa"/>
+        <a:font script="Syrn" typeface="Estrangelo Edessa"/>
+        <a:font script="Syrj" typeface="Estrangelo Edessa"/>
+        <a:font script="Syre" typeface="Estrangelo Edessa"/>
+        <a:font script="Sora" typeface="Nirmala UI"/>
+        <a:font script="Tale" typeface="Microsoft Tai Le"/>
+        <a:font script="Talu" typeface="Microsoft New Tai Lue"/>
+        <a:font script="Tfng" typeface="Ebrima"/>
+      </a:majorFont>
+      <a:minorFont>
+        <a:latin typeface="Aptos" panose="02110004020202020204"/>
+        <a:ea typeface=""/>
+        <a:cs typeface=""/>
+        <a:font script="Jpan" typeface="游ゴシック"/>
+        <a:font script="Hang" typeface="맑은 고딕"/>
+        <a:font script="Hans" typeface="等线"/>
+        <a:font script="Hant" typeface="新細明體"/>
+        <a:font script="Arab" typeface="Arial"/>
+        <a:font script="Hebr" typeface="Arial"/>
+        <a:font script="Thai" typeface="Cordia New"/>
+        <a:font script="Ethi" typeface="Nyala"/>
+        <a:font script="Beng" typeface="Vrinda"/>
+        <a:font script="Gujr" typeface="Shruti"/>
+        <a:font script="Khmr" typeface="DaunPenh"/>
+        <a:font script="Knda" typeface="Tunga"/>
+        <a:font script="Guru" typeface="Raavi"/>
+        <a:font script="Cans" typeface="Euphemia"/>
+        <a:font script="Cher" typeface="Plantagenet Cherokee"/>
+        <a:font script="Yiii" typeface="Microsoft Yi Baiti"/>
+        <a:font script="Tibt" typeface="Microsoft Himalaya"/>
+        <a:font script="Thaa" typeface="MV Boli"/>
+        <a:font script="Deva" typeface="Mangal"/>
+        <a:font script="Telu" typeface="Gautami"/>
+        <a:font script="Taml" typeface="Latha"/>
+        <a:font script="Syrc" typeface="Estrangelo Edessa"/>
+        <a:font script="Orya" typeface="Kalinga"/>
+        <a:font script="Mlym" typeface="Kartika"/>
+        <a:font script="Laoo" typeface="DokChampa"/>
+        <a:font script="Sinh" typeface="Iskoola Pota"/>
+        <a:font script="Mong" typeface="Mongolian Baiti"/>
+        <a:font script="Viet" typeface="Arial"/>
+        <a:font script="Uigh" typeface="Microsoft Uighur"/>
+        <a:font script="Geor" typeface="Sylfaen"/>
+        <a:font script="Armn" typeface="Arial"/>
+        <a:font script="Bugi" typeface="Leelawadee UI"/>
+        <a:font script="Bopo" typeface="Microsoft JhengHei"/>
+        <a:font script="Java" typeface="Javanese Text"/>
+        <a:font script="Lisu" typeface="Segoe UI"/>
+        <a:font script="Mymr" typeface="Myanmar Text"/>
+        <a:font script="Nkoo" typeface="Ebrima"/>
+        <a:font script="Olck" typeface="Nirmala UI"/>
+        <a:font script="Osma" typeface="Ebrima"/>
+        <a:font script="Phag" typeface="Phagspa"/>
+        <a:font script="Syrn" typeface="Estrangelo Edessa"/>
+        <a:font script="Syrj" typeface="Estrangelo Edessa"/>
+        <a:font script="Syre" typeface="Estrangelo Edessa"/>
+        <a:font script="Sora" typeface="Nirmala UI"/>
+        <a:font script="Tale" typeface="Microsoft Tai Le"/>
+        <a:font script="Talu" typeface="Microsoft New Tai Lue"/>
+        <a:font script="Tfng" typeface="Ebrima"/>
+      </a:minorFont>
+    </a:fontScheme>
+    <a:fmtScheme name="Office">
+      <a:fillStyleLst>
+        <a:solidFill>
+          <a:schemeClr val="phClr"/>
+        </a:solidFill>
+        <a:gradFill rotWithShape="1">
+          <a:gsLst>
+            <a:gs pos="0">
+              <a:schemeClr val="phClr">
+                <a:lumMod val="110000"/>
+                <a:satMod val="105000"/>
+                <a:tint val="67000"/>
+              </a:schemeClr>
+            </a:gs>
+            <a:gs pos="50000">
+              <a:schemeClr val="phClr">
+                <a:lumMod val="105000"/>
+                <a:satMod val="103000"/>
+                <a:tint val="73000"/>
+              </a:schemeClr>
+            </a:gs>
+            <a:gs pos="100000">
+              <a:schemeClr val="phClr">
+                <a:lumMod val="105000"/>
+                <a:satMod val="109000"/>
+                <a:tint val="81000"/>
+              </a:schemeClr>
+            </a:gs>
+          </a:gsLst>
+          <a:lin ang="5400000" scaled="0"/>
+        </a:gradFill>
+        <a:gradFill rotWithShape="1">
+          <a:gsLst>
+            <a:gs pos="0">
+              <a:schemeClr val="phClr">
+                <a:satMod val="103000"/>
+                <a:lumMod val="102000"/>
+                <a:tint val="94000"/>
+              </a:schemeClr>
+            </a:gs>
+            <a:gs pos="50000">
+              <a:schemeClr val="phClr">
+                <a:satMod val="110000"/>
+                <a:lumMod val="100000"/>
+                <a:shade val="100000"/>
+              </a:schemeClr>
+            </a:gs>
+            <a:gs pos="100000">
+              <a:schemeClr val="phClr">
+                <a:lumMod val="99000"/>
+                <a:satMod val="120000"/>
+                <a:shade val="78000"/>
+              </a:schemeClr>
+            </a:gs>
+          </a:gsLst>
+          <a:lin ang="5400000" scaled="0"/>
+        </a:gradFill>
+      </a:fillStyleLst>
+      <a:lnStyleLst>
+        <a:ln w="12700" cap="flat" cmpd="sng" algn="ctr">
+          <a:solidFill>
+            <a:schemeClr val="phClr"/>
+          </a:solidFill>
+          <a:prstDash val="solid"/>
+          <a:miter lim="800000"/>
+        </a:ln>
+        <a:ln w="19050" cap="flat" cmpd="sng" algn="ctr">
+          <a:solidFill>
+            <a:schemeClr val="phClr"/>
+          </a:solidFill>
+          <a:prstDash val="solid"/>
+          <a:miter lim="800000"/>
+        </a:ln>
+        <a:ln w="25400" cap="flat" cmpd="sng" algn="ctr">
+          <a:solidFill>
+            <a:schemeClr val="phClr"/>
+          </a:solidFill>
+          <a:prstDash val="solid"/>
+          <a:miter lim="800000"/>
+        </a:ln>
+      </a:lnStyleLst>
+      <a:effectStyleLst>
+        <a:effectStyle>
+          <a:effectLst/>
+        </a:effectStyle>
+        <a:effectStyle>
+          <a:effectLst/>
+        </a:effectStyle>
+        <a:effectStyle>
+          <a:effectLst>
+            <a:outerShdw blurRad="57150" dist="19050" dir="5400000" algn="ctr" rotWithShape="0">
+              <a:srgbClr val="000000">
+                <a:alpha val="63000"/>
+              </a:srgbClr>
+            </a:outerShdw>
+          </a:effectLst>
+        </a:effectStyle>
+      </a:effectStyleLst>
+      <a:bgFillStyleLst>
+        <a:solidFill>
+          <a:schemeClr val="phClr"/>
+        </a:solidFill>
+        <a:solidFill>
+          <a:schemeClr val="phClr">
+            <a:tint val="95000"/>
+            <a:satMod val="170000"/>
+          </a:schemeClr>
+        </a:solidFill>
+        <a:gradFill rotWithShape="1">
+          <a:gsLst>
+            <a:gs pos="0">
+              <a:schemeClr val="phClr">
+                <a:tint val="93000"/>
+                <a:satMod val="150000"/>
+                <a:shade val="98000"/>
+                <a:lumMod val="102000"/>
+              </a:schemeClr>
+            </a:gs>
+            <a:gs pos="50000">
+              <a:schemeClr val="phClr">
+                <a:tint val="98000"/>
+                <a:satMod val="130000"/>
+                <a:shade val="90000"/>
+                <a:lumMod val="103000"/>
+              </a:schemeClr>
+            </a:gs>
+            <a:gs pos="100000">
+              <a:schemeClr val="phClr">
+                <a:shade val="63000"/>
+                <a:satMod val="120000"/>
+              </a:schemeClr>
+            </a:gs>
+          </a:gsLst>
+          <a:lin ang="5400000" scaled="0"/>
+        </a:gradFill>
+      </a:bgFillStyleLst>
+    </a:fmtScheme>
+  </a:themeElements>
+  <a:objectDefaults>
+    <a:lnDef>
+      <a:spPr/>
+      <a:bodyPr/>
+      <a:lstStyle/>
+      <a:style>
+        <a:lnRef idx="2">
+          <a:schemeClr val="accent1"/>
+        </a:lnRef>
+        <a:fillRef idx="0">
+          <a:schemeClr val="accent1"/>
+        </a:fillRef>
+        <a:effectRef idx="1">
+          <a:schemeClr val="accent1"/>
+        </a:effectRef>
+        <a:fontRef idx="minor">
+          <a:schemeClr val="tx1"/>
+        </a:fontRef>
+      </a:style>
+    </a:lnDef>
+  </a:objectDefaults>
+  <a:extraClrSchemeLst/>
+  <a:extLst>
+    <a:ext uri="{05A4C25C-085E-4340-85A3-A5531E510DB2}">
+      <thm15:themeFamily xmlns:thm15="http://schemas.microsoft.com/office/thememl/2012/main" name="Office Theme" id="{2E142A2C-CD16-42D6-873A-C26D2A0506FA}" vid="{1BDDFF52-6CD6-40A5-AB3C-68EB2F1E4D0A}"/>
+    </a:ext>
+  </a:extLst>
+</a:theme>
 </file>